--- a/Lecture07_IV1/Lecture07_IVEstimation1.pptx
+++ b/Lecture07_IV1/Lecture07_IVEstimation1.pptx
@@ -5,63 +5,65 @@
     <p:sldMasterId id="2147483738" r:id="rId1"/>
   </p:sldMasterIdLst>
   <p:notesMasterIdLst>
-    <p:notesMasterId r:id="rId56"/>
+    <p:notesMasterId r:id="rId58"/>
   </p:notesMasterIdLst>
   <p:sldIdLst>
     <p:sldId id="256" r:id="rId2"/>
-    <p:sldId id="572" r:id="rId3"/>
-    <p:sldId id="573" r:id="rId4"/>
-    <p:sldId id="466" r:id="rId5"/>
-    <p:sldId id="533" r:id="rId6"/>
-    <p:sldId id="537" r:id="rId7"/>
-    <p:sldId id="470" r:id="rId8"/>
-    <p:sldId id="564" r:id="rId9"/>
-    <p:sldId id="563" r:id="rId10"/>
-    <p:sldId id="547" r:id="rId11"/>
-    <p:sldId id="538" r:id="rId12"/>
-    <p:sldId id="471" r:id="rId13"/>
-    <p:sldId id="474" r:id="rId14"/>
-    <p:sldId id="516" r:id="rId15"/>
-    <p:sldId id="515" r:id="rId16"/>
-    <p:sldId id="475" r:id="rId17"/>
-    <p:sldId id="565" r:id="rId18"/>
-    <p:sldId id="476" r:id="rId19"/>
-    <p:sldId id="477" r:id="rId20"/>
-    <p:sldId id="566" r:id="rId21"/>
-    <p:sldId id="514" r:id="rId22"/>
-    <p:sldId id="468" r:id="rId23"/>
-    <p:sldId id="467" r:id="rId24"/>
-    <p:sldId id="469" r:id="rId25"/>
-    <p:sldId id="419" r:id="rId26"/>
-    <p:sldId id="478" r:id="rId27"/>
-    <p:sldId id="517" r:id="rId28"/>
-    <p:sldId id="318" r:id="rId29"/>
-    <p:sldId id="319" r:id="rId30"/>
-    <p:sldId id="479" r:id="rId31"/>
-    <p:sldId id="526" r:id="rId32"/>
-    <p:sldId id="527" r:id="rId33"/>
-    <p:sldId id="528" r:id="rId34"/>
-    <p:sldId id="520" r:id="rId35"/>
-    <p:sldId id="481" r:id="rId36"/>
-    <p:sldId id="482" r:id="rId37"/>
-    <p:sldId id="569" r:id="rId38"/>
-    <p:sldId id="521" r:id="rId39"/>
-    <p:sldId id="522" r:id="rId40"/>
-    <p:sldId id="524" r:id="rId41"/>
-    <p:sldId id="490" r:id="rId42"/>
-    <p:sldId id="491" r:id="rId43"/>
-    <p:sldId id="492" r:id="rId44"/>
-    <p:sldId id="493" r:id="rId45"/>
-    <p:sldId id="494" r:id="rId46"/>
-    <p:sldId id="495" r:id="rId47"/>
-    <p:sldId id="575" r:id="rId48"/>
-    <p:sldId id="539" r:id="rId49"/>
-    <p:sldId id="480" r:id="rId50"/>
-    <p:sldId id="507" r:id="rId51"/>
-    <p:sldId id="510" r:id="rId52"/>
-    <p:sldId id="511" r:id="rId53"/>
-    <p:sldId id="560" r:id="rId54"/>
-    <p:sldId id="579" r:id="rId55"/>
+    <p:sldId id="397" r:id="rId3"/>
+    <p:sldId id="562" r:id="rId4"/>
+    <p:sldId id="572" r:id="rId5"/>
+    <p:sldId id="573" r:id="rId6"/>
+    <p:sldId id="466" r:id="rId7"/>
+    <p:sldId id="533" r:id="rId8"/>
+    <p:sldId id="537" r:id="rId9"/>
+    <p:sldId id="470" r:id="rId10"/>
+    <p:sldId id="564" r:id="rId11"/>
+    <p:sldId id="563" r:id="rId12"/>
+    <p:sldId id="547" r:id="rId13"/>
+    <p:sldId id="538" r:id="rId14"/>
+    <p:sldId id="471" r:id="rId15"/>
+    <p:sldId id="474" r:id="rId16"/>
+    <p:sldId id="516" r:id="rId17"/>
+    <p:sldId id="515" r:id="rId18"/>
+    <p:sldId id="475" r:id="rId19"/>
+    <p:sldId id="565" r:id="rId20"/>
+    <p:sldId id="476" r:id="rId21"/>
+    <p:sldId id="477" r:id="rId22"/>
+    <p:sldId id="566" r:id="rId23"/>
+    <p:sldId id="514" r:id="rId24"/>
+    <p:sldId id="468" r:id="rId25"/>
+    <p:sldId id="467" r:id="rId26"/>
+    <p:sldId id="469" r:id="rId27"/>
+    <p:sldId id="419" r:id="rId28"/>
+    <p:sldId id="478" r:id="rId29"/>
+    <p:sldId id="517" r:id="rId30"/>
+    <p:sldId id="318" r:id="rId31"/>
+    <p:sldId id="319" r:id="rId32"/>
+    <p:sldId id="479" r:id="rId33"/>
+    <p:sldId id="526" r:id="rId34"/>
+    <p:sldId id="527" r:id="rId35"/>
+    <p:sldId id="528" r:id="rId36"/>
+    <p:sldId id="520" r:id="rId37"/>
+    <p:sldId id="481" r:id="rId38"/>
+    <p:sldId id="482" r:id="rId39"/>
+    <p:sldId id="569" r:id="rId40"/>
+    <p:sldId id="521" r:id="rId41"/>
+    <p:sldId id="522" r:id="rId42"/>
+    <p:sldId id="524" r:id="rId43"/>
+    <p:sldId id="490" r:id="rId44"/>
+    <p:sldId id="491" r:id="rId45"/>
+    <p:sldId id="492" r:id="rId46"/>
+    <p:sldId id="493" r:id="rId47"/>
+    <p:sldId id="494" r:id="rId48"/>
+    <p:sldId id="495" r:id="rId49"/>
+    <p:sldId id="575" r:id="rId50"/>
+    <p:sldId id="539" r:id="rId51"/>
+    <p:sldId id="480" r:id="rId52"/>
+    <p:sldId id="507" r:id="rId53"/>
+    <p:sldId id="510" r:id="rId54"/>
+    <p:sldId id="511" r:id="rId55"/>
+    <p:sldId id="560" r:id="rId56"/>
+    <p:sldId id="579" r:id="rId57"/>
   </p:sldIdLst>
   <p:sldSz cx="12192000" cy="6858000"/>
   <p:notesSz cx="7010400" cy="9296400"/>
@@ -270,7 +272,7 @@
           <a:p>
             <a:fld id="{EF911157-0FC2-4F06-8D61-FD647FE4E19D}" type="datetimeFigureOut">
               <a:rPr lang="en-US" smtClean="0"/>
-              <a:t>7/22/2026</a:t>
+              <a:t>10/26/2026</a:t>
             </a:fld>
             <a:endParaRPr lang="en-US"/>
           </a:p>
@@ -668,7 +670,13 @@
   <p:cSld>
     <p:spTree>
       <p:nvGrpSpPr>
-        <p:cNvPr id="1" name=""/>
+        <p:cNvPr id="1" name="">
+          <a:extLst>
+            <a:ext uri="{FF2B5EF4-FFF2-40B4-BE49-F238E27FC236}">
+              <a16:creationId xmlns:a16="http://schemas.microsoft.com/office/drawing/2014/main" id="{DCAE5C3A-8AC3-FB12-69FD-6165599F98EE}"/>
+            </a:ext>
+          </a:extLst>
+        </p:cNvPr>
         <p:cNvGrpSpPr/>
         <p:nvPr/>
       </p:nvGrpSpPr>
@@ -682,7 +690,13 @@
       </p:grpSpPr>
       <p:sp>
         <p:nvSpPr>
-          <p:cNvPr id="2" name="Slide Image Placeholder 1"/>
+          <p:cNvPr id="2" name="Slide Image Placeholder 1">
+            <a:extLst>
+              <a:ext uri="{FF2B5EF4-FFF2-40B4-BE49-F238E27FC236}">
+                <a16:creationId xmlns:a16="http://schemas.microsoft.com/office/drawing/2014/main" id="{42AFCDE5-7EE6-E1A1-73F6-9AAA7286F416}"/>
+              </a:ext>
+            </a:extLst>
+          </p:cNvPr>
           <p:cNvSpPr>
             <a:spLocks noGrp="1" noRot="1" noChangeAspect="1"/>
           </p:cNvSpPr>
@@ -694,7 +708,13 @@
       </p:sp>
       <p:sp>
         <p:nvSpPr>
-          <p:cNvPr id="3" name="Notes Placeholder 2"/>
+          <p:cNvPr id="3" name="Notes Placeholder 2">
+            <a:extLst>
+              <a:ext uri="{FF2B5EF4-FFF2-40B4-BE49-F238E27FC236}">
+                <a16:creationId xmlns:a16="http://schemas.microsoft.com/office/drawing/2014/main" id="{E8AD204B-3DBB-221A-0377-4D1B4FD0372D}"/>
+              </a:ext>
+            </a:extLst>
+          </p:cNvPr>
           <p:cNvSpPr>
             <a:spLocks noGrp="1"/>
           </p:cNvSpPr>
@@ -707,16 +727,39 @@
           <a:bodyPr/>
           <a:lstStyle/>
           <a:p>
+            <a:pPr marL="0" marR="0" lvl="0" indent="0" algn="l" defTabSz="914400" rtl="0" eaLnBrk="1" fontAlgn="auto" latinLnBrk="0" hangingPunct="1">
+              <a:lnSpc>
+                <a:spcPct val="100000"/>
+              </a:lnSpc>
+              <a:spcBef>
+                <a:spcPts val="0"/>
+              </a:spcBef>
+              <a:spcAft>
+                <a:spcPts val="0"/>
+              </a:spcAft>
+              <a:buClrTx/>
+              <a:buSzTx/>
+              <a:buFontTx/>
+              <a:buNone/>
+              <a:tabLst/>
+              <a:defRPr/>
+            </a:pPr>
             <a:r>
               <a:rPr lang="en-US" dirty="0"/>
-              <a:t>This is the right way to discuss IV: what things directly lead to the outcome on their own (exogenous), and what things are jointly determined in a more complex system (endogenous)?</a:t>
-            </a:r>
-          </a:p>
-        </p:txBody>
-      </p:sp>
-      <p:sp>
-        <p:nvSpPr>
-          <p:cNvPr id="4" name="Slide Number Placeholder 3"/>
+              <a:t>Recommend looking at the related invited commentary as well to get a sense of this better. https://jamanetwork.com/journals/jamainternalmedicine/article-abstract/1108791</a:t>
+            </a:r>
+          </a:p>
+        </p:txBody>
+      </p:sp>
+      <p:sp>
+        <p:nvSpPr>
+          <p:cNvPr id="4" name="Slide Number Placeholder 3">
+            <a:extLst>
+              <a:ext uri="{FF2B5EF4-FFF2-40B4-BE49-F238E27FC236}">
+                <a16:creationId xmlns:a16="http://schemas.microsoft.com/office/drawing/2014/main" id="{72E2FF48-8346-EB57-7125-E346D30DA567}"/>
+              </a:ext>
+            </a:extLst>
+          </p:cNvPr>
           <p:cNvSpPr>
             <a:spLocks noGrp="1"/>
           </p:cNvSpPr>
@@ -740,7 +783,7 @@
     </p:spTree>
     <p:extLst>
       <p:ext uri="{BB962C8B-B14F-4D97-AF65-F5344CB8AC3E}">
-        <p14:creationId xmlns:p14="http://schemas.microsoft.com/office/powerpoint/2010/main" val="3849794557"/>
+        <p14:creationId xmlns:p14="http://schemas.microsoft.com/office/powerpoint/2010/main" val="1977127807"/>
       </p:ext>
     </p:extLst>
   </p:cSld>
@@ -755,7 +798,13 @@
   <p:cSld>
     <p:spTree>
       <p:nvGrpSpPr>
-        <p:cNvPr id="1" name=""/>
+        <p:cNvPr id="1" name="">
+          <a:extLst>
+            <a:ext uri="{FF2B5EF4-FFF2-40B4-BE49-F238E27FC236}">
+              <a16:creationId xmlns:a16="http://schemas.microsoft.com/office/drawing/2014/main" id="{E05E8907-F9D5-DEF5-BB72-F8E64F6D043A}"/>
+            </a:ext>
+          </a:extLst>
+        </p:cNvPr>
         <p:cNvGrpSpPr/>
         <p:nvPr/>
       </p:nvGrpSpPr>
@@ -769,7 +818,13 @@
       </p:grpSpPr>
       <p:sp>
         <p:nvSpPr>
-          <p:cNvPr id="2" name="Slide Image Placeholder 1"/>
+          <p:cNvPr id="2" name="Slide Image Placeholder 1">
+            <a:extLst>
+              <a:ext uri="{FF2B5EF4-FFF2-40B4-BE49-F238E27FC236}">
+                <a16:creationId xmlns:a16="http://schemas.microsoft.com/office/drawing/2014/main" id="{83DDC728-4717-218E-C23D-0A292A23370D}"/>
+              </a:ext>
+            </a:extLst>
+          </p:cNvPr>
           <p:cNvSpPr>
             <a:spLocks noGrp="1" noRot="1" noChangeAspect="1"/>
           </p:cNvSpPr>
@@ -781,7 +836,13 @@
       </p:sp>
       <p:sp>
         <p:nvSpPr>
-          <p:cNvPr id="3" name="Notes Placeholder 2"/>
+          <p:cNvPr id="3" name="Notes Placeholder 2">
+            <a:extLst>
+              <a:ext uri="{FF2B5EF4-FFF2-40B4-BE49-F238E27FC236}">
+                <a16:creationId xmlns:a16="http://schemas.microsoft.com/office/drawing/2014/main" id="{C0371E61-8BAE-9A96-0D43-601D3618D5D4}"/>
+              </a:ext>
+            </a:extLst>
+          </p:cNvPr>
           <p:cNvSpPr>
             <a:spLocks noGrp="1"/>
           </p:cNvSpPr>
@@ -794,22 +855,39 @@
           <a:bodyPr/>
           <a:lstStyle/>
           <a:p>
+            <a:pPr marL="0" marR="0" lvl="0" indent="0" algn="l" defTabSz="914400" rtl="0" eaLnBrk="1" fontAlgn="auto" latinLnBrk="0" hangingPunct="1">
+              <a:lnSpc>
+                <a:spcPct val="100000"/>
+              </a:lnSpc>
+              <a:spcBef>
+                <a:spcPts val="0"/>
+              </a:spcBef>
+              <a:spcAft>
+                <a:spcPts val="0"/>
+              </a:spcAft>
+              <a:buClrTx/>
+              <a:buSzTx/>
+              <a:buFontTx/>
+              <a:buNone/>
+              <a:tabLst/>
+              <a:defRPr/>
+            </a:pPr>
             <a:r>
               <a:rPr lang="en-US" dirty="0"/>
-              <a:t>Let’s start with just part of the story: the effect of shortening waiting times for transplants on positive outcomes. We can’t randomize this (why?)</a:t>
-            </a:r>
-          </a:p>
-          <a:p>
-            <a:r>
-              <a:rPr lang="en-US" dirty="0"/>
-              <a:t>But we also can’t just use observational data in a simple regression (why? – selection! patients who are more likely to have poor outcomes may also have different waiting times)</a:t>
-            </a:r>
-          </a:p>
-        </p:txBody>
-      </p:sp>
-      <p:sp>
-        <p:nvSpPr>
-          <p:cNvPr id="4" name="Slide Number Placeholder 3"/>
+              <a:t>Note: if you want the correct way to talk about this, you need to read an economics paper. Like the dialysis one. Very careful with language even though everyone else hates us for it. </a:t>
+            </a:r>
+          </a:p>
+        </p:txBody>
+      </p:sp>
+      <p:sp>
+        <p:nvSpPr>
+          <p:cNvPr id="4" name="Slide Number Placeholder 3">
+            <a:extLst>
+              <a:ext uri="{FF2B5EF4-FFF2-40B4-BE49-F238E27FC236}">
+                <a16:creationId xmlns:a16="http://schemas.microsoft.com/office/drawing/2014/main" id="{AA7420C5-105C-A464-BC94-5AF2732DFAF0}"/>
+              </a:ext>
+            </a:extLst>
+          </p:cNvPr>
           <p:cNvSpPr>
             <a:spLocks noGrp="1"/>
           </p:cNvSpPr>
@@ -833,7 +911,7 @@
     </p:spTree>
     <p:extLst>
       <p:ext uri="{BB962C8B-B14F-4D97-AF65-F5344CB8AC3E}">
-        <p14:creationId xmlns:p14="http://schemas.microsoft.com/office/powerpoint/2010/main" val="3856246436"/>
+        <p14:creationId xmlns:p14="http://schemas.microsoft.com/office/powerpoint/2010/main" val="2465575120"/>
       </p:ext>
     </p:extLst>
   </p:cSld>
@@ -889,7 +967,7 @@
           <a:p>
             <a:r>
               <a:rPr lang="en-US" dirty="0"/>
-              <a:t>Examples of selection – note that not all of these confounders are things we can deal with. </a:t>
+              <a:t>This is the right way to discuss IV: what things directly lead to the outcome on their own (exogenous), and what things are jointly determined in a more complex system (endogenous)?</a:t>
             </a:r>
           </a:p>
         </p:txBody>
@@ -920,7 +998,7 @@
     </p:spTree>
     <p:extLst>
       <p:ext uri="{BB962C8B-B14F-4D97-AF65-F5344CB8AC3E}">
-        <p14:creationId xmlns:p14="http://schemas.microsoft.com/office/powerpoint/2010/main" val="96065351"/>
+        <p14:creationId xmlns:p14="http://schemas.microsoft.com/office/powerpoint/2010/main" val="3849794557"/>
       </p:ext>
     </p:extLst>
   </p:cSld>
@@ -976,7 +1054,13 @@
           <a:p>
             <a:r>
               <a:rPr lang="en-US" dirty="0"/>
-              <a:t>Exogenous variables: age, demographics. What about education? Whether or not you need a transplant in the first place? This starts to become a gray area quickly. </a:t>
+              <a:t>Let’s start with just part of the story: the effect of shortening waiting times for transplants on positive outcomes. We can’t randomize this (why?)</a:t>
+            </a:r>
+          </a:p>
+          <a:p>
+            <a:r>
+              <a:rPr lang="en-US" dirty="0"/>
+              <a:t>But we also can’t just use observational data in a simple regression (why? – selection! patients who are more likely to have poor outcomes may also have different waiting times)</a:t>
             </a:r>
           </a:p>
         </p:txBody>
@@ -1007,7 +1091,7 @@
     </p:spTree>
     <p:extLst>
       <p:ext uri="{BB962C8B-B14F-4D97-AF65-F5344CB8AC3E}">
-        <p14:creationId xmlns:p14="http://schemas.microsoft.com/office/powerpoint/2010/main" val="925015819"/>
+        <p14:creationId xmlns:p14="http://schemas.microsoft.com/office/powerpoint/2010/main" val="3856246436"/>
       </p:ext>
     </p:extLst>
   </p:cSld>
@@ -1063,7 +1147,7 @@
           <a:p>
             <a:r>
               <a:rPr lang="en-US" dirty="0"/>
-              <a:t>Things that are almost surely endogenous: health outcomes, decision to seek care, etc. (any y of interest also). Really, endogenous things are DAG-determined and *they can’t be controlled for*</a:t>
+              <a:t>Examples of selection – note that not all of these confounders are things we can deal with. </a:t>
             </a:r>
           </a:p>
         </p:txBody>
@@ -1094,7 +1178,7 @@
     </p:spTree>
     <p:extLst>
       <p:ext uri="{BB962C8B-B14F-4D97-AF65-F5344CB8AC3E}">
-        <p14:creationId xmlns:p14="http://schemas.microsoft.com/office/powerpoint/2010/main" val="3584559733"/>
+        <p14:creationId xmlns:p14="http://schemas.microsoft.com/office/powerpoint/2010/main" val="96065351"/>
       </p:ext>
     </p:extLst>
   </p:cSld>
@@ -1150,7 +1234,7 @@
           <a:p>
             <a:r>
               <a:rPr lang="en-US" dirty="0"/>
-              <a:t>One version of endogeneity is OVB with an unmeasurable variable --- others include jointly determined variables, or strategic selection. </a:t>
+              <a:t>Exogenous variables: age, demographics. What about education? Whether or not you need a transplant in the first place? This starts to become a gray area quickly. </a:t>
             </a:r>
           </a:p>
         </p:txBody>
@@ -1181,7 +1265,7 @@
     </p:spTree>
     <p:extLst>
       <p:ext uri="{BB962C8B-B14F-4D97-AF65-F5344CB8AC3E}">
-        <p14:creationId xmlns:p14="http://schemas.microsoft.com/office/powerpoint/2010/main" val="1505559271"/>
+        <p14:creationId xmlns:p14="http://schemas.microsoft.com/office/powerpoint/2010/main" val="925015819"/>
       </p:ext>
     </p:extLst>
   </p:cSld>
@@ -1237,7 +1321,7 @@
           <a:p>
             <a:r>
               <a:rPr lang="en-US" dirty="0"/>
-              <a:t>Moving health knowledge out of the error term could make decision to seek care an exogenous variable – but how do we measure that? But not all back doors can be closed! Without perfect data or randomization, we can’t make everything exogenous by shutting down a backdoor. </a:t>
+              <a:t>Things that are almost surely endogenous: health outcomes, decision to seek care, etc. (any y of interest also). Really, endogenous things are DAG-determined and *they can’t be controlled for*</a:t>
             </a:r>
           </a:p>
         </p:txBody>
@@ -1268,7 +1352,7 @@
     </p:spTree>
     <p:extLst>
       <p:ext uri="{BB962C8B-B14F-4D97-AF65-F5344CB8AC3E}">
-        <p14:creationId xmlns:p14="http://schemas.microsoft.com/office/powerpoint/2010/main" val="2614238403"/>
+        <p14:creationId xmlns:p14="http://schemas.microsoft.com/office/powerpoint/2010/main" val="3584559733"/>
       </p:ext>
     </p:extLst>
   </p:cSld>
@@ -1283,13 +1367,7 @@
   <p:cSld>
     <p:spTree>
       <p:nvGrpSpPr>
-        <p:cNvPr id="1" name="">
-          <a:extLst>
-            <a:ext uri="{FF2B5EF4-FFF2-40B4-BE49-F238E27FC236}">
-              <a16:creationId xmlns:a16="http://schemas.microsoft.com/office/drawing/2014/main" id="{80FA0B89-2070-6163-A3C1-61E0E8DF20C3}"/>
-            </a:ext>
-          </a:extLst>
-        </p:cNvPr>
+        <p:cNvPr id="1" name=""/>
         <p:cNvGrpSpPr/>
         <p:nvPr/>
       </p:nvGrpSpPr>
@@ -1303,13 +1381,7 @@
       </p:grpSpPr>
       <p:sp>
         <p:nvSpPr>
-          <p:cNvPr id="2" name="Slide Image Placeholder 1">
-            <a:extLst>
-              <a:ext uri="{FF2B5EF4-FFF2-40B4-BE49-F238E27FC236}">
-                <a16:creationId xmlns:a16="http://schemas.microsoft.com/office/drawing/2014/main" id="{1D1C4C8B-B559-3CDA-29D8-FD024B16363F}"/>
-              </a:ext>
-            </a:extLst>
-          </p:cNvPr>
+          <p:cNvPr id="2" name="Slide Image Placeholder 1"/>
           <p:cNvSpPr>
             <a:spLocks noGrp="1" noRot="1" noChangeAspect="1"/>
           </p:cNvSpPr>
@@ -1321,13 +1393,7 @@
       </p:sp>
       <p:sp>
         <p:nvSpPr>
-          <p:cNvPr id="3" name="Notes Placeholder 2">
-            <a:extLst>
-              <a:ext uri="{FF2B5EF4-FFF2-40B4-BE49-F238E27FC236}">
-                <a16:creationId xmlns:a16="http://schemas.microsoft.com/office/drawing/2014/main" id="{CAC550C8-5358-B056-E1A5-BDA84D61E4BB}"/>
-              </a:ext>
-            </a:extLst>
-          </p:cNvPr>
+          <p:cNvPr id="3" name="Notes Placeholder 2"/>
           <p:cNvSpPr>
             <a:spLocks noGrp="1"/>
           </p:cNvSpPr>
@@ -1342,20 +1408,14 @@
           <a:p>
             <a:r>
               <a:rPr lang="en-US" dirty="0"/>
-              <a:t>Moving health knowledge out of the error term could make decision to seek care an exogenous variable – but how do we measure that? But not all back doors can be closed! Without perfect data or randomization, we can’t make everything exogenous by shutting down a backdoor. </a:t>
-            </a:r>
-          </a:p>
-        </p:txBody>
-      </p:sp>
-      <p:sp>
-        <p:nvSpPr>
-          <p:cNvPr id="4" name="Slide Number Placeholder 3">
-            <a:extLst>
-              <a:ext uri="{FF2B5EF4-FFF2-40B4-BE49-F238E27FC236}">
-                <a16:creationId xmlns:a16="http://schemas.microsoft.com/office/drawing/2014/main" id="{6FB7A81D-54A4-B1B8-953E-C21988DFFFCB}"/>
-              </a:ext>
-            </a:extLst>
-          </p:cNvPr>
+              <a:t>One version of endogeneity is OVB with an unmeasurable variable --- others include jointly determined variables, or strategic selection. </a:t>
+            </a:r>
+          </a:p>
+        </p:txBody>
+      </p:sp>
+      <p:sp>
+        <p:nvSpPr>
+          <p:cNvPr id="4" name="Slide Number Placeholder 3"/>
           <p:cNvSpPr>
             <a:spLocks noGrp="1"/>
           </p:cNvSpPr>
@@ -1379,7 +1439,7 @@
     </p:spTree>
     <p:extLst>
       <p:ext uri="{BB962C8B-B14F-4D97-AF65-F5344CB8AC3E}">
-        <p14:creationId xmlns:p14="http://schemas.microsoft.com/office/powerpoint/2010/main" val="546699277"/>
+        <p14:creationId xmlns:p14="http://schemas.microsoft.com/office/powerpoint/2010/main" val="1505559271"/>
       </p:ext>
     </p:extLst>
   </p:cSld>
@@ -1435,7 +1495,7 @@
           <a:p>
             <a:r>
               <a:rPr lang="en-US" dirty="0"/>
-              <a:t>What do we do when endogeneity threatens our main treatment of interest? Our approach today is what we resort to when we can’t close all backdoors – we take a front door approach and simulate randomization</a:t>
+              <a:t>Moving health knowledge out of the error term could make decision to seek care an exogenous variable – but how do we measure that? But not all back doors can be closed! Without perfect data or randomization, we can’t make everything exogenous by shutting down a backdoor. </a:t>
             </a:r>
           </a:p>
         </p:txBody>
@@ -1457,7 +1517,7 @@
           <a:p>
             <a:fld id="{4AF79E1B-2C51-4B9B-8EA4-26DE9E345AFF}" type="slidenum">
               <a:rPr lang="en-US" smtClean="0"/>
-              <a:t>19</a:t>
+              <a:t>18</a:t>
             </a:fld>
             <a:endParaRPr lang="en-US"/>
           </a:p>
@@ -1466,7 +1526,7 @@
     </p:spTree>
     <p:extLst>
       <p:ext uri="{BB962C8B-B14F-4D97-AF65-F5344CB8AC3E}">
-        <p14:creationId xmlns:p14="http://schemas.microsoft.com/office/powerpoint/2010/main" val="4213713924"/>
+        <p14:creationId xmlns:p14="http://schemas.microsoft.com/office/powerpoint/2010/main" val="2614238403"/>
       </p:ext>
     </p:extLst>
   </p:cSld>
@@ -1484,7 +1544,7 @@
         <p:cNvPr id="1" name="">
           <a:extLst>
             <a:ext uri="{FF2B5EF4-FFF2-40B4-BE49-F238E27FC236}">
-              <a16:creationId xmlns:a16="http://schemas.microsoft.com/office/drawing/2014/main" id="{F909709B-DEBC-51F2-E671-848B61B20C76}"/>
+              <a16:creationId xmlns:a16="http://schemas.microsoft.com/office/drawing/2014/main" id="{80FA0B89-2070-6163-A3C1-61E0E8DF20C3}"/>
             </a:ext>
           </a:extLst>
         </p:cNvPr>
@@ -1504,7 +1564,7 @@
           <p:cNvPr id="2" name="Slide Image Placeholder 1">
             <a:extLst>
               <a:ext uri="{FF2B5EF4-FFF2-40B4-BE49-F238E27FC236}">
-                <a16:creationId xmlns:a16="http://schemas.microsoft.com/office/drawing/2014/main" id="{68EFB31E-2B4D-7D4C-2D37-24C25B899A3E}"/>
+                <a16:creationId xmlns:a16="http://schemas.microsoft.com/office/drawing/2014/main" id="{1D1C4C8B-B559-3CDA-29D8-FD024B16363F}"/>
               </a:ext>
             </a:extLst>
           </p:cNvPr>
@@ -1522,7 +1582,7 @@
           <p:cNvPr id="3" name="Notes Placeholder 2">
             <a:extLst>
               <a:ext uri="{FF2B5EF4-FFF2-40B4-BE49-F238E27FC236}">
-                <a16:creationId xmlns:a16="http://schemas.microsoft.com/office/drawing/2014/main" id="{8531AF14-336F-5A69-601D-D9707F27A06C}"/>
+                <a16:creationId xmlns:a16="http://schemas.microsoft.com/office/drawing/2014/main" id="{CAC550C8-5358-B056-E1A5-BDA84D61E4BB}"/>
               </a:ext>
             </a:extLst>
           </p:cNvPr>
@@ -1540,37 +1600,7 @@
           <a:p>
             <a:r>
               <a:rPr lang="en-US" dirty="0"/>
-              <a:t>Walk through this one more time for both case studies (a good and bad IV). Why are vaccines and PCIs endogenous? </a:t>
-            </a:r>
-          </a:p>
-          <a:p>
-            <a:pPr marL="228600" indent="-228600">
-              <a:buAutoNum type="arabicPeriod"/>
-            </a:pPr>
-            <a:r>
-              <a:rPr lang="en-US" dirty="0"/>
-              <a:t>For vaccines, it was vaccination rates of those around you</a:t>
-            </a:r>
-          </a:p>
-          <a:p>
-            <a:pPr marL="228600" indent="-228600">
-              <a:buAutoNum type="arabicPeriod"/>
-            </a:pPr>
-            <a:r>
-              <a:rPr lang="en-US" dirty="0"/>
-              <a:t>For PCIs, exogenous variation came from </a:t>
-            </a:r>
-            <a:r>
-              <a:rPr lang="en-US" i="1" dirty="0"/>
-              <a:t>differential distance: </a:t>
-            </a:r>
-            <a:r>
-              <a:rPr lang="en-US" i="0" dirty="0"/>
-              <a:t>how much farther is it from you to a PCI hospital than it is from you to your closest hospital. </a:t>
-            </a:r>
-            <a:r>
-              <a:rPr lang="en-US" dirty="0"/>
-              <a:t> </a:t>
+              <a:t>Moving health knowledge out of the error term could make decision to seek care an exogenous variable – but how do we measure that? But not all back doors can be closed! Without perfect data or randomization, we can’t make everything exogenous by shutting down a backdoor. </a:t>
             </a:r>
           </a:p>
         </p:txBody>
@@ -1580,7 +1610,7 @@
           <p:cNvPr id="4" name="Slide Number Placeholder 3">
             <a:extLst>
               <a:ext uri="{FF2B5EF4-FFF2-40B4-BE49-F238E27FC236}">
-                <a16:creationId xmlns:a16="http://schemas.microsoft.com/office/drawing/2014/main" id="{9A4FE64F-DFED-F3A6-8169-66AB4A9E79EA}"/>
+                <a16:creationId xmlns:a16="http://schemas.microsoft.com/office/drawing/2014/main" id="{6FB7A81D-54A4-B1B8-953E-C21988DFFFCB}"/>
               </a:ext>
             </a:extLst>
           </p:cNvPr>
@@ -1598,7 +1628,7 @@
           <a:p>
             <a:fld id="{4AF79E1B-2C51-4B9B-8EA4-26DE9E345AFF}" type="slidenum">
               <a:rPr lang="en-US" smtClean="0"/>
-              <a:t>20</a:t>
+              <a:t>19</a:t>
             </a:fld>
             <a:endParaRPr lang="en-US"/>
           </a:p>
@@ -1607,7 +1637,7 @@
     </p:spTree>
     <p:extLst>
       <p:ext uri="{BB962C8B-B14F-4D97-AF65-F5344CB8AC3E}">
-        <p14:creationId xmlns:p14="http://schemas.microsoft.com/office/powerpoint/2010/main" val="3930143010"/>
+        <p14:creationId xmlns:p14="http://schemas.microsoft.com/office/powerpoint/2010/main" val="546699277"/>
       </p:ext>
     </p:extLst>
   </p:cSld>
@@ -1622,13 +1652,7 @@
   <p:cSld>
     <p:spTree>
       <p:nvGrpSpPr>
-        <p:cNvPr id="1" name="">
-          <a:extLst>
-            <a:ext uri="{FF2B5EF4-FFF2-40B4-BE49-F238E27FC236}">
-              <a16:creationId xmlns:a16="http://schemas.microsoft.com/office/drawing/2014/main" id="{E8A3BA94-DC28-1352-3C07-AEAE27138B69}"/>
-            </a:ext>
-          </a:extLst>
-        </p:cNvPr>
+        <p:cNvPr id="1" name=""/>
         <p:cNvGrpSpPr/>
         <p:nvPr/>
       </p:nvGrpSpPr>
@@ -1642,13 +1666,7 @@
       </p:grpSpPr>
       <p:sp>
         <p:nvSpPr>
-          <p:cNvPr id="2" name="Slide Image Placeholder 1">
-            <a:extLst>
-              <a:ext uri="{FF2B5EF4-FFF2-40B4-BE49-F238E27FC236}">
-                <a16:creationId xmlns:a16="http://schemas.microsoft.com/office/drawing/2014/main" id="{3BD6554B-8D29-BEFF-7D37-D4EFC60DCD2A}"/>
-              </a:ext>
-            </a:extLst>
-          </p:cNvPr>
+          <p:cNvPr id="2" name="Slide Image Placeholder 1"/>
           <p:cNvSpPr>
             <a:spLocks noGrp="1" noRot="1" noChangeAspect="1"/>
           </p:cNvSpPr>
@@ -1660,13 +1678,7 @@
       </p:sp>
       <p:sp>
         <p:nvSpPr>
-          <p:cNvPr id="3" name="Notes Placeholder 2">
-            <a:extLst>
-              <a:ext uri="{FF2B5EF4-FFF2-40B4-BE49-F238E27FC236}">
-                <a16:creationId xmlns:a16="http://schemas.microsoft.com/office/drawing/2014/main" id="{48478A20-29F4-D458-04D9-69EC6779FFF2}"/>
-              </a:ext>
-            </a:extLst>
-          </p:cNvPr>
+          <p:cNvPr id="3" name="Notes Placeholder 2"/>
           <p:cNvSpPr>
             <a:spLocks noGrp="1"/>
           </p:cNvSpPr>
@@ -1681,20 +1693,14 @@
           <a:p>
             <a:r>
               <a:rPr lang="en-US" dirty="0"/>
-              <a:t>So far, we’ve focused on the backdoor criterion – can we close paths that stand in our way? Matching and controlling for covariates are two primary approaches. </a:t>
-            </a:r>
-          </a:p>
-        </p:txBody>
-      </p:sp>
-      <p:sp>
-        <p:nvSpPr>
-          <p:cNvPr id="4" name="Slide Number Placeholder 3">
-            <a:extLst>
-              <a:ext uri="{FF2B5EF4-FFF2-40B4-BE49-F238E27FC236}">
-                <a16:creationId xmlns:a16="http://schemas.microsoft.com/office/drawing/2014/main" id="{6648DE81-CEB6-02E2-BDB5-BCDB69040F96}"/>
-              </a:ext>
-            </a:extLst>
-          </p:cNvPr>
+              <a:t>Just wanted to share this interesting paper – since we are talking so much about bias. Note all the different regressions, just like what happened in Assignment 2. </a:t>
+            </a:r>
+          </a:p>
+        </p:txBody>
+      </p:sp>
+      <p:sp>
+        <p:nvSpPr>
+          <p:cNvPr id="4" name="Slide Number Placeholder 3"/>
           <p:cNvSpPr>
             <a:spLocks noGrp="1"/>
           </p:cNvSpPr>
@@ -1718,7 +1724,7 @@
     </p:spTree>
     <p:extLst>
       <p:ext uri="{BB962C8B-B14F-4D97-AF65-F5344CB8AC3E}">
-        <p14:creationId xmlns:p14="http://schemas.microsoft.com/office/powerpoint/2010/main" val="3099295605"/>
+        <p14:creationId xmlns:p14="http://schemas.microsoft.com/office/powerpoint/2010/main" val="4163358638"/>
       </p:ext>
     </p:extLst>
   </p:cSld>
@@ -1774,7 +1780,7 @@
           <a:p>
             <a:r>
               <a:rPr lang="en-US" dirty="0"/>
-              <a:t>Without quasi-random variation, you are pretty much up a creek for this kind of endogeneity. </a:t>
+              <a:t>What do we do when endogeneity threatens our main treatment of interest? Our approach today is what we resort to when we can’t close all backdoors – we take a front door approach and simulate randomization</a:t>
             </a:r>
           </a:p>
         </p:txBody>
@@ -1805,7 +1811,7 @@
     </p:spTree>
     <p:extLst>
       <p:ext uri="{BB962C8B-B14F-4D97-AF65-F5344CB8AC3E}">
-        <p14:creationId xmlns:p14="http://schemas.microsoft.com/office/powerpoint/2010/main" val="2660768713"/>
+        <p14:creationId xmlns:p14="http://schemas.microsoft.com/office/powerpoint/2010/main" val="4213713924"/>
       </p:ext>
     </p:extLst>
   </p:cSld>
@@ -1820,7 +1826,13 @@
   <p:cSld>
     <p:spTree>
       <p:nvGrpSpPr>
-        <p:cNvPr id="1" name=""/>
+        <p:cNvPr id="1" name="">
+          <a:extLst>
+            <a:ext uri="{FF2B5EF4-FFF2-40B4-BE49-F238E27FC236}">
+              <a16:creationId xmlns:a16="http://schemas.microsoft.com/office/drawing/2014/main" id="{F909709B-DEBC-51F2-E671-848B61B20C76}"/>
+            </a:ext>
+          </a:extLst>
+        </p:cNvPr>
         <p:cNvGrpSpPr/>
         <p:nvPr/>
       </p:nvGrpSpPr>
@@ -1834,7 +1846,13 @@
       </p:grpSpPr>
       <p:sp>
         <p:nvSpPr>
-          <p:cNvPr id="2" name="Slide Image Placeholder 1"/>
+          <p:cNvPr id="2" name="Slide Image Placeholder 1">
+            <a:extLst>
+              <a:ext uri="{FF2B5EF4-FFF2-40B4-BE49-F238E27FC236}">
+                <a16:creationId xmlns:a16="http://schemas.microsoft.com/office/drawing/2014/main" id="{68EFB31E-2B4D-7D4C-2D37-24C25B899A3E}"/>
+              </a:ext>
+            </a:extLst>
+          </p:cNvPr>
           <p:cNvSpPr>
             <a:spLocks noGrp="1" noRot="1" noChangeAspect="1"/>
           </p:cNvSpPr>
@@ -1846,7 +1864,13 @@
       </p:sp>
       <p:sp>
         <p:nvSpPr>
-          <p:cNvPr id="3" name="Notes Placeholder 2"/>
+          <p:cNvPr id="3" name="Notes Placeholder 2">
+            <a:extLst>
+              <a:ext uri="{FF2B5EF4-FFF2-40B4-BE49-F238E27FC236}">
+                <a16:creationId xmlns:a16="http://schemas.microsoft.com/office/drawing/2014/main" id="{8531AF14-336F-5A69-601D-D9707F27A06C}"/>
+              </a:ext>
+            </a:extLst>
+          </p:cNvPr>
           <p:cNvSpPr>
             <a:spLocks noGrp="1"/>
           </p:cNvSpPr>
@@ -1860,17 +1884,51 @@
           <a:lstStyle/>
           <a:p>
             <a:r>
-              <a:rPr lang="en-US" dirty="0">
-                <a:cs typeface="Calibri"/>
-              </a:rPr>
-              <a:t>In an experiment, we generate variation (random assignment) and then just isolate the part of the treatment driven by that random variation (we compare across treatment and control groups). IV does the same, except isolating the part of the treatment driven by quasi-random, natural circumstances – the instrument. </a:t>
-            </a:r>
-          </a:p>
-        </p:txBody>
-      </p:sp>
-      <p:sp>
-        <p:nvSpPr>
-          <p:cNvPr id="4" name="Slide Number Placeholder 3"/>
+              <a:rPr lang="en-US" dirty="0"/>
+              <a:t>Walk through this one more time for both case studies (a good and bad IV). Why are vaccines and PCIs endogenous? </a:t>
+            </a:r>
+          </a:p>
+          <a:p>
+            <a:pPr marL="228600" indent="-228600">
+              <a:buAutoNum type="arabicPeriod"/>
+            </a:pPr>
+            <a:r>
+              <a:rPr lang="en-US" dirty="0"/>
+              <a:t>For vaccines, it was vaccination rates of those around you</a:t>
+            </a:r>
+          </a:p>
+          <a:p>
+            <a:pPr marL="228600" indent="-228600">
+              <a:buAutoNum type="arabicPeriod"/>
+            </a:pPr>
+            <a:r>
+              <a:rPr lang="en-US" dirty="0"/>
+              <a:t>For PCIs, exogenous variation came from </a:t>
+            </a:r>
+            <a:r>
+              <a:rPr lang="en-US" i="1" dirty="0"/>
+              <a:t>differential distance: </a:t>
+            </a:r>
+            <a:r>
+              <a:rPr lang="en-US" i="0" dirty="0"/>
+              <a:t>how much farther is it from you to a PCI hospital than it is from you to your closest hospital. </a:t>
+            </a:r>
+            <a:r>
+              <a:rPr lang="en-US" dirty="0"/>
+              <a:t> </a:t>
+            </a:r>
+          </a:p>
+        </p:txBody>
+      </p:sp>
+      <p:sp>
+        <p:nvSpPr>
+          <p:cNvPr id="4" name="Slide Number Placeholder 3">
+            <a:extLst>
+              <a:ext uri="{FF2B5EF4-FFF2-40B4-BE49-F238E27FC236}">
+                <a16:creationId xmlns:a16="http://schemas.microsoft.com/office/drawing/2014/main" id="{9A4FE64F-DFED-F3A6-8169-66AB4A9E79EA}"/>
+              </a:ext>
+            </a:extLst>
+          </p:cNvPr>
           <p:cNvSpPr>
             <a:spLocks noGrp="1"/>
           </p:cNvSpPr>
@@ -1894,7 +1952,7 @@
     </p:spTree>
     <p:extLst>
       <p:ext uri="{BB962C8B-B14F-4D97-AF65-F5344CB8AC3E}">
-        <p14:creationId xmlns:p14="http://schemas.microsoft.com/office/powerpoint/2010/main" val="2665876928"/>
+        <p14:creationId xmlns:p14="http://schemas.microsoft.com/office/powerpoint/2010/main" val="3930143010"/>
       </p:ext>
     </p:extLst>
   </p:cSld>
@@ -1949,10 +2007,8 @@
           <a:lstStyle/>
           <a:p>
             <a:r>
-              <a:rPr lang="en-US" dirty="0">
-                <a:cs typeface="Calibri"/>
-              </a:rPr>
-              <a:t>So we: (1) use the instrument to explain the treatment, (2) focus only on the part of the treatment explained by the instrument, and (3) use that to look at the instrument-explained part of the outcome. Basically, we’re splitting the effect of treatment into its endogenous and exogenous parts, and isolating just the exogenous part. </a:t>
+              <a:rPr lang="en-US" dirty="0"/>
+              <a:t>Without quasi-random variation, you are pretty much up a creek for this kind of endogeneity. </a:t>
             </a:r>
           </a:p>
         </p:txBody>
@@ -1974,7 +2030,7 @@
           <a:p>
             <a:fld id="{4AF79E1B-2C51-4B9B-8EA4-26DE9E345AFF}" type="slidenum">
               <a:rPr lang="en-US" smtClean="0"/>
-              <a:t>24</a:t>
+              <a:t>23</a:t>
             </a:fld>
             <a:endParaRPr lang="en-US"/>
           </a:p>
@@ -1983,7 +2039,7 @@
     </p:spTree>
     <p:extLst>
       <p:ext uri="{BB962C8B-B14F-4D97-AF65-F5344CB8AC3E}">
-        <p14:creationId xmlns:p14="http://schemas.microsoft.com/office/powerpoint/2010/main" val="3590841930"/>
+        <p14:creationId xmlns:p14="http://schemas.microsoft.com/office/powerpoint/2010/main" val="2660768713"/>
       </p:ext>
     </p:extLst>
   </p:cSld>
@@ -2037,7 +2093,12 @@
           <a:bodyPr/>
           <a:lstStyle/>
           <a:p>
-            <a:endParaRPr lang="en-US" dirty="0"/>
+            <a:r>
+              <a:rPr lang="en-US" dirty="0">
+                <a:cs typeface="Calibri"/>
+              </a:rPr>
+              <a:t>In an experiment, we generate variation (random assignment) and then just isolate the part of the treatment driven by that random variation (we compare across treatment and control groups). IV does the same, except isolating the part of the treatment driven by quasi-random, natural circumstances – the instrument. </a:t>
+            </a:r>
           </a:p>
         </p:txBody>
       </p:sp>
@@ -2058,7 +2119,7 @@
           <a:p>
             <a:fld id="{4AF79E1B-2C51-4B9B-8EA4-26DE9E345AFF}" type="slidenum">
               <a:rPr lang="en-US" smtClean="0"/>
-              <a:t>25</a:t>
+              <a:t>24</a:t>
             </a:fld>
             <a:endParaRPr lang="en-US"/>
           </a:p>
@@ -2067,7 +2128,7 @@
     </p:spTree>
     <p:extLst>
       <p:ext uri="{BB962C8B-B14F-4D97-AF65-F5344CB8AC3E}">
-        <p14:creationId xmlns:p14="http://schemas.microsoft.com/office/powerpoint/2010/main" val="1936787623"/>
+        <p14:creationId xmlns:p14="http://schemas.microsoft.com/office/powerpoint/2010/main" val="2665876928"/>
       </p:ext>
     </p:extLst>
   </p:cSld>
@@ -2125,9 +2186,8 @@
               <a:rPr lang="en-US" dirty="0">
                 <a:cs typeface="Calibri"/>
               </a:rPr>
-              <a:t>First condition is called relevance; second and third are validity – essentially that there are no open back doors of Z</a:t>
-            </a:r>
-            <a:endParaRPr lang="en-US" dirty="0"/>
+              <a:t>So we: (1) use the instrument to explain the treatment, (2) focus only on the part of the treatment explained by the instrument, and (3) use that to look at the instrument-explained part of the outcome. Basically, we’re splitting the effect of treatment into its endogenous and exogenous parts, and isolating just the exogenous part. </a:t>
+            </a:r>
           </a:p>
         </p:txBody>
       </p:sp>
@@ -2157,7 +2217,7 @@
     </p:spTree>
     <p:extLst>
       <p:ext uri="{BB962C8B-B14F-4D97-AF65-F5344CB8AC3E}">
-        <p14:creationId xmlns:p14="http://schemas.microsoft.com/office/powerpoint/2010/main" val="728058084"/>
+        <p14:creationId xmlns:p14="http://schemas.microsoft.com/office/powerpoint/2010/main" val="3590841930"/>
       </p:ext>
     </p:extLst>
   </p:cSld>
@@ -2211,12 +2271,6 @@
           <a:bodyPr/>
           <a:lstStyle/>
           <a:p>
-            <a:r>
-              <a:rPr lang="en-US" dirty="0">
-                <a:cs typeface="Calibri"/>
-              </a:rPr>
-              <a:t>Another way to think about it</a:t>
-            </a:r>
             <a:endParaRPr lang="en-US" dirty="0"/>
           </a:p>
         </p:txBody>
@@ -2247,7 +2301,7 @@
     </p:spTree>
     <p:extLst>
       <p:ext uri="{BB962C8B-B14F-4D97-AF65-F5344CB8AC3E}">
-        <p14:creationId xmlns:p14="http://schemas.microsoft.com/office/powerpoint/2010/main" val="2065056122"/>
+        <p14:creationId xmlns:p14="http://schemas.microsoft.com/office/powerpoint/2010/main" val="1936787623"/>
       </p:ext>
     </p:extLst>
   </p:cSld>
@@ -2302,9 +2356,12 @@
           <a:lstStyle/>
           <a:p>
             <a:r>
-              <a:rPr lang="en-US" dirty="0"/>
-              <a:t>Think first about just a random number generator. If that generator is used to assign treatment, then assumption 1 holds. If that random number isn’t used for anything else, then Z only affects Y through X (it doesn’t determine your pickiness or your age). </a:t>
-            </a:r>
+              <a:rPr lang="en-US" dirty="0">
+                <a:cs typeface="Calibri"/>
+              </a:rPr>
+              <a:t>First condition is called relevance; second and third are validity – essentially that there are no open back doors of Z</a:t>
+            </a:r>
+            <a:endParaRPr lang="en-US" dirty="0"/>
           </a:p>
         </p:txBody>
       </p:sp>
@@ -2334,7 +2391,7 @@
     </p:spTree>
     <p:extLst>
       <p:ext uri="{BB962C8B-B14F-4D97-AF65-F5344CB8AC3E}">
-        <p14:creationId xmlns:p14="http://schemas.microsoft.com/office/powerpoint/2010/main" val="2523725253"/>
+        <p14:creationId xmlns:p14="http://schemas.microsoft.com/office/powerpoint/2010/main" val="728058084"/>
       </p:ext>
     </p:extLst>
   </p:cSld>
@@ -2392,35 +2449,9 @@
               <a:rPr lang="en-US" dirty="0">
                 <a:cs typeface="Calibri"/>
               </a:rPr>
-              <a:t>So we want a variable like a random number generator. this is kind of the </a:t>
-            </a:r>
-            <a:r>
-              <a:rPr lang="en-US" i="1" dirty="0">
-                <a:cs typeface="Calibri"/>
-              </a:rPr>
-              <a:t>opposite </a:t>
-            </a:r>
-            <a:r>
-              <a:rPr lang="en-US" dirty="0">
-                <a:cs typeface="Calibri"/>
-              </a:rPr>
-              <a:t>of controlling for a variable: when we control for W, we use W to explain X and Y and remove those parts (to close a back door). But here, we are going to use Z as an instrument and remove the </a:t>
-            </a:r>
-            <a:r>
-              <a:rPr lang="en-US" u="sng" dirty="0">
-                <a:cs typeface="Calibri"/>
-              </a:rPr>
-              <a:t>unexplained </a:t>
-            </a:r>
-            <a:r>
-              <a:rPr lang="en-US" dirty="0">
-                <a:cs typeface="Calibri"/>
-              </a:rPr>
-              <a:t>parts. </a:t>
-            </a:r>
-            <a:endParaRPr lang="en-US" u="sng" dirty="0">
-              <a:cs typeface="Calibri"/>
-            </a:endParaRPr>
+              <a:t>Another way to think about it</a:t>
+            </a:r>
+            <a:endParaRPr lang="en-US" dirty="0"/>
           </a:p>
         </p:txBody>
       </p:sp>
@@ -2450,7 +2481,7 @@
     </p:spTree>
     <p:extLst>
       <p:ext uri="{BB962C8B-B14F-4D97-AF65-F5344CB8AC3E}">
-        <p14:creationId xmlns:p14="http://schemas.microsoft.com/office/powerpoint/2010/main" val="3999963633"/>
+        <p14:creationId xmlns:p14="http://schemas.microsoft.com/office/powerpoint/2010/main" val="2065056122"/>
       </p:ext>
     </p:extLst>
   </p:cSld>
@@ -2506,7 +2537,7 @@
           <a:p>
             <a:r>
               <a:rPr lang="en-US" dirty="0"/>
-              <a:t>Using our blood type example: Why is each assumption satisfied? Do we think this works? Can you think of any threats?</a:t>
+              <a:t>Think first about just a random number generator. If that generator is used to assign treatment, then assumption 1 holds. If that random number isn’t used for anything else, then Z only affects Y through X (it doesn’t determine your pickiness or your age). </a:t>
             </a:r>
           </a:p>
         </p:txBody>
@@ -2537,7 +2568,7 @@
     </p:spTree>
     <p:extLst>
       <p:ext uri="{BB962C8B-B14F-4D97-AF65-F5344CB8AC3E}">
-        <p14:creationId xmlns:p14="http://schemas.microsoft.com/office/powerpoint/2010/main" val="1639052696"/>
+        <p14:creationId xmlns:p14="http://schemas.microsoft.com/office/powerpoint/2010/main" val="2523725253"/>
       </p:ext>
     </p:extLst>
   </p:cSld>
@@ -2595,17 +2626,35 @@
               <a:rPr lang="en-US" dirty="0">
                 <a:cs typeface="Calibri"/>
               </a:rPr>
-              <a:t>Note: these come from really useful paper by Felton and Stewart. Now just for pedagogy, let’s do a completely different example and walk through it again. What is the effect of going back home (vs. moving) on recidivism. What is the open door? What are potential instruments? (ask this q even though it’s hard so that people can see the challenges of finding an IV)</a:t>
-            </a:r>
-          </a:p>
-          <a:p>
+              <a:t>So we want a variable like a random number generator. this is kind of the </a:t>
+            </a:r>
+            <a:r>
+              <a:rPr lang="en-US" i="1" dirty="0">
+                <a:cs typeface="Calibri"/>
+              </a:rPr>
+              <a:t>opposite </a:t>
+            </a:r>
             <a:r>
               <a:rPr lang="en-US" dirty="0">
                 <a:cs typeface="Calibri"/>
               </a:rPr>
-              <a:t>Example of relevance: effect of going back home after prison on recidivism – use Hurricane Katrina in LA (does that change your decision to go home or not?)</a:t>
-            </a:r>
-            <a:endParaRPr lang="en-US" dirty="0"/>
+              <a:t>of controlling for a variable: when we control for W, we use W to explain X and Y and remove those parts (to close a back door). But here, we are going to use Z as an instrument and remove the </a:t>
+            </a:r>
+            <a:r>
+              <a:rPr lang="en-US" u="sng" dirty="0">
+                <a:cs typeface="Calibri"/>
+              </a:rPr>
+              <a:t>unexplained </a:t>
+            </a:r>
+            <a:r>
+              <a:rPr lang="en-US" dirty="0">
+                <a:cs typeface="Calibri"/>
+              </a:rPr>
+              <a:t>parts. </a:t>
+            </a:r>
+            <a:endParaRPr lang="en-US" u="sng" dirty="0">
+              <a:cs typeface="Calibri"/>
+            </a:endParaRPr>
           </a:p>
         </p:txBody>
       </p:sp>
@@ -2635,7 +2684,7 @@
     </p:spTree>
     <p:extLst>
       <p:ext uri="{BB962C8B-B14F-4D97-AF65-F5344CB8AC3E}">
-        <p14:creationId xmlns:p14="http://schemas.microsoft.com/office/powerpoint/2010/main" val="1407177986"/>
+        <p14:creationId xmlns:p14="http://schemas.microsoft.com/office/powerpoint/2010/main" val="3999963633"/>
       </p:ext>
     </p:extLst>
   </p:cSld>
@@ -2650,13 +2699,7 @@
   <p:cSld>
     <p:spTree>
       <p:nvGrpSpPr>
-        <p:cNvPr id="1" name="">
-          <a:extLst>
-            <a:ext uri="{FF2B5EF4-FFF2-40B4-BE49-F238E27FC236}">
-              <a16:creationId xmlns:a16="http://schemas.microsoft.com/office/drawing/2014/main" id="{3451EA08-45DA-A6A0-47C1-83D078797D67}"/>
-            </a:ext>
-          </a:extLst>
-        </p:cNvPr>
+        <p:cNvPr id="1" name=""/>
         <p:cNvGrpSpPr/>
         <p:nvPr/>
       </p:nvGrpSpPr>
@@ -2670,13 +2713,7 @@
       </p:grpSpPr>
       <p:sp>
         <p:nvSpPr>
-          <p:cNvPr id="2" name="Slide Image Placeholder 1">
-            <a:extLst>
-              <a:ext uri="{FF2B5EF4-FFF2-40B4-BE49-F238E27FC236}">
-                <a16:creationId xmlns:a16="http://schemas.microsoft.com/office/drawing/2014/main" id="{31FF46B3-A54A-1568-AE78-38D3BCF199A1}"/>
-              </a:ext>
-            </a:extLst>
-          </p:cNvPr>
+          <p:cNvPr id="2" name="Slide Image Placeholder 1"/>
           <p:cNvSpPr>
             <a:spLocks noGrp="1" noRot="1" noChangeAspect="1"/>
           </p:cNvSpPr>
@@ -2688,13 +2725,7 @@
       </p:sp>
       <p:sp>
         <p:nvSpPr>
-          <p:cNvPr id="3" name="Notes Placeholder 2">
-            <a:extLst>
-              <a:ext uri="{FF2B5EF4-FFF2-40B4-BE49-F238E27FC236}">
-                <a16:creationId xmlns:a16="http://schemas.microsoft.com/office/drawing/2014/main" id="{67527CAA-6874-C1B4-419B-A1E82769E822}"/>
-              </a:ext>
-            </a:extLst>
-          </p:cNvPr>
+          <p:cNvPr id="3" name="Notes Placeholder 2"/>
           <p:cNvSpPr>
             <a:spLocks noGrp="1"/>
           </p:cNvSpPr>
@@ -2709,20 +2740,14 @@
           <a:p>
             <a:r>
               <a:rPr lang="en-US" dirty="0"/>
-              <a:t>“Model-based” vs. “design-based”</a:t>
-            </a:r>
-          </a:p>
-        </p:txBody>
-      </p:sp>
-      <p:sp>
-        <p:nvSpPr>
-          <p:cNvPr id="4" name="Slide Number Placeholder 3">
-            <a:extLst>
-              <a:ext uri="{FF2B5EF4-FFF2-40B4-BE49-F238E27FC236}">
-                <a16:creationId xmlns:a16="http://schemas.microsoft.com/office/drawing/2014/main" id="{85EB56E2-8E2C-9388-78F6-8D9E41CB30E1}"/>
-              </a:ext>
-            </a:extLst>
-          </p:cNvPr>
+              <a:t>One of many reasons why we have to be very careful about interrogating methods!</a:t>
+            </a:r>
+          </a:p>
+        </p:txBody>
+      </p:sp>
+      <p:sp>
+        <p:nvSpPr>
+          <p:cNvPr id="4" name="Slide Number Placeholder 3"/>
           <p:cNvSpPr>
             <a:spLocks noGrp="1"/>
           </p:cNvSpPr>
@@ -2746,7 +2771,7 @@
     </p:spTree>
     <p:extLst>
       <p:ext uri="{BB962C8B-B14F-4D97-AF65-F5344CB8AC3E}">
-        <p14:creationId xmlns:p14="http://schemas.microsoft.com/office/powerpoint/2010/main" val="4078635641"/>
+        <p14:creationId xmlns:p14="http://schemas.microsoft.com/office/powerpoint/2010/main" val="4221736753"/>
       </p:ext>
     </p:extLst>
   </p:cSld>
@@ -2801,24 +2826,9 @@
           <a:lstStyle/>
           <a:p>
             <a:r>
-              <a:rPr lang="en-US" dirty="0">
-                <a:cs typeface="Calibri"/>
-              </a:rPr>
-              <a:t>Example of exclusion: hurricane </a:t>
-            </a:r>
-            <a:r>
-              <a:rPr lang="en-US" dirty="0" err="1">
-                <a:cs typeface="Calibri"/>
-              </a:rPr>
-              <a:t>katrina</a:t>
-            </a:r>
-            <a:r>
-              <a:rPr lang="en-US" dirty="0">
-                <a:cs typeface="Calibri"/>
-              </a:rPr>
-              <a:t> can’t have affected recidivism in any other way except through residence change (can you think of violations to this?)</a:t>
-            </a:r>
-            <a:endParaRPr lang="en-US" dirty="0"/>
+              <a:rPr lang="en-US" dirty="0"/>
+              <a:t>Using our blood type example: Why is each assumption satisfied? Do we think this works? Can you think of any threats?</a:t>
+            </a:r>
           </a:p>
         </p:txBody>
       </p:sp>
@@ -2848,7 +2858,7 @@
     </p:spTree>
     <p:extLst>
       <p:ext uri="{BB962C8B-B14F-4D97-AF65-F5344CB8AC3E}">
-        <p14:creationId xmlns:p14="http://schemas.microsoft.com/office/powerpoint/2010/main" val="4252706433"/>
+        <p14:creationId xmlns:p14="http://schemas.microsoft.com/office/powerpoint/2010/main" val="1639052696"/>
       </p:ext>
     </p:extLst>
   </p:cSld>
@@ -2906,19 +2916,15 @@
               <a:rPr lang="en-US" dirty="0">
                 <a:cs typeface="Calibri"/>
               </a:rPr>
-              <a:t>Also called </a:t>
-            </a:r>
-            <a:r>
-              <a:rPr lang="en-US" dirty="0" err="1">
-                <a:cs typeface="Calibri"/>
-              </a:rPr>
-              <a:t>unconfoundedness</a:t>
-            </a:r>
+              <a:t>Note: these come from really useful paper by Felton and Stewart. Now just for pedagogy, let’s do a completely different example and walk through it again. What is the effect of going back home (vs. moving) on recidivism. What is the open door? What are potential instruments? (ask this q even though it’s hard so that people can see the challenges of finding an IV)</a:t>
+            </a:r>
+          </a:p>
+          <a:p>
             <a:r>
               <a:rPr lang="en-US" dirty="0">
                 <a:cs typeface="Calibri"/>
               </a:rPr>
-              <a:t>. Note – treatment is confounded (that’s why we need IV in the first place) but hopefully IV isn’t. So if residence and recidivism are correlated (why would they be? Past history? Networks?), then Hurricane Katrina shouldn’t care about any of that</a:t>
+              <a:t>Example of relevance: effect of going back home after prison on recidivism – use Hurricane Katrina in LA (does that change your decision to go home or not?)</a:t>
             </a:r>
             <a:endParaRPr lang="en-US" dirty="0"/>
           </a:p>
@@ -2950,7 +2956,7 @@
     </p:spTree>
     <p:extLst>
       <p:ext uri="{BB962C8B-B14F-4D97-AF65-F5344CB8AC3E}">
-        <p14:creationId xmlns:p14="http://schemas.microsoft.com/office/powerpoint/2010/main" val="383531196"/>
+        <p14:creationId xmlns:p14="http://schemas.microsoft.com/office/powerpoint/2010/main" val="1407177986"/>
       </p:ext>
     </p:extLst>
   </p:cSld>
@@ -3004,6 +3010,24 @@
           <a:bodyPr/>
           <a:lstStyle/>
           <a:p>
+            <a:r>
+              <a:rPr lang="en-US" dirty="0">
+                <a:cs typeface="Calibri"/>
+              </a:rPr>
+              <a:t>Example of exclusion: hurricane </a:t>
+            </a:r>
+            <a:r>
+              <a:rPr lang="en-US" dirty="0" err="1">
+                <a:cs typeface="Calibri"/>
+              </a:rPr>
+              <a:t>katrina</a:t>
+            </a:r>
+            <a:r>
+              <a:rPr lang="en-US" dirty="0">
+                <a:cs typeface="Calibri"/>
+              </a:rPr>
+              <a:t> can’t have affected recidivism in any other way except through residence change (can you think of violations to this?)</a:t>
+            </a:r>
             <a:endParaRPr lang="en-US" dirty="0"/>
           </a:p>
         </p:txBody>
@@ -3025,7 +3049,7 @@
           <a:p>
             <a:fld id="{4AF79E1B-2C51-4B9B-8EA4-26DE9E345AFF}" type="slidenum">
               <a:rPr lang="en-US" smtClean="0"/>
-              <a:t>35</a:t>
+              <a:t>34</a:t>
             </a:fld>
             <a:endParaRPr lang="en-US"/>
           </a:p>
@@ -3034,7 +3058,7 @@
     </p:spTree>
     <p:extLst>
       <p:ext uri="{BB962C8B-B14F-4D97-AF65-F5344CB8AC3E}">
-        <p14:creationId xmlns:p14="http://schemas.microsoft.com/office/powerpoint/2010/main" val="3212433125"/>
+        <p14:creationId xmlns:p14="http://schemas.microsoft.com/office/powerpoint/2010/main" val="4252706433"/>
       </p:ext>
     </p:extLst>
   </p:cSld>
@@ -3092,63 +3116,21 @@
               <a:rPr lang="en-US" dirty="0">
                 <a:cs typeface="Calibri"/>
               </a:rPr>
-              <a:t>Here, you can see why we need </a:t>
-            </a:r>
-            <a:r>
-              <a:rPr lang="en-US" b="1" dirty="0">
+              <a:t>Also called </a:t>
+            </a:r>
+            <a:r>
+              <a:rPr lang="en-US" dirty="0" err="1">
                 <a:cs typeface="Calibri"/>
               </a:rPr>
-              <a:t>relevance </a:t>
+              <a:t>unconfoundedness</a:t>
             </a:r>
             <a:r>
               <a:rPr lang="en-US" dirty="0">
                 <a:cs typeface="Calibri"/>
               </a:rPr>
-              <a:t>condition; if </a:t>
-            </a:r>
-            <a:r>
-              <a:rPr lang="en-US" dirty="0" err="1">
-                <a:cs typeface="Calibri"/>
-              </a:rPr>
-              <a:t>Cov</a:t>
-            </a:r>
-            <a:r>
-              <a:rPr lang="en-US" dirty="0">
-                <a:cs typeface="Calibri"/>
-              </a:rPr>
-              <a:t>(</a:t>
-            </a:r>
-            <a:r>
-              <a:rPr lang="en-US" dirty="0" err="1">
-                <a:cs typeface="Calibri"/>
-              </a:rPr>
-              <a:t>z,x</a:t>
-            </a:r>
-            <a:r>
-              <a:rPr lang="en-US" dirty="0">
-                <a:cs typeface="Calibri"/>
-              </a:rPr>
-              <a:t>) = 0, then the 2sls doesn't return anything useful. </a:t>
-            </a:r>
-            <a:r>
-              <a:rPr lang="en-US" b="1" dirty="0">
-                <a:cs typeface="Calibri"/>
-              </a:rPr>
-              <a:t>Even if </a:t>
-            </a:r>
-            <a:r>
-              <a:rPr lang="en-US" b="1" dirty="0" err="1">
-                <a:cs typeface="Calibri"/>
-              </a:rPr>
-              <a:t>cov</a:t>
-            </a:r>
-            <a:r>
-              <a:rPr lang="en-US" b="1" dirty="0">
-                <a:cs typeface="Calibri"/>
-              </a:rPr>
-              <a:t> is small, we have problems (we'll return to this). </a:t>
-            </a:r>
-            <a:endParaRPr lang="en-US" b="1" dirty="0"/>
+              <a:t>. Note – treatment is confounded (that’s why we need IV in the first place) but hopefully IV isn’t. So if residence and recidivism are correlated (why would they be? Past history? Networks?), then Hurricane Katrina shouldn’t care about any of that</a:t>
+            </a:r>
+            <a:endParaRPr lang="en-US" dirty="0"/>
           </a:p>
         </p:txBody>
       </p:sp>
@@ -3169,7 +3151,7 @@
           <a:p>
             <a:fld id="{4AF79E1B-2C51-4B9B-8EA4-26DE9E345AFF}" type="slidenum">
               <a:rPr lang="en-US" smtClean="0"/>
-              <a:t>36</a:t>
+              <a:t>35</a:t>
             </a:fld>
             <a:endParaRPr lang="en-US"/>
           </a:p>
@@ -3178,7 +3160,7 @@
     </p:spTree>
     <p:extLst>
       <p:ext uri="{BB962C8B-B14F-4D97-AF65-F5344CB8AC3E}">
-        <p14:creationId xmlns:p14="http://schemas.microsoft.com/office/powerpoint/2010/main" val="3650579743"/>
+        <p14:creationId xmlns:p14="http://schemas.microsoft.com/office/powerpoint/2010/main" val="383531196"/>
       </p:ext>
     </p:extLst>
   </p:cSld>
@@ -3193,13 +3175,7 @@
   <p:cSld>
     <p:spTree>
       <p:nvGrpSpPr>
-        <p:cNvPr id="1" name="">
-          <a:extLst>
-            <a:ext uri="{FF2B5EF4-FFF2-40B4-BE49-F238E27FC236}">
-              <a16:creationId xmlns:a16="http://schemas.microsoft.com/office/drawing/2014/main" id="{09E6D350-79CF-AC52-143E-913F3ECADC30}"/>
-            </a:ext>
-          </a:extLst>
-        </p:cNvPr>
+        <p:cNvPr id="1" name=""/>
         <p:cNvGrpSpPr/>
         <p:nvPr/>
       </p:nvGrpSpPr>
@@ -3213,13 +3189,7 @@
       </p:grpSpPr>
       <p:sp>
         <p:nvSpPr>
-          <p:cNvPr id="2" name="Slide Image Placeholder 1">
-            <a:extLst>
-              <a:ext uri="{FF2B5EF4-FFF2-40B4-BE49-F238E27FC236}">
-                <a16:creationId xmlns:a16="http://schemas.microsoft.com/office/drawing/2014/main" id="{8A0D14F3-D8AD-819F-0FD9-BBF6A9E96D75}"/>
-              </a:ext>
-            </a:extLst>
-          </p:cNvPr>
+          <p:cNvPr id="2" name="Slide Image Placeholder 1"/>
           <p:cNvSpPr>
             <a:spLocks noGrp="1" noRot="1" noChangeAspect="1"/>
           </p:cNvSpPr>
@@ -3231,13 +3201,7 @@
       </p:sp>
       <p:sp>
         <p:nvSpPr>
-          <p:cNvPr id="3" name="Notes Placeholder 2">
-            <a:extLst>
-              <a:ext uri="{FF2B5EF4-FFF2-40B4-BE49-F238E27FC236}">
-                <a16:creationId xmlns:a16="http://schemas.microsoft.com/office/drawing/2014/main" id="{4B40DC11-DAC8-67A6-6D0D-D791AEF8F382}"/>
-              </a:ext>
-            </a:extLst>
-          </p:cNvPr>
+          <p:cNvPr id="3" name="Notes Placeholder 2"/>
           <p:cNvSpPr>
             <a:spLocks noGrp="1"/>
           </p:cNvSpPr>
@@ -3250,19 +3214,13 @@
           <a:bodyPr/>
           <a:lstStyle/>
           <a:p>
-            <a:endParaRPr lang="en-US" b="1" dirty="0"/>
-          </a:p>
-        </p:txBody>
-      </p:sp>
-      <p:sp>
-        <p:nvSpPr>
-          <p:cNvPr id="4" name="Slide Number Placeholder 3">
-            <a:extLst>
-              <a:ext uri="{FF2B5EF4-FFF2-40B4-BE49-F238E27FC236}">
-                <a16:creationId xmlns:a16="http://schemas.microsoft.com/office/drawing/2014/main" id="{B6AA7F42-3F59-C571-C126-88086F498992}"/>
-              </a:ext>
-            </a:extLst>
-          </p:cNvPr>
+            <a:endParaRPr lang="en-US" dirty="0"/>
+          </a:p>
+        </p:txBody>
+      </p:sp>
+      <p:sp>
+        <p:nvSpPr>
+          <p:cNvPr id="4" name="Slide Number Placeholder 3"/>
           <p:cNvSpPr>
             <a:spLocks noGrp="1"/>
           </p:cNvSpPr>
@@ -3286,7 +3244,7 @@
     </p:spTree>
     <p:extLst>
       <p:ext uri="{BB962C8B-B14F-4D97-AF65-F5344CB8AC3E}">
-        <p14:creationId xmlns:p14="http://schemas.microsoft.com/office/powerpoint/2010/main" val="1180217015"/>
+        <p14:creationId xmlns:p14="http://schemas.microsoft.com/office/powerpoint/2010/main" val="3212433125"/>
       </p:ext>
     </p:extLst>
   </p:cSld>
@@ -3341,9 +3299,66 @@
           <a:lstStyle/>
           <a:p>
             <a:r>
-              <a:rPr lang="en-US" b="0" dirty="0"/>
-              <a:t>Why is this endogenous? (We don’t have ability)</a:t>
-            </a:r>
+              <a:rPr lang="en-US" dirty="0">
+                <a:cs typeface="Calibri"/>
+              </a:rPr>
+              <a:t>Here, you can see why we need </a:t>
+            </a:r>
+            <a:r>
+              <a:rPr lang="en-US" b="1" dirty="0">
+                <a:cs typeface="Calibri"/>
+              </a:rPr>
+              <a:t>relevance </a:t>
+            </a:r>
+            <a:r>
+              <a:rPr lang="en-US" dirty="0">
+                <a:cs typeface="Calibri"/>
+              </a:rPr>
+              <a:t>condition; if </a:t>
+            </a:r>
+            <a:r>
+              <a:rPr lang="en-US" dirty="0" err="1">
+                <a:cs typeface="Calibri"/>
+              </a:rPr>
+              <a:t>Cov</a:t>
+            </a:r>
+            <a:r>
+              <a:rPr lang="en-US" dirty="0">
+                <a:cs typeface="Calibri"/>
+              </a:rPr>
+              <a:t>(</a:t>
+            </a:r>
+            <a:r>
+              <a:rPr lang="en-US" dirty="0" err="1">
+                <a:cs typeface="Calibri"/>
+              </a:rPr>
+              <a:t>z,x</a:t>
+            </a:r>
+            <a:r>
+              <a:rPr lang="en-US" dirty="0">
+                <a:cs typeface="Calibri"/>
+              </a:rPr>
+              <a:t>) = 0, then the 2sls doesn't return anything useful. </a:t>
+            </a:r>
+            <a:r>
+              <a:rPr lang="en-US" b="1" dirty="0">
+                <a:cs typeface="Calibri"/>
+              </a:rPr>
+              <a:t>Even if </a:t>
+            </a:r>
+            <a:r>
+              <a:rPr lang="en-US" b="1" dirty="0" err="1">
+                <a:cs typeface="Calibri"/>
+              </a:rPr>
+              <a:t>cov</a:t>
+            </a:r>
+            <a:r>
+              <a:rPr lang="en-US" b="1" dirty="0">
+                <a:cs typeface="Calibri"/>
+              </a:rPr>
+              <a:t> is small, we have problems (we'll return to this). </a:t>
+            </a:r>
+            <a:endParaRPr lang="en-US" b="1" dirty="0"/>
           </a:p>
         </p:txBody>
       </p:sp>
@@ -3373,7 +3388,7 @@
     </p:spTree>
     <p:extLst>
       <p:ext uri="{BB962C8B-B14F-4D97-AF65-F5344CB8AC3E}">
-        <p14:creationId xmlns:p14="http://schemas.microsoft.com/office/powerpoint/2010/main" val="1480128926"/>
+        <p14:creationId xmlns:p14="http://schemas.microsoft.com/office/powerpoint/2010/main" val="3650579743"/>
       </p:ext>
     </p:extLst>
   </p:cSld>
@@ -3388,7 +3403,13 @@
   <p:cSld>
     <p:spTree>
       <p:nvGrpSpPr>
-        <p:cNvPr id="1" name=""/>
+        <p:cNvPr id="1" name="">
+          <a:extLst>
+            <a:ext uri="{FF2B5EF4-FFF2-40B4-BE49-F238E27FC236}">
+              <a16:creationId xmlns:a16="http://schemas.microsoft.com/office/drawing/2014/main" id="{09E6D350-79CF-AC52-143E-913F3ECADC30}"/>
+            </a:ext>
+          </a:extLst>
+        </p:cNvPr>
         <p:cNvGrpSpPr/>
         <p:nvPr/>
       </p:nvGrpSpPr>
@@ -3402,7 +3423,13 @@
       </p:grpSpPr>
       <p:sp>
         <p:nvSpPr>
-          <p:cNvPr id="2" name="Slide Image Placeholder 1"/>
+          <p:cNvPr id="2" name="Slide Image Placeholder 1">
+            <a:extLst>
+              <a:ext uri="{FF2B5EF4-FFF2-40B4-BE49-F238E27FC236}">
+                <a16:creationId xmlns:a16="http://schemas.microsoft.com/office/drawing/2014/main" id="{8A0D14F3-D8AD-819F-0FD9-BBF6A9E96D75}"/>
+              </a:ext>
+            </a:extLst>
+          </p:cNvPr>
           <p:cNvSpPr>
             <a:spLocks noGrp="1" noRot="1" noChangeAspect="1"/>
           </p:cNvSpPr>
@@ -3414,7 +3441,13 @@
       </p:sp>
       <p:sp>
         <p:nvSpPr>
-          <p:cNvPr id="3" name="Notes Placeholder 2"/>
+          <p:cNvPr id="3" name="Notes Placeholder 2">
+            <a:extLst>
+              <a:ext uri="{FF2B5EF4-FFF2-40B4-BE49-F238E27FC236}">
+                <a16:creationId xmlns:a16="http://schemas.microsoft.com/office/drawing/2014/main" id="{4B40DC11-DAC8-67A6-6D0D-D791AEF8F382}"/>
+              </a:ext>
+            </a:extLst>
+          </p:cNvPr>
           <p:cNvSpPr>
             <a:spLocks noGrp="1"/>
           </p:cNvSpPr>
@@ -3427,16 +3460,19 @@
           <a:bodyPr/>
           <a:lstStyle/>
           <a:p>
-            <a:r>
-              <a:rPr lang="en-US" b="0" dirty="0"/>
-              <a:t>Yes, this is enough! We just can’t do this in the real world</a:t>
-            </a:r>
-          </a:p>
-        </p:txBody>
-      </p:sp>
-      <p:sp>
-        <p:nvSpPr>
-          <p:cNvPr id="4" name="Slide Number Placeholder 3"/>
+            <a:endParaRPr lang="en-US" b="1" dirty="0"/>
+          </a:p>
+        </p:txBody>
+      </p:sp>
+      <p:sp>
+        <p:nvSpPr>
+          <p:cNvPr id="4" name="Slide Number Placeholder 3">
+            <a:extLst>
+              <a:ext uri="{FF2B5EF4-FFF2-40B4-BE49-F238E27FC236}">
+                <a16:creationId xmlns:a16="http://schemas.microsoft.com/office/drawing/2014/main" id="{B6AA7F42-3F59-C571-C126-88086F498992}"/>
+              </a:ext>
+            </a:extLst>
+          </p:cNvPr>
           <p:cNvSpPr>
             <a:spLocks noGrp="1"/>
           </p:cNvSpPr>
@@ -3460,7 +3496,7 @@
     </p:spTree>
     <p:extLst>
       <p:ext uri="{BB962C8B-B14F-4D97-AF65-F5344CB8AC3E}">
-        <p14:creationId xmlns:p14="http://schemas.microsoft.com/office/powerpoint/2010/main" val="1269223052"/>
+        <p14:creationId xmlns:p14="http://schemas.microsoft.com/office/powerpoint/2010/main" val="1180217015"/>
       </p:ext>
     </p:extLst>
   </p:cSld>
@@ -3516,15 +3552,7 @@
           <a:p>
             <a:r>
               <a:rPr lang="en-US" b="0" dirty="0"/>
-              <a:t>In this case, the IV is your father’s education (a common but slightly dubious instrument – can talk about why if time). Note that the coefficient is the same sign but smaller (adjusting for positive selection into treatment). There are also cases where the coefficient may be </a:t>
-            </a:r>
-            <a:r>
-              <a:rPr lang="en-US" b="1" dirty="0"/>
-              <a:t>opposite signed</a:t>
-            </a:r>
-            <a:r>
-              <a:rPr lang="en-US" b="0" dirty="0"/>
-              <a:t>, especially if there is negative selection into a treatment with a positive treatment effect (as in the case study).</a:t>
+              <a:t>Why is this endogenous? (We don’t have ability)</a:t>
             </a:r>
           </a:p>
         </p:txBody>
@@ -3555,7 +3583,7 @@
     </p:spTree>
     <p:extLst>
       <p:ext uri="{BB962C8B-B14F-4D97-AF65-F5344CB8AC3E}">
-        <p14:creationId xmlns:p14="http://schemas.microsoft.com/office/powerpoint/2010/main" val="2549378587"/>
+        <p14:creationId xmlns:p14="http://schemas.microsoft.com/office/powerpoint/2010/main" val="1480128926"/>
       </p:ext>
     </p:extLst>
   </p:cSld>
@@ -3610,8 +3638,8 @@
           <a:lstStyle/>
           <a:p>
             <a:r>
-              <a:rPr lang="en-US" dirty="0"/>
-              <a:t>You can do these kind of quickly</a:t>
+              <a:rPr lang="en-US" b="0" dirty="0"/>
+              <a:t>Yes, this is enough! We just can’t do this in the real world</a:t>
             </a:r>
           </a:p>
         </p:txBody>
@@ -3642,7 +3670,7 @@
     </p:spTree>
     <p:extLst>
       <p:ext uri="{BB962C8B-B14F-4D97-AF65-F5344CB8AC3E}">
-        <p14:creationId xmlns:p14="http://schemas.microsoft.com/office/powerpoint/2010/main" val="36034450"/>
+        <p14:creationId xmlns:p14="http://schemas.microsoft.com/office/powerpoint/2010/main" val="1269223052"/>
       </p:ext>
     </p:extLst>
   </p:cSld>
@@ -3696,7 +3724,18 @@
           <a:bodyPr/>
           <a:lstStyle/>
           <a:p>
-            <a:endParaRPr lang="en-US" dirty="0"/>
+            <a:r>
+              <a:rPr lang="en-US" b="0" dirty="0"/>
+              <a:t>In this case, the IV is your father’s education (a common but slightly dubious instrument – can talk about why if time). Note that the coefficient is the same sign but smaller (adjusting for positive selection into treatment). There are also cases where the coefficient may be </a:t>
+            </a:r>
+            <a:r>
+              <a:rPr lang="en-US" b="1" dirty="0"/>
+              <a:t>opposite signed</a:t>
+            </a:r>
+            <a:r>
+              <a:rPr lang="en-US" b="0" dirty="0"/>
+              <a:t>, especially if there is negative selection into a treatment with a positive treatment effect (as in the case study).</a:t>
+            </a:r>
           </a:p>
         </p:txBody>
       </p:sp>
@@ -3726,7 +3765,7 @@
     </p:spTree>
     <p:extLst>
       <p:ext uri="{BB962C8B-B14F-4D97-AF65-F5344CB8AC3E}">
-        <p14:creationId xmlns:p14="http://schemas.microsoft.com/office/powerpoint/2010/main" val="1807161508"/>
+        <p14:creationId xmlns:p14="http://schemas.microsoft.com/office/powerpoint/2010/main" val="2549378587"/>
       </p:ext>
     </p:extLst>
   </p:cSld>
@@ -3741,7 +3780,13 @@
   <p:cSld>
     <p:spTree>
       <p:nvGrpSpPr>
-        <p:cNvPr id="1" name=""/>
+        <p:cNvPr id="1" name="">
+          <a:extLst>
+            <a:ext uri="{FF2B5EF4-FFF2-40B4-BE49-F238E27FC236}">
+              <a16:creationId xmlns:a16="http://schemas.microsoft.com/office/drawing/2014/main" id="{E8A3BA94-DC28-1352-3C07-AEAE27138B69}"/>
+            </a:ext>
+          </a:extLst>
+        </p:cNvPr>
         <p:cNvGrpSpPr/>
         <p:nvPr/>
       </p:nvGrpSpPr>
@@ -3755,7 +3800,13 @@
       </p:grpSpPr>
       <p:sp>
         <p:nvSpPr>
-          <p:cNvPr id="2" name="Slide Image Placeholder 1"/>
+          <p:cNvPr id="2" name="Slide Image Placeholder 1">
+            <a:extLst>
+              <a:ext uri="{FF2B5EF4-FFF2-40B4-BE49-F238E27FC236}">
+                <a16:creationId xmlns:a16="http://schemas.microsoft.com/office/drawing/2014/main" id="{3BD6554B-8D29-BEFF-7D37-D4EFC60DCD2A}"/>
+              </a:ext>
+            </a:extLst>
+          </p:cNvPr>
           <p:cNvSpPr>
             <a:spLocks noGrp="1" noRot="1" noChangeAspect="1"/>
           </p:cNvSpPr>
@@ -3767,7 +3818,13 @@
       </p:sp>
       <p:sp>
         <p:nvSpPr>
-          <p:cNvPr id="3" name="Notes Placeholder 2"/>
+          <p:cNvPr id="3" name="Notes Placeholder 2">
+            <a:extLst>
+              <a:ext uri="{FF2B5EF4-FFF2-40B4-BE49-F238E27FC236}">
+                <a16:creationId xmlns:a16="http://schemas.microsoft.com/office/drawing/2014/main" id="{48478A20-29F4-D458-04D9-69EC6779FFF2}"/>
+              </a:ext>
+            </a:extLst>
+          </p:cNvPr>
           <p:cNvSpPr>
             <a:spLocks noGrp="1"/>
           </p:cNvSpPr>
@@ -3782,22 +3839,20 @@
           <a:p>
             <a:r>
               <a:rPr lang="en-US" dirty="0"/>
-              <a:t>This </a:t>
-            </a:r>
-            <a:r>
-              <a:rPr lang="en-US" dirty="0" err="1"/>
-              <a:t>dag</a:t>
-            </a:r>
-            <a:r>
-              <a:rPr lang="en-US" dirty="0"/>
-              <a:t> cannot be addressed fully with a back-door approach (how do we ever measure ability)? The front door finds an instrument M such that there is no back door between education and M, and education blocks the only open back-door between M and wage (ability). This is an open door! Example of M: quarter of birth (Angrist and Kreuger, 1991). M goes behind education and connects to it. </a:t>
-            </a:r>
-          </a:p>
-        </p:txBody>
-      </p:sp>
-      <p:sp>
-        <p:nvSpPr>
-          <p:cNvPr id="4" name="Slide Number Placeholder 3"/>
+              <a:t>So far, we’ve focused on the backdoor criterion – can we close paths that stand in our way? Matching and controlling for covariates are two primary approaches. </a:t>
+            </a:r>
+          </a:p>
+        </p:txBody>
+      </p:sp>
+      <p:sp>
+        <p:nvSpPr>
+          <p:cNvPr id="4" name="Slide Number Placeholder 3">
+            <a:extLst>
+              <a:ext uri="{FF2B5EF4-FFF2-40B4-BE49-F238E27FC236}">
+                <a16:creationId xmlns:a16="http://schemas.microsoft.com/office/drawing/2014/main" id="{6648DE81-CEB6-02E2-BDB5-BCDB69040F96}"/>
+              </a:ext>
+            </a:extLst>
+          </p:cNvPr>
           <p:cNvSpPr>
             <a:spLocks noGrp="1"/>
           </p:cNvSpPr>
@@ -3821,7 +3876,7 @@
     </p:spTree>
     <p:extLst>
       <p:ext uri="{BB962C8B-B14F-4D97-AF65-F5344CB8AC3E}">
-        <p14:creationId xmlns:p14="http://schemas.microsoft.com/office/powerpoint/2010/main" val="3822811900"/>
+        <p14:creationId xmlns:p14="http://schemas.microsoft.com/office/powerpoint/2010/main" val="3099295605"/>
       </p:ext>
     </p:extLst>
   </p:cSld>
@@ -3875,7 +3930,10 @@
           <a:bodyPr/>
           <a:lstStyle/>
           <a:p>
-            <a:endParaRPr lang="en-US" dirty="0"/>
+            <a:r>
+              <a:rPr lang="en-US" dirty="0"/>
+              <a:t>You can do these kind of quickly</a:t>
+            </a:r>
           </a:p>
         </p:txBody>
       </p:sp>
@@ -3905,7 +3963,7 @@
     </p:spTree>
     <p:extLst>
       <p:ext uri="{BB962C8B-B14F-4D97-AF65-F5344CB8AC3E}">
-        <p14:creationId xmlns:p14="http://schemas.microsoft.com/office/powerpoint/2010/main" val="3823014765"/>
+        <p14:creationId xmlns:p14="http://schemas.microsoft.com/office/powerpoint/2010/main" val="36034450"/>
       </p:ext>
     </p:extLst>
   </p:cSld>
@@ -3989,7 +4047,7 @@
     </p:spTree>
     <p:extLst>
       <p:ext uri="{BB962C8B-B14F-4D97-AF65-F5344CB8AC3E}">
-        <p14:creationId xmlns:p14="http://schemas.microsoft.com/office/powerpoint/2010/main" val="3218221699"/>
+        <p14:creationId xmlns:p14="http://schemas.microsoft.com/office/powerpoint/2010/main" val="1807161508"/>
       </p:ext>
     </p:extLst>
   </p:cSld>
@@ -4073,7 +4131,7 @@
     </p:spTree>
     <p:extLst>
       <p:ext uri="{BB962C8B-B14F-4D97-AF65-F5344CB8AC3E}">
-        <p14:creationId xmlns:p14="http://schemas.microsoft.com/office/powerpoint/2010/main" val="2215348703"/>
+        <p14:creationId xmlns:p14="http://schemas.microsoft.com/office/powerpoint/2010/main" val="3823014765"/>
       </p:ext>
     </p:extLst>
   </p:cSld>
@@ -4157,7 +4215,7 @@
     </p:spTree>
     <p:extLst>
       <p:ext uri="{BB962C8B-B14F-4D97-AF65-F5344CB8AC3E}">
-        <p14:creationId xmlns:p14="http://schemas.microsoft.com/office/powerpoint/2010/main" val="1527951253"/>
+        <p14:creationId xmlns:p14="http://schemas.microsoft.com/office/powerpoint/2010/main" val="3218221699"/>
       </p:ext>
     </p:extLst>
   </p:cSld>
@@ -4211,10 +4269,7 @@
           <a:bodyPr/>
           <a:lstStyle/>
           <a:p>
-            <a:r>
-              <a:rPr lang="en-US" dirty="0"/>
-              <a:t>Let’s wrap this up with a discussion of the vaccine paper. </a:t>
-            </a:r>
+            <a:endParaRPr lang="en-US" dirty="0"/>
           </a:p>
         </p:txBody>
       </p:sp>
@@ -4244,7 +4299,7 @@
     </p:spTree>
     <p:extLst>
       <p:ext uri="{BB962C8B-B14F-4D97-AF65-F5344CB8AC3E}">
-        <p14:creationId xmlns:p14="http://schemas.microsoft.com/office/powerpoint/2010/main" val="2441229989"/>
+        <p14:creationId xmlns:p14="http://schemas.microsoft.com/office/powerpoint/2010/main" val="2215348703"/>
       </p:ext>
     </p:extLst>
   </p:cSld>
@@ -4298,19 +4353,7 @@
           <a:bodyPr/>
           <a:lstStyle/>
           <a:p>
-            <a:r>
-              <a:rPr lang="en-US" dirty="0"/>
-              <a:t>This one is likely imperfect – what do you think? Can you use storytelling here (for or against)?</a:t>
-            </a:r>
-          </a:p>
-          <a:p>
             <a:endParaRPr lang="en-US" dirty="0"/>
-          </a:p>
-          <a:p>
-            <a:r>
-              <a:rPr lang="en-US" dirty="0"/>
-              <a:t>- Go through text in detail here. Talk through assumptions, etc. Model on board. Critique. </a:t>
-            </a:r>
           </a:p>
         </p:txBody>
       </p:sp>
@@ -4340,7 +4383,7 @@
     </p:spTree>
     <p:extLst>
       <p:ext uri="{BB962C8B-B14F-4D97-AF65-F5344CB8AC3E}">
-        <p14:creationId xmlns:p14="http://schemas.microsoft.com/office/powerpoint/2010/main" val="148696096"/>
+        <p14:creationId xmlns:p14="http://schemas.microsoft.com/office/powerpoint/2010/main" val="1527951253"/>
       </p:ext>
     </p:extLst>
   </p:cSld>
@@ -4396,7 +4439,7 @@
           <a:p>
             <a:r>
               <a:rPr lang="en-US" dirty="0"/>
-              <a:t>The basic DAG of an IV setup – can we pick one and walk me through it?</a:t>
+              <a:t>Let’s wrap this up with a discussion of the vaccine paper. </a:t>
             </a:r>
           </a:p>
         </p:txBody>
@@ -4427,7 +4470,7 @@
     </p:spTree>
     <p:extLst>
       <p:ext uri="{BB962C8B-B14F-4D97-AF65-F5344CB8AC3E}">
-        <p14:creationId xmlns:p14="http://schemas.microsoft.com/office/powerpoint/2010/main" val="3896678191"/>
+        <p14:creationId xmlns:p14="http://schemas.microsoft.com/office/powerpoint/2010/main" val="2441229989"/>
       </p:ext>
     </p:extLst>
   </p:cSld>
@@ -4482,15 +4525,17 @@
           <a:lstStyle/>
           <a:p>
             <a:r>
-              <a:rPr lang="en-US" dirty="0">
-                <a:ea typeface="Calibri"/>
-                <a:cs typeface="Calibri"/>
-              </a:rPr>
-              <a:t>Example from 1: </a:t>
-            </a:r>
-            <a:r>
               <a:rPr lang="en-US" dirty="0"/>
-              <a:t>in the 2000s, Oregon chose to expand its Medicaid program for poor adults by making it more generous. They used a lottery – this randomization can be an IV to back out LATE from ITT. </a:t>
+              <a:t>This one is likely imperfect – what do you think? Can you use storytelling here (for or against)?</a:t>
+            </a:r>
+          </a:p>
+          <a:p>
+            <a:endParaRPr lang="en-US" dirty="0"/>
+          </a:p>
+          <a:p>
+            <a:r>
+              <a:rPr lang="en-US" dirty="0"/>
+              <a:t>- Go through text in detail here. Talk through assumptions, etc. Model on board. Critique. </a:t>
             </a:r>
           </a:p>
         </p:txBody>
@@ -4510,7 +4555,7 @@
           <a:bodyPr/>
           <a:lstStyle/>
           <a:p>
-            <a:fld id="{3298C5B2-5D6B-2949-9D6C-64FEDA8AB56A}" type="slidenum">
+            <a:fld id="{4AF79E1B-2C51-4B9B-8EA4-26DE9E345AFF}" type="slidenum">
               <a:rPr lang="en-US" smtClean="0"/>
               <a:t>50</a:t>
             </a:fld>
@@ -4521,7 +4566,7 @@
     </p:spTree>
     <p:extLst>
       <p:ext uri="{BB962C8B-B14F-4D97-AF65-F5344CB8AC3E}">
-        <p14:creationId xmlns:p14="http://schemas.microsoft.com/office/powerpoint/2010/main" val="3696218390"/>
+        <p14:creationId xmlns:p14="http://schemas.microsoft.com/office/powerpoint/2010/main" val="148696096"/>
       </p:ext>
     </p:extLst>
   </p:cSld>
@@ -4576,20 +4621,9 @@
           <a:lstStyle/>
           <a:p>
             <a:r>
-              <a:rPr lang="en-US" dirty="0">
-                <a:ea typeface="Calibri"/>
-                <a:cs typeface="Calibri"/>
-              </a:rPr>
-              <a:t>This</a:t>
-            </a:r>
-            <a:r>
               <a:rPr lang="en-US" dirty="0"/>
-              <a:t> is just really popular with judges, doesn't have to be criminal. Possible examples: FDA approval, physician decision-making. Some concerns: is assignment truly random? Is the pipeline really narrow? Can the discretion be chosen by the patient/entity? Paper uses differences in nursing home eligibility assessors to find that access to nursing homes lowers use of other kinds of care, but does not affect health spending or mortality meaningfully. Plenty of opportunities to implement this design more meaningfully. </a:t>
-            </a:r>
-            <a:endParaRPr lang="en-US" dirty="0">
-              <a:ea typeface="Calibri"/>
-              <a:cs typeface="Calibri"/>
-            </a:endParaRPr>
+              <a:t>The basic DAG of an IV setup – can we pick one and walk me through it?</a:t>
+            </a:r>
           </a:p>
         </p:txBody>
       </p:sp>
@@ -4608,7 +4642,7 @@
           <a:bodyPr/>
           <a:lstStyle/>
           <a:p>
-            <a:fld id="{3298C5B2-5D6B-2949-9D6C-64FEDA8AB56A}" type="slidenum">
+            <a:fld id="{4AF79E1B-2C51-4B9B-8EA4-26DE9E345AFF}" type="slidenum">
               <a:rPr lang="en-US" smtClean="0"/>
               <a:t>51</a:t>
             </a:fld>
@@ -4619,7 +4653,7 @@
     </p:spTree>
     <p:extLst>
       <p:ext uri="{BB962C8B-B14F-4D97-AF65-F5344CB8AC3E}">
-        <p14:creationId xmlns:p14="http://schemas.microsoft.com/office/powerpoint/2010/main" val="395244269"/>
+        <p14:creationId xmlns:p14="http://schemas.microsoft.com/office/powerpoint/2010/main" val="3896678191"/>
       </p:ext>
     </p:extLst>
   </p:cSld>
@@ -4678,7 +4712,11 @@
                 <a:ea typeface="Calibri"/>
                 <a:cs typeface="Calibri"/>
               </a:rPr>
-              <a:t>This is most useful when looking at regional market differences in health questions. </a:t>
+              <a:t>Example from 1: </a:t>
+            </a:r>
+            <a:r>
+              <a:rPr lang="en-US" dirty="0"/>
+              <a:t>in the 2000s, Oregon chose to expand its Medicaid program for poor adults by making it more generous. They used a lottery – this randomization can be an IV to back out LATE from ITT. </a:t>
             </a:r>
           </a:p>
         </p:txBody>
@@ -4709,7 +4747,7 @@
     </p:spTree>
     <p:extLst>
       <p:ext uri="{BB962C8B-B14F-4D97-AF65-F5344CB8AC3E}">
-        <p14:creationId xmlns:p14="http://schemas.microsoft.com/office/powerpoint/2010/main" val="4231078079"/>
+        <p14:creationId xmlns:p14="http://schemas.microsoft.com/office/powerpoint/2010/main" val="3696218390"/>
       </p:ext>
     </p:extLst>
   </p:cSld>
@@ -4720,6 +4758,117 @@
 </file>
 
 <file path=ppt/notesSlides/notesSlide5.xml><?xml version="1.0" encoding="utf-8"?>
+<p:notes xmlns:a="http://schemas.openxmlformats.org/drawingml/2006/main" xmlns:r="http://schemas.openxmlformats.org/officeDocument/2006/relationships" xmlns:p="http://schemas.openxmlformats.org/presentationml/2006/main">
+  <p:cSld>
+    <p:spTree>
+      <p:nvGrpSpPr>
+        <p:cNvPr id="1" name="">
+          <a:extLst>
+            <a:ext uri="{FF2B5EF4-FFF2-40B4-BE49-F238E27FC236}">
+              <a16:creationId xmlns:a16="http://schemas.microsoft.com/office/drawing/2014/main" id="{3451EA08-45DA-A6A0-47C1-83D078797D67}"/>
+            </a:ext>
+          </a:extLst>
+        </p:cNvPr>
+        <p:cNvGrpSpPr/>
+        <p:nvPr/>
+      </p:nvGrpSpPr>
+      <p:grpSpPr>
+        <a:xfrm>
+          <a:off x="0" y="0"/>
+          <a:ext cx="0" cy="0"/>
+          <a:chOff x="0" y="0"/>
+          <a:chExt cx="0" cy="0"/>
+        </a:xfrm>
+      </p:grpSpPr>
+      <p:sp>
+        <p:nvSpPr>
+          <p:cNvPr id="2" name="Slide Image Placeholder 1">
+            <a:extLst>
+              <a:ext uri="{FF2B5EF4-FFF2-40B4-BE49-F238E27FC236}">
+                <a16:creationId xmlns:a16="http://schemas.microsoft.com/office/drawing/2014/main" id="{31FF46B3-A54A-1568-AE78-38D3BCF199A1}"/>
+              </a:ext>
+            </a:extLst>
+          </p:cNvPr>
+          <p:cNvSpPr>
+            <a:spLocks noGrp="1" noRot="1" noChangeAspect="1"/>
+          </p:cNvSpPr>
+          <p:nvPr>
+            <p:ph type="sldImg"/>
+          </p:nvPr>
+        </p:nvSpPr>
+        <p:spPr/>
+      </p:sp>
+      <p:sp>
+        <p:nvSpPr>
+          <p:cNvPr id="3" name="Notes Placeholder 2">
+            <a:extLst>
+              <a:ext uri="{FF2B5EF4-FFF2-40B4-BE49-F238E27FC236}">
+                <a16:creationId xmlns:a16="http://schemas.microsoft.com/office/drawing/2014/main" id="{67527CAA-6874-C1B4-419B-A1E82769E822}"/>
+              </a:ext>
+            </a:extLst>
+          </p:cNvPr>
+          <p:cNvSpPr>
+            <a:spLocks noGrp="1"/>
+          </p:cNvSpPr>
+          <p:nvPr>
+            <p:ph type="body" idx="1"/>
+          </p:nvPr>
+        </p:nvSpPr>
+        <p:spPr/>
+        <p:txBody>
+          <a:bodyPr/>
+          <a:lstStyle/>
+          <a:p>
+            <a:r>
+              <a:rPr lang="en-US" dirty="0"/>
+              <a:t>“Model-based” vs. “design-based”</a:t>
+            </a:r>
+          </a:p>
+        </p:txBody>
+      </p:sp>
+      <p:sp>
+        <p:nvSpPr>
+          <p:cNvPr id="4" name="Slide Number Placeholder 3">
+            <a:extLst>
+              <a:ext uri="{FF2B5EF4-FFF2-40B4-BE49-F238E27FC236}">
+                <a16:creationId xmlns:a16="http://schemas.microsoft.com/office/drawing/2014/main" id="{85EB56E2-8E2C-9388-78F6-8D9E41CB30E1}"/>
+              </a:ext>
+            </a:extLst>
+          </p:cNvPr>
+          <p:cNvSpPr>
+            <a:spLocks noGrp="1"/>
+          </p:cNvSpPr>
+          <p:nvPr>
+            <p:ph type="sldNum" sz="quarter" idx="5"/>
+          </p:nvPr>
+        </p:nvSpPr>
+        <p:spPr/>
+        <p:txBody>
+          <a:bodyPr/>
+          <a:lstStyle/>
+          <a:p>
+            <a:fld id="{4AF79E1B-2C51-4B9B-8EA4-26DE9E345AFF}" type="slidenum">
+              <a:rPr lang="en-US" smtClean="0"/>
+              <a:t>5</a:t>
+            </a:fld>
+            <a:endParaRPr lang="en-US"/>
+          </a:p>
+        </p:txBody>
+      </p:sp>
+    </p:spTree>
+    <p:extLst>
+      <p:ext uri="{BB962C8B-B14F-4D97-AF65-F5344CB8AC3E}">
+        <p14:creationId xmlns:p14="http://schemas.microsoft.com/office/powerpoint/2010/main" val="4078635641"/>
+      </p:ext>
+    </p:extLst>
+  </p:cSld>
+  <p:clrMapOvr>
+    <a:masterClrMapping/>
+  </p:clrMapOvr>
+</p:notes>
+</file>
+
+<file path=ppt/notesSlides/notesSlide50.xml><?xml version="1.0" encoding="utf-8"?>
 <p:notes xmlns:a="http://schemas.openxmlformats.org/drawingml/2006/main" xmlns:r="http://schemas.openxmlformats.org/officeDocument/2006/relationships" xmlns:p="http://schemas.openxmlformats.org/presentationml/2006/main">
   <p:cSld>
     <p:spTree>
@@ -4764,9 +4913,20 @@
           <a:lstStyle/>
           <a:p>
             <a:r>
+              <a:rPr lang="en-US" dirty="0">
+                <a:ea typeface="Calibri"/>
+                <a:cs typeface="Calibri"/>
+              </a:rPr>
+              <a:t>This</a:t>
+            </a:r>
+            <a:r>
               <a:rPr lang="en-US" dirty="0"/>
-              <a:t>Lots of frozen in our house these days, so I want this playing in all of our heads. </a:t>
-            </a:r>
+              <a:t> is just really popular with judges, doesn't have to be criminal. Possible examples: FDA approval, physician decision-making. Some concerns: is assignment truly random? Is the pipeline really narrow? Can the discretion be chosen by the patient/entity? Paper uses differences in nursing home eligibility assessors to find that access to nursing homes lowers use of other kinds of care, but does not affect health spending or mortality meaningfully. Plenty of opportunities to implement this design more meaningfully. </a:t>
+            </a:r>
+            <a:endParaRPr lang="en-US" dirty="0">
+              <a:ea typeface="Calibri"/>
+              <a:cs typeface="Calibri"/>
+            </a:endParaRPr>
           </a:p>
         </p:txBody>
       </p:sp>
@@ -4785,9 +4945,9 @@
           <a:bodyPr/>
           <a:lstStyle/>
           <a:p>
-            <a:fld id="{4AF79E1B-2C51-4B9B-8EA4-26DE9E345AFF}" type="slidenum">
+            <a:fld id="{3298C5B2-5D6B-2949-9D6C-64FEDA8AB56A}" type="slidenum">
               <a:rPr lang="en-US" smtClean="0"/>
-              <a:t>5</a:t>
+              <a:t>53</a:t>
             </a:fld>
             <a:endParaRPr lang="en-US"/>
           </a:p>
@@ -4796,7 +4956,7 @@
     </p:spTree>
     <p:extLst>
       <p:ext uri="{BB962C8B-B14F-4D97-AF65-F5344CB8AC3E}">
-        <p14:creationId xmlns:p14="http://schemas.microsoft.com/office/powerpoint/2010/main" val="3031818284"/>
+        <p14:creationId xmlns:p14="http://schemas.microsoft.com/office/powerpoint/2010/main" val="395244269"/>
       </p:ext>
     </p:extLst>
   </p:cSld>
@@ -4806,7 +4966,97 @@
 </p:notes>
 </file>
 
-<file path=ppt/notesSlides/notesSlide50.xml><?xml version="1.0" encoding="utf-8"?>
+<file path=ppt/notesSlides/notesSlide51.xml><?xml version="1.0" encoding="utf-8"?>
+<p:notes xmlns:a="http://schemas.openxmlformats.org/drawingml/2006/main" xmlns:r="http://schemas.openxmlformats.org/officeDocument/2006/relationships" xmlns:p="http://schemas.openxmlformats.org/presentationml/2006/main">
+  <p:cSld>
+    <p:spTree>
+      <p:nvGrpSpPr>
+        <p:cNvPr id="1" name=""/>
+        <p:cNvGrpSpPr/>
+        <p:nvPr/>
+      </p:nvGrpSpPr>
+      <p:grpSpPr>
+        <a:xfrm>
+          <a:off x="0" y="0"/>
+          <a:ext cx="0" cy="0"/>
+          <a:chOff x="0" y="0"/>
+          <a:chExt cx="0" cy="0"/>
+        </a:xfrm>
+      </p:grpSpPr>
+      <p:sp>
+        <p:nvSpPr>
+          <p:cNvPr id="2" name="Slide Image Placeholder 1"/>
+          <p:cNvSpPr>
+            <a:spLocks noGrp="1" noRot="1" noChangeAspect="1"/>
+          </p:cNvSpPr>
+          <p:nvPr>
+            <p:ph type="sldImg"/>
+          </p:nvPr>
+        </p:nvSpPr>
+        <p:spPr/>
+      </p:sp>
+      <p:sp>
+        <p:nvSpPr>
+          <p:cNvPr id="3" name="Notes Placeholder 2"/>
+          <p:cNvSpPr>
+            <a:spLocks noGrp="1"/>
+          </p:cNvSpPr>
+          <p:nvPr>
+            <p:ph type="body" idx="1"/>
+          </p:nvPr>
+        </p:nvSpPr>
+        <p:spPr/>
+        <p:txBody>
+          <a:bodyPr/>
+          <a:lstStyle/>
+          <a:p>
+            <a:r>
+              <a:rPr lang="en-US" dirty="0">
+                <a:ea typeface="Calibri"/>
+                <a:cs typeface="Calibri"/>
+              </a:rPr>
+              <a:t>This is most useful when looking at regional market differences in health questions. </a:t>
+            </a:r>
+          </a:p>
+        </p:txBody>
+      </p:sp>
+      <p:sp>
+        <p:nvSpPr>
+          <p:cNvPr id="4" name="Slide Number Placeholder 3"/>
+          <p:cNvSpPr>
+            <a:spLocks noGrp="1"/>
+          </p:cNvSpPr>
+          <p:nvPr>
+            <p:ph type="sldNum" sz="quarter" idx="5"/>
+          </p:nvPr>
+        </p:nvSpPr>
+        <p:spPr/>
+        <p:txBody>
+          <a:bodyPr/>
+          <a:lstStyle/>
+          <a:p>
+            <a:fld id="{3298C5B2-5D6B-2949-9D6C-64FEDA8AB56A}" type="slidenum">
+              <a:rPr lang="en-US" smtClean="0"/>
+              <a:t>54</a:t>
+            </a:fld>
+            <a:endParaRPr lang="en-US"/>
+          </a:p>
+        </p:txBody>
+      </p:sp>
+    </p:spTree>
+    <p:extLst>
+      <p:ext uri="{BB962C8B-B14F-4D97-AF65-F5344CB8AC3E}">
+        <p14:creationId xmlns:p14="http://schemas.microsoft.com/office/powerpoint/2010/main" val="4231078079"/>
+      </p:ext>
+    </p:extLst>
+  </p:cSld>
+  <p:clrMapOvr>
+    <a:masterClrMapping/>
+  </p:clrMapOvr>
+</p:notes>
+</file>
+
+<file path=ppt/notesSlides/notesSlide52.xml><?xml version="1.0" encoding="utf-8"?>
 <p:notes xmlns:a="http://schemas.openxmlformats.org/drawingml/2006/main" xmlns:r="http://schemas.openxmlformats.org/officeDocument/2006/relationships" xmlns:p="http://schemas.openxmlformats.org/presentationml/2006/main">
   <p:cSld>
     <p:spTree>
@@ -4901,7 +5151,7 @@
           <a:p>
             <a:fld id="{3298C5B2-5D6B-2949-9D6C-64FEDA8AB56A}" type="slidenum">
               <a:rPr lang="en-US" smtClean="0"/>
-              <a:t>53</a:t>
+              <a:t>55</a:t>
             </a:fld>
             <a:endParaRPr lang="en-US"/>
           </a:p>
@@ -4920,7 +5170,7 @@
 </p:notes>
 </file>
 
-<file path=ppt/notesSlides/notesSlide51.xml><?xml version="1.0" encoding="utf-8"?>
+<file path=ppt/notesSlides/notesSlide53.xml><?xml version="1.0" encoding="utf-8"?>
 <p:notes xmlns:a="http://schemas.openxmlformats.org/drawingml/2006/main" xmlns:r="http://schemas.openxmlformats.org/officeDocument/2006/relationships" xmlns:p="http://schemas.openxmlformats.org/presentationml/2006/main">
   <p:cSld>
     <p:spTree>
@@ -5009,7 +5259,7 @@
           <a:p>
             <a:fld id="{4AF79E1B-2C51-4B9B-8EA4-26DE9E345AFF}" type="slidenum">
               <a:rPr lang="en-US" smtClean="0"/>
-              <a:t>54</a:t>
+              <a:t>56</a:t>
             </a:fld>
             <a:endParaRPr lang="en-US"/>
           </a:p>
@@ -5072,7 +5322,18 @@
           <a:bodyPr/>
           <a:lstStyle/>
           <a:p>
-            <a:endParaRPr lang="en-US" dirty="0"/>
+            <a:r>
+              <a:rPr lang="en-US" dirty="0"/>
+              <a:t>This </a:t>
+            </a:r>
+            <a:r>
+              <a:rPr lang="en-US" dirty="0" err="1"/>
+              <a:t>dag</a:t>
+            </a:r>
+            <a:r>
+              <a:rPr lang="en-US" dirty="0"/>
+              <a:t> cannot be addressed fully with a back-door approach (how do we ever measure ability)? The front door finds an instrument M such that there is no back door between education and M, and education blocks the only open back-door between M and wage (ability). This is an open door! Example of M: quarter of birth (Angrist and Kreuger, 1991). M goes behind education and connects to it. </a:t>
+            </a:r>
           </a:p>
         </p:txBody>
       </p:sp>
@@ -5102,7 +5363,7 @@
     </p:spTree>
     <p:extLst>
       <p:ext uri="{BB962C8B-B14F-4D97-AF65-F5344CB8AC3E}">
-        <p14:creationId xmlns:p14="http://schemas.microsoft.com/office/powerpoint/2010/main" val="2574600934"/>
+        <p14:creationId xmlns:p14="http://schemas.microsoft.com/office/powerpoint/2010/main" val="3822811900"/>
       </p:ext>
     </p:extLst>
   </p:cSld>
@@ -5156,6 +5417,177 @@
           <a:bodyPr/>
           <a:lstStyle/>
           <a:p>
+            <a:r>
+              <a:rPr lang="en-US" dirty="0"/>
+              <a:t>Lots of frozen in our house these days, so I want this playing in all of our heads. </a:t>
+            </a:r>
+          </a:p>
+        </p:txBody>
+      </p:sp>
+      <p:sp>
+        <p:nvSpPr>
+          <p:cNvPr id="4" name="Slide Number Placeholder 3"/>
+          <p:cNvSpPr>
+            <a:spLocks noGrp="1"/>
+          </p:cNvSpPr>
+          <p:nvPr>
+            <p:ph type="sldNum" sz="quarter" idx="5"/>
+          </p:nvPr>
+        </p:nvSpPr>
+        <p:spPr/>
+        <p:txBody>
+          <a:bodyPr/>
+          <a:lstStyle/>
+          <a:p>
+            <a:fld id="{4AF79E1B-2C51-4B9B-8EA4-26DE9E345AFF}" type="slidenum">
+              <a:rPr lang="en-US" smtClean="0"/>
+              <a:t>7</a:t>
+            </a:fld>
+            <a:endParaRPr lang="en-US"/>
+          </a:p>
+        </p:txBody>
+      </p:sp>
+    </p:spTree>
+    <p:extLst>
+      <p:ext uri="{BB962C8B-B14F-4D97-AF65-F5344CB8AC3E}">
+        <p14:creationId xmlns:p14="http://schemas.microsoft.com/office/powerpoint/2010/main" val="3031818284"/>
+      </p:ext>
+    </p:extLst>
+  </p:cSld>
+  <p:clrMapOvr>
+    <a:masterClrMapping/>
+  </p:clrMapOvr>
+</p:notes>
+</file>
+
+<file path=ppt/notesSlides/notesSlide8.xml><?xml version="1.0" encoding="utf-8"?>
+<p:notes xmlns:a="http://schemas.openxmlformats.org/drawingml/2006/main" xmlns:r="http://schemas.openxmlformats.org/officeDocument/2006/relationships" xmlns:p="http://schemas.openxmlformats.org/presentationml/2006/main">
+  <p:cSld>
+    <p:spTree>
+      <p:nvGrpSpPr>
+        <p:cNvPr id="1" name=""/>
+        <p:cNvGrpSpPr/>
+        <p:nvPr/>
+      </p:nvGrpSpPr>
+      <p:grpSpPr>
+        <a:xfrm>
+          <a:off x="0" y="0"/>
+          <a:ext cx="0" cy="0"/>
+          <a:chOff x="0" y="0"/>
+          <a:chExt cx="0" cy="0"/>
+        </a:xfrm>
+      </p:grpSpPr>
+      <p:sp>
+        <p:nvSpPr>
+          <p:cNvPr id="2" name="Slide Image Placeholder 1"/>
+          <p:cNvSpPr>
+            <a:spLocks noGrp="1" noRot="1" noChangeAspect="1"/>
+          </p:cNvSpPr>
+          <p:nvPr>
+            <p:ph type="sldImg"/>
+          </p:nvPr>
+        </p:nvSpPr>
+        <p:spPr/>
+      </p:sp>
+      <p:sp>
+        <p:nvSpPr>
+          <p:cNvPr id="3" name="Notes Placeholder 2"/>
+          <p:cNvSpPr>
+            <a:spLocks noGrp="1"/>
+          </p:cNvSpPr>
+          <p:nvPr>
+            <p:ph type="body" idx="1"/>
+          </p:nvPr>
+        </p:nvSpPr>
+        <p:spPr/>
+        <p:txBody>
+          <a:bodyPr/>
+          <a:lstStyle/>
+          <a:p>
+            <a:endParaRPr lang="en-US" dirty="0"/>
+          </a:p>
+        </p:txBody>
+      </p:sp>
+      <p:sp>
+        <p:nvSpPr>
+          <p:cNvPr id="4" name="Slide Number Placeholder 3"/>
+          <p:cNvSpPr>
+            <a:spLocks noGrp="1"/>
+          </p:cNvSpPr>
+          <p:nvPr>
+            <p:ph type="sldNum" sz="quarter" idx="5"/>
+          </p:nvPr>
+        </p:nvSpPr>
+        <p:spPr/>
+        <p:txBody>
+          <a:bodyPr/>
+          <a:lstStyle/>
+          <a:p>
+            <a:fld id="{4AF79E1B-2C51-4B9B-8EA4-26DE9E345AFF}" type="slidenum">
+              <a:rPr lang="en-US" smtClean="0"/>
+              <a:t>8</a:t>
+            </a:fld>
+            <a:endParaRPr lang="en-US"/>
+          </a:p>
+        </p:txBody>
+      </p:sp>
+    </p:spTree>
+    <p:extLst>
+      <p:ext uri="{BB962C8B-B14F-4D97-AF65-F5344CB8AC3E}">
+        <p14:creationId xmlns:p14="http://schemas.microsoft.com/office/powerpoint/2010/main" val="2574600934"/>
+      </p:ext>
+    </p:extLst>
+  </p:cSld>
+  <p:clrMapOvr>
+    <a:masterClrMapping/>
+  </p:clrMapOvr>
+</p:notes>
+</file>
+
+<file path=ppt/notesSlides/notesSlide9.xml><?xml version="1.0" encoding="utf-8"?>
+<p:notes xmlns:a="http://schemas.openxmlformats.org/drawingml/2006/main" xmlns:r="http://schemas.openxmlformats.org/officeDocument/2006/relationships" xmlns:p="http://schemas.openxmlformats.org/presentationml/2006/main">
+  <p:cSld>
+    <p:spTree>
+      <p:nvGrpSpPr>
+        <p:cNvPr id="1" name=""/>
+        <p:cNvGrpSpPr/>
+        <p:nvPr/>
+      </p:nvGrpSpPr>
+      <p:grpSpPr>
+        <a:xfrm>
+          <a:off x="0" y="0"/>
+          <a:ext cx="0" cy="0"/>
+          <a:chOff x="0" y="0"/>
+          <a:chExt cx="0" cy="0"/>
+        </a:xfrm>
+      </p:grpSpPr>
+      <p:sp>
+        <p:nvSpPr>
+          <p:cNvPr id="2" name="Slide Image Placeholder 1"/>
+          <p:cNvSpPr>
+            <a:spLocks noGrp="1" noRot="1" noChangeAspect="1"/>
+          </p:cNvSpPr>
+          <p:nvPr>
+            <p:ph type="sldImg"/>
+          </p:nvPr>
+        </p:nvSpPr>
+        <p:spPr/>
+      </p:sp>
+      <p:sp>
+        <p:nvSpPr>
+          <p:cNvPr id="3" name="Notes Placeholder 2"/>
+          <p:cNvSpPr>
+            <a:spLocks noGrp="1"/>
+          </p:cNvSpPr>
+          <p:nvPr>
+            <p:ph type="body" idx="1"/>
+          </p:nvPr>
+        </p:nvSpPr>
+        <p:spPr/>
+        <p:txBody>
+          <a:bodyPr/>
+          <a:lstStyle/>
+          <a:p>
             <a:pPr marL="0" marR="0" lvl="0" indent="0" algn="l" defTabSz="914400" rtl="0" eaLnBrk="1" fontAlgn="auto" latinLnBrk="0" hangingPunct="1">
               <a:lnSpc>
                 <a:spcPct val="100000"/>
@@ -5197,7 +5629,7 @@
           <a:p>
             <a:fld id="{4AF79E1B-2C51-4B9B-8EA4-26DE9E345AFF}" type="slidenum">
               <a:rPr lang="en-US" smtClean="0"/>
-              <a:t>7</a:t>
+              <a:t>9</a:t>
             </a:fld>
             <a:endParaRPr lang="en-US"/>
           </a:p>
@@ -5207,262 +5639,6 @@
     <p:extLst>
       <p:ext uri="{BB962C8B-B14F-4D97-AF65-F5344CB8AC3E}">
         <p14:creationId xmlns:p14="http://schemas.microsoft.com/office/powerpoint/2010/main" val="3230424860"/>
-      </p:ext>
-    </p:extLst>
-  </p:cSld>
-  <p:clrMapOvr>
-    <a:masterClrMapping/>
-  </p:clrMapOvr>
-</p:notes>
-</file>
-
-<file path=ppt/notesSlides/notesSlide8.xml><?xml version="1.0" encoding="utf-8"?>
-<p:notes xmlns:a="http://schemas.openxmlformats.org/drawingml/2006/main" xmlns:r="http://schemas.openxmlformats.org/officeDocument/2006/relationships" xmlns:p="http://schemas.openxmlformats.org/presentationml/2006/main">
-  <p:cSld>
-    <p:spTree>
-      <p:nvGrpSpPr>
-        <p:cNvPr id="1" name="">
-          <a:extLst>
-            <a:ext uri="{FF2B5EF4-FFF2-40B4-BE49-F238E27FC236}">
-              <a16:creationId xmlns:a16="http://schemas.microsoft.com/office/drawing/2014/main" id="{DCAE5C3A-8AC3-FB12-69FD-6165599F98EE}"/>
-            </a:ext>
-          </a:extLst>
-        </p:cNvPr>
-        <p:cNvGrpSpPr/>
-        <p:nvPr/>
-      </p:nvGrpSpPr>
-      <p:grpSpPr>
-        <a:xfrm>
-          <a:off x="0" y="0"/>
-          <a:ext cx="0" cy="0"/>
-          <a:chOff x="0" y="0"/>
-          <a:chExt cx="0" cy="0"/>
-        </a:xfrm>
-      </p:grpSpPr>
-      <p:sp>
-        <p:nvSpPr>
-          <p:cNvPr id="2" name="Slide Image Placeholder 1">
-            <a:extLst>
-              <a:ext uri="{FF2B5EF4-FFF2-40B4-BE49-F238E27FC236}">
-                <a16:creationId xmlns:a16="http://schemas.microsoft.com/office/drawing/2014/main" id="{42AFCDE5-7EE6-E1A1-73F6-9AAA7286F416}"/>
-              </a:ext>
-            </a:extLst>
-          </p:cNvPr>
-          <p:cNvSpPr>
-            <a:spLocks noGrp="1" noRot="1" noChangeAspect="1"/>
-          </p:cNvSpPr>
-          <p:nvPr>
-            <p:ph type="sldImg"/>
-          </p:nvPr>
-        </p:nvSpPr>
-        <p:spPr/>
-      </p:sp>
-      <p:sp>
-        <p:nvSpPr>
-          <p:cNvPr id="3" name="Notes Placeholder 2">
-            <a:extLst>
-              <a:ext uri="{FF2B5EF4-FFF2-40B4-BE49-F238E27FC236}">
-                <a16:creationId xmlns:a16="http://schemas.microsoft.com/office/drawing/2014/main" id="{E8AD204B-3DBB-221A-0377-4D1B4FD0372D}"/>
-              </a:ext>
-            </a:extLst>
-          </p:cNvPr>
-          <p:cNvSpPr>
-            <a:spLocks noGrp="1"/>
-          </p:cNvSpPr>
-          <p:nvPr>
-            <p:ph type="body" idx="1"/>
-          </p:nvPr>
-        </p:nvSpPr>
-        <p:spPr/>
-        <p:txBody>
-          <a:bodyPr/>
-          <a:lstStyle/>
-          <a:p>
-            <a:pPr marL="0" marR="0" lvl="0" indent="0" algn="l" defTabSz="914400" rtl="0" eaLnBrk="1" fontAlgn="auto" latinLnBrk="0" hangingPunct="1">
-              <a:lnSpc>
-                <a:spcPct val="100000"/>
-              </a:lnSpc>
-              <a:spcBef>
-                <a:spcPts val="0"/>
-              </a:spcBef>
-              <a:spcAft>
-                <a:spcPts val="0"/>
-              </a:spcAft>
-              <a:buClrTx/>
-              <a:buSzTx/>
-              <a:buFontTx/>
-              <a:buNone/>
-              <a:tabLst/>
-              <a:defRPr/>
-            </a:pPr>
-            <a:r>
-              <a:rPr lang="en-US" dirty="0"/>
-              <a:t>Recommend looking at the related invited commentary as well to get a sense of this better. https://jamanetwork.com/journals/jamainternalmedicine/article-abstract/1108791</a:t>
-            </a:r>
-          </a:p>
-        </p:txBody>
-      </p:sp>
-      <p:sp>
-        <p:nvSpPr>
-          <p:cNvPr id="4" name="Slide Number Placeholder 3">
-            <a:extLst>
-              <a:ext uri="{FF2B5EF4-FFF2-40B4-BE49-F238E27FC236}">
-                <a16:creationId xmlns:a16="http://schemas.microsoft.com/office/drawing/2014/main" id="{72E2FF48-8346-EB57-7125-E346D30DA567}"/>
-              </a:ext>
-            </a:extLst>
-          </p:cNvPr>
-          <p:cNvSpPr>
-            <a:spLocks noGrp="1"/>
-          </p:cNvSpPr>
-          <p:nvPr>
-            <p:ph type="sldNum" sz="quarter" idx="5"/>
-          </p:nvPr>
-        </p:nvSpPr>
-        <p:spPr/>
-        <p:txBody>
-          <a:bodyPr/>
-          <a:lstStyle/>
-          <a:p>
-            <a:fld id="{4AF79E1B-2C51-4B9B-8EA4-26DE9E345AFF}" type="slidenum">
-              <a:rPr lang="en-US" smtClean="0"/>
-              <a:t>8</a:t>
-            </a:fld>
-            <a:endParaRPr lang="en-US"/>
-          </a:p>
-        </p:txBody>
-      </p:sp>
-    </p:spTree>
-    <p:extLst>
-      <p:ext uri="{BB962C8B-B14F-4D97-AF65-F5344CB8AC3E}">
-        <p14:creationId xmlns:p14="http://schemas.microsoft.com/office/powerpoint/2010/main" val="1977127807"/>
-      </p:ext>
-    </p:extLst>
-  </p:cSld>
-  <p:clrMapOvr>
-    <a:masterClrMapping/>
-  </p:clrMapOvr>
-</p:notes>
-</file>
-
-<file path=ppt/notesSlides/notesSlide9.xml><?xml version="1.0" encoding="utf-8"?>
-<p:notes xmlns:a="http://schemas.openxmlformats.org/drawingml/2006/main" xmlns:r="http://schemas.openxmlformats.org/officeDocument/2006/relationships" xmlns:p="http://schemas.openxmlformats.org/presentationml/2006/main">
-  <p:cSld>
-    <p:spTree>
-      <p:nvGrpSpPr>
-        <p:cNvPr id="1" name="">
-          <a:extLst>
-            <a:ext uri="{FF2B5EF4-FFF2-40B4-BE49-F238E27FC236}">
-              <a16:creationId xmlns:a16="http://schemas.microsoft.com/office/drawing/2014/main" id="{E05E8907-F9D5-DEF5-BB72-F8E64F6D043A}"/>
-            </a:ext>
-          </a:extLst>
-        </p:cNvPr>
-        <p:cNvGrpSpPr/>
-        <p:nvPr/>
-      </p:nvGrpSpPr>
-      <p:grpSpPr>
-        <a:xfrm>
-          <a:off x="0" y="0"/>
-          <a:ext cx="0" cy="0"/>
-          <a:chOff x="0" y="0"/>
-          <a:chExt cx="0" cy="0"/>
-        </a:xfrm>
-      </p:grpSpPr>
-      <p:sp>
-        <p:nvSpPr>
-          <p:cNvPr id="2" name="Slide Image Placeholder 1">
-            <a:extLst>
-              <a:ext uri="{FF2B5EF4-FFF2-40B4-BE49-F238E27FC236}">
-                <a16:creationId xmlns:a16="http://schemas.microsoft.com/office/drawing/2014/main" id="{83DDC728-4717-218E-C23D-0A292A23370D}"/>
-              </a:ext>
-            </a:extLst>
-          </p:cNvPr>
-          <p:cNvSpPr>
-            <a:spLocks noGrp="1" noRot="1" noChangeAspect="1"/>
-          </p:cNvSpPr>
-          <p:nvPr>
-            <p:ph type="sldImg"/>
-          </p:nvPr>
-        </p:nvSpPr>
-        <p:spPr/>
-      </p:sp>
-      <p:sp>
-        <p:nvSpPr>
-          <p:cNvPr id="3" name="Notes Placeholder 2">
-            <a:extLst>
-              <a:ext uri="{FF2B5EF4-FFF2-40B4-BE49-F238E27FC236}">
-                <a16:creationId xmlns:a16="http://schemas.microsoft.com/office/drawing/2014/main" id="{C0371E61-8BAE-9A96-0D43-601D3618D5D4}"/>
-              </a:ext>
-            </a:extLst>
-          </p:cNvPr>
-          <p:cNvSpPr>
-            <a:spLocks noGrp="1"/>
-          </p:cNvSpPr>
-          <p:nvPr>
-            <p:ph type="body" idx="1"/>
-          </p:nvPr>
-        </p:nvSpPr>
-        <p:spPr/>
-        <p:txBody>
-          <a:bodyPr/>
-          <a:lstStyle/>
-          <a:p>
-            <a:pPr marL="0" marR="0" lvl="0" indent="0" algn="l" defTabSz="914400" rtl="0" eaLnBrk="1" fontAlgn="auto" latinLnBrk="0" hangingPunct="1">
-              <a:lnSpc>
-                <a:spcPct val="100000"/>
-              </a:lnSpc>
-              <a:spcBef>
-                <a:spcPts val="0"/>
-              </a:spcBef>
-              <a:spcAft>
-                <a:spcPts val="0"/>
-              </a:spcAft>
-              <a:buClrTx/>
-              <a:buSzTx/>
-              <a:buFontTx/>
-              <a:buNone/>
-              <a:tabLst/>
-              <a:defRPr/>
-            </a:pPr>
-            <a:r>
-              <a:rPr lang="en-US" dirty="0"/>
-              <a:t>Note: if you want the correct way to talk about this, you need to read an economics paper. Like the dialysis one. Very careful with language even though everyone else hates us for it. </a:t>
-            </a:r>
-          </a:p>
-        </p:txBody>
-      </p:sp>
-      <p:sp>
-        <p:nvSpPr>
-          <p:cNvPr id="4" name="Slide Number Placeholder 3">
-            <a:extLst>
-              <a:ext uri="{FF2B5EF4-FFF2-40B4-BE49-F238E27FC236}">
-                <a16:creationId xmlns:a16="http://schemas.microsoft.com/office/drawing/2014/main" id="{AA7420C5-105C-A464-BC94-5AF2732DFAF0}"/>
-              </a:ext>
-            </a:extLst>
-          </p:cNvPr>
-          <p:cNvSpPr>
-            <a:spLocks noGrp="1"/>
-          </p:cNvSpPr>
-          <p:nvPr>
-            <p:ph type="sldNum" sz="quarter" idx="5"/>
-          </p:nvPr>
-        </p:nvSpPr>
-        <p:spPr/>
-        <p:txBody>
-          <a:bodyPr/>
-          <a:lstStyle/>
-          <a:p>
-            <a:fld id="{4AF79E1B-2C51-4B9B-8EA4-26DE9E345AFF}" type="slidenum">
-              <a:rPr lang="en-US" smtClean="0"/>
-              <a:t>9</a:t>
-            </a:fld>
-            <a:endParaRPr lang="en-US"/>
-          </a:p>
-        </p:txBody>
-      </p:sp>
-    </p:spTree>
-    <p:extLst>
-      <p:ext uri="{BB962C8B-B14F-4D97-AF65-F5344CB8AC3E}">
-        <p14:creationId xmlns:p14="http://schemas.microsoft.com/office/powerpoint/2010/main" val="2465575120"/>
       </p:ext>
     </p:extLst>
   </p:cSld>
@@ -5641,7 +5817,7 @@
             <a:fld id="{0972D05C-DCFB-4BB6-B49C-AC126BF3ED2C}" type="datetimeFigureOut">
               <a:rPr lang="en-US" smtClean="0"/>
               <a:pPr/>
-              <a:t>7/22/2026</a:t>
+              <a:t>10/26/2026</a:t>
             </a:fld>
             <a:endParaRPr lang="en-US"/>
           </a:p>
@@ -5878,7 +6054,7 @@
             <a:fld id="{0972D05C-DCFB-4BB6-B49C-AC126BF3ED2C}" type="datetimeFigureOut">
               <a:rPr lang="en-US" smtClean="0"/>
               <a:pPr/>
-              <a:t>7/22/2026</a:t>
+              <a:t>10/26/2026</a:t>
             </a:fld>
             <a:endParaRPr lang="en-US"/>
           </a:p>
@@ -6060,7 +6236,7 @@
             <a:fld id="{0972D05C-DCFB-4BB6-B49C-AC126BF3ED2C}" type="datetimeFigureOut">
               <a:rPr lang="en-US" smtClean="0"/>
               <a:pPr/>
-              <a:t>7/22/2026</a:t>
+              <a:t>10/26/2026</a:t>
             </a:fld>
             <a:endParaRPr lang="en-US"/>
           </a:p>
@@ -6232,7 +6408,7 @@
             <a:fld id="{0972D05C-DCFB-4BB6-B49C-AC126BF3ED2C}" type="datetimeFigureOut">
               <a:rPr lang="en-US" smtClean="0"/>
               <a:pPr/>
-              <a:t>7/22/2026</a:t>
+              <a:t>10/26/2026</a:t>
             </a:fld>
             <a:endParaRPr lang="en-US"/>
           </a:p>
@@ -6488,7 +6664,7 @@
             <a:fld id="{0972D05C-DCFB-4BB6-B49C-AC126BF3ED2C}" type="datetimeFigureOut">
               <a:rPr lang="en-US" smtClean="0"/>
               <a:pPr/>
-              <a:t>7/22/2026</a:t>
+              <a:t>10/26/2026</a:t>
             </a:fld>
             <a:endParaRPr lang="en-US"/>
           </a:p>
@@ -6816,7 +6992,7 @@
             <a:fld id="{0972D05C-DCFB-4BB6-B49C-AC126BF3ED2C}" type="datetimeFigureOut">
               <a:rPr lang="en-US" smtClean="0"/>
               <a:pPr/>
-              <a:t>7/22/2026</a:t>
+              <a:t>10/26/2026</a:t>
             </a:fld>
             <a:endParaRPr lang="en-US"/>
           </a:p>
@@ -7269,7 +7445,7 @@
             <a:fld id="{0972D05C-DCFB-4BB6-B49C-AC126BF3ED2C}" type="datetimeFigureOut">
               <a:rPr lang="en-US" smtClean="0"/>
               <a:pPr/>
-              <a:t>7/22/2026</a:t>
+              <a:t>10/26/2026</a:t>
             </a:fld>
             <a:endParaRPr lang="en-US"/>
           </a:p>
@@ -7389,7 +7565,7 @@
             <a:fld id="{0972D05C-DCFB-4BB6-B49C-AC126BF3ED2C}" type="datetimeFigureOut">
               <a:rPr lang="en-US" smtClean="0"/>
               <a:pPr/>
-              <a:t>7/22/2026</a:t>
+              <a:t>10/26/2026</a:t>
             </a:fld>
             <a:endParaRPr lang="en-US"/>
           </a:p>
@@ -7486,7 +7662,7 @@
             <a:fld id="{0972D05C-DCFB-4BB6-B49C-AC126BF3ED2C}" type="datetimeFigureOut">
               <a:rPr lang="en-US" smtClean="0"/>
               <a:pPr/>
-              <a:t>7/22/2026</a:t>
+              <a:t>10/26/2026</a:t>
             </a:fld>
             <a:endParaRPr lang="en-US"/>
           </a:p>
@@ -7775,7 +7951,7 @@
             <a:fld id="{0972D05C-DCFB-4BB6-B49C-AC126BF3ED2C}" type="datetimeFigureOut">
               <a:rPr lang="en-US" smtClean="0"/>
               <a:pPr/>
-              <a:t>7/22/2026</a:t>
+              <a:t>10/26/2026</a:t>
             </a:fld>
             <a:endParaRPr lang="en-US"/>
           </a:p>
@@ -8099,7 +8275,7 @@
             <a:fld id="{0972D05C-DCFB-4BB6-B49C-AC126BF3ED2C}" type="datetimeFigureOut">
               <a:rPr lang="en-US" smtClean="0"/>
               <a:pPr/>
-              <a:t>7/22/2026</a:t>
+              <a:t>10/26/2026</a:t>
             </a:fld>
             <a:endParaRPr lang="en-US"/>
           </a:p>
@@ -8361,7 +8537,7 @@
             <a:fld id="{0972D05C-DCFB-4BB6-B49C-AC126BF3ED2C}" type="datetimeFigureOut">
               <a:rPr lang="en-US" smtClean="0"/>
               <a:pPr/>
-              <a:t>7/22/2026</a:t>
+              <a:t>10/26/2026</a:t>
             </a:fld>
             <a:endParaRPr lang="en-US" dirty="0"/>
           </a:p>
@@ -8953,6 +9129,471 @@
   <p:cSld>
     <p:spTree>
       <p:nvGrpSpPr>
+        <p:cNvPr id="1" name="">
+          <a:extLst>
+            <a:ext uri="{FF2B5EF4-FFF2-40B4-BE49-F238E27FC236}">
+              <a16:creationId xmlns:a16="http://schemas.microsoft.com/office/drawing/2014/main" id="{E6D34052-3A99-C47F-C81D-4933FA52DE96}"/>
+            </a:ext>
+          </a:extLst>
+        </p:cNvPr>
+        <p:cNvGrpSpPr/>
+        <p:nvPr/>
+      </p:nvGrpSpPr>
+      <p:grpSpPr>
+        <a:xfrm>
+          <a:off x="0" y="0"/>
+          <a:ext cx="0" cy="0"/>
+          <a:chOff x="0" y="0"/>
+          <a:chExt cx="0" cy="0"/>
+        </a:xfrm>
+      </p:grpSpPr>
+      <p:sp>
+        <p:nvSpPr>
+          <p:cNvPr id="2" name="Title 1">
+            <a:extLst>
+              <a:ext uri="{FF2B5EF4-FFF2-40B4-BE49-F238E27FC236}">
+                <a16:creationId xmlns:a16="http://schemas.microsoft.com/office/drawing/2014/main" id="{B5593B20-184E-07CC-CB9B-A0355C2A2978}"/>
+              </a:ext>
+            </a:extLst>
+          </p:cNvPr>
+          <p:cNvSpPr>
+            <a:spLocks noGrp="1"/>
+          </p:cNvSpPr>
+          <p:nvPr>
+            <p:ph type="title"/>
+          </p:nvPr>
+        </p:nvSpPr>
+        <p:spPr>
+          <a:xfrm>
+            <a:off x="609600" y="337392"/>
+            <a:ext cx="10439400" cy="624840"/>
+          </a:xfrm>
+        </p:spPr>
+        <p:txBody>
+          <a:bodyPr>
+            <a:noAutofit/>
+          </a:bodyPr>
+          <a:lstStyle/>
+          <a:p>
+            <a:r>
+              <a:rPr lang="en-US" sz="3600" dirty="0">
+                <a:latin typeface="Times New Roman" panose="02020603050405020304" pitchFamily="18" charset="0"/>
+                <a:cs typeface="Times New Roman" panose="02020603050405020304" pitchFamily="18" charset="0"/>
+              </a:rPr>
+              <a:t>Example: causal effect of </a:t>
+            </a:r>
+            <a:r>
+              <a:rPr lang="en-US" sz="3600" b="1" dirty="0">
+                <a:latin typeface="Times New Roman" panose="02020603050405020304" pitchFamily="18" charset="0"/>
+                <a:cs typeface="Times New Roman" panose="02020603050405020304" pitchFamily="18" charset="0"/>
+              </a:rPr>
+              <a:t>vaccines</a:t>
+            </a:r>
+            <a:endParaRPr lang="en-US" sz="3600" dirty="0">
+              <a:latin typeface="Times New Roman" panose="02020603050405020304" pitchFamily="18" charset="0"/>
+              <a:cs typeface="Times New Roman" panose="02020603050405020304" pitchFamily="18" charset="0"/>
+            </a:endParaRPr>
+          </a:p>
+        </p:txBody>
+      </p:sp>
+      <p:sp>
+        <p:nvSpPr>
+          <p:cNvPr id="3" name="Content Placeholder 2">
+            <a:extLst>
+              <a:ext uri="{FF2B5EF4-FFF2-40B4-BE49-F238E27FC236}">
+                <a16:creationId xmlns:a16="http://schemas.microsoft.com/office/drawing/2014/main" id="{E3658A05-C001-C142-C97D-3B20B07BBD64}"/>
+              </a:ext>
+            </a:extLst>
+          </p:cNvPr>
+          <p:cNvSpPr>
+            <a:spLocks noGrp="1"/>
+          </p:cNvSpPr>
+          <p:nvPr>
+            <p:ph idx="1"/>
+          </p:nvPr>
+        </p:nvSpPr>
+        <p:spPr>
+          <a:xfrm>
+            <a:off x="609601" y="1066801"/>
+            <a:ext cx="10439400" cy="5141388"/>
+          </a:xfrm>
+        </p:spPr>
+        <p:txBody>
+          <a:bodyPr>
+            <a:noAutofit/>
+          </a:bodyPr>
+          <a:lstStyle/>
+          <a:p>
+            <a:r>
+              <a:rPr lang="en-US" sz="2400" dirty="0">
+                <a:cs typeface="Times New Roman" panose="02020603050405020304" pitchFamily="18" charset="0"/>
+              </a:rPr>
+              <a:t>Why would estimating the effect of a vaccine be hard in observational data? </a:t>
+            </a:r>
+          </a:p>
+          <a:p>
+            <a:r>
+              <a:rPr lang="en-US" sz="2400" dirty="0">
+                <a:cs typeface="Times New Roman" panose="02020603050405020304" pitchFamily="18" charset="0"/>
+              </a:rPr>
+              <a:t>If you looked at a “naïve” estimate of vaccine effectiveness, what direction would you expect it to be biased? Why?</a:t>
+            </a:r>
+          </a:p>
+        </p:txBody>
+      </p:sp>
+      <p:pic>
+        <p:nvPicPr>
+          <p:cNvPr id="6" name="Picture 5">
+            <a:extLst>
+              <a:ext uri="{FF2B5EF4-FFF2-40B4-BE49-F238E27FC236}">
+                <a16:creationId xmlns:a16="http://schemas.microsoft.com/office/drawing/2014/main" id="{8824082D-C2F7-8F38-525A-ADD4607E0D35}"/>
+              </a:ext>
+            </a:extLst>
+          </p:cNvPr>
+          <p:cNvPicPr>
+            <a:picLocks noChangeAspect="1"/>
+          </p:cNvPicPr>
+          <p:nvPr/>
+        </p:nvPicPr>
+        <p:blipFill>
+          <a:blip r:embed="rId3"/>
+          <a:stretch>
+            <a:fillRect/>
+          </a:stretch>
+        </p:blipFill>
+        <p:spPr>
+          <a:xfrm>
+            <a:off x="304800" y="4246994"/>
+            <a:ext cx="10088383" cy="2248214"/>
+          </a:xfrm>
+          <a:prstGeom prst="rect">
+            <a:avLst/>
+          </a:prstGeom>
+        </p:spPr>
+      </p:pic>
+      <p:sp>
+        <p:nvSpPr>
+          <p:cNvPr id="4" name="TextBox 3">
+            <a:extLst>
+              <a:ext uri="{FF2B5EF4-FFF2-40B4-BE49-F238E27FC236}">
+                <a16:creationId xmlns:a16="http://schemas.microsoft.com/office/drawing/2014/main" id="{0D7C7ECD-AE1D-1F70-F56E-CE94719E25E8}"/>
+              </a:ext>
+            </a:extLst>
+          </p:cNvPr>
+          <p:cNvSpPr txBox="1"/>
+          <p:nvPr/>
+        </p:nvSpPr>
+        <p:spPr>
+          <a:xfrm>
+            <a:off x="2362200" y="2438400"/>
+            <a:ext cx="8030983" cy="1754326"/>
+          </a:xfrm>
+          <a:prstGeom prst="rect">
+            <a:avLst/>
+          </a:prstGeom>
+          <a:solidFill>
+            <a:schemeClr val="accent2">
+              <a:lumMod val="75000"/>
+            </a:schemeClr>
+          </a:solidFill>
+        </p:spPr>
+        <p:txBody>
+          <a:bodyPr wrap="square" rtlCol="0">
+            <a:spAutoFit/>
+          </a:bodyPr>
+          <a:lstStyle/>
+          <a:p>
+            <a:r>
+              <a:rPr lang="en-US" dirty="0">
+                <a:solidFill>
+                  <a:schemeClr val="bg1"/>
+                </a:solidFill>
+              </a:rPr>
+              <a:t>“Even after statistical control for various demographic variables and other medical conditions, elderly patients who receive the vaccine appear to be much healthier than apparently comparable unvaccinated patients. Strong evidence of this bias comes from an important epidemiologic study by Jackson et al</a:t>
+            </a:r>
+            <a:r>
+              <a:rPr lang="en-US" baseline="30000" dirty="0">
+                <a:solidFill>
+                  <a:schemeClr val="bg1"/>
+                </a:solidFill>
+                <a:hlinkClick r:id="rId4">
+                  <a:extLst>
+                    <a:ext uri="{A12FA001-AC4F-418D-AE19-62706E023703}">
+                      <ahyp:hlinkClr xmlns:ahyp="http://schemas.microsoft.com/office/drawing/2018/hyperlinkcolor" val="tx"/>
+                    </a:ext>
+                  </a:extLst>
+                </a:hlinkClick>
+              </a:rPr>
+              <a:t>2</a:t>
+            </a:r>
+            <a:r>
+              <a:rPr lang="en-US" dirty="0">
+                <a:solidFill>
+                  <a:schemeClr val="bg1"/>
+                </a:solidFill>
+              </a:rPr>
+              <a:t> in which the authors reported that a large beneficial effect of the vaccine is apparent before the influenza season begins.”</a:t>
+            </a:r>
+          </a:p>
+        </p:txBody>
+      </p:sp>
+    </p:spTree>
+    <p:extLst>
+      <p:ext uri="{BB962C8B-B14F-4D97-AF65-F5344CB8AC3E}">
+        <p14:creationId xmlns:p14="http://schemas.microsoft.com/office/powerpoint/2010/main" val="2572452947"/>
+      </p:ext>
+    </p:extLst>
+  </p:cSld>
+  <p:clrMapOvr>
+    <a:masterClrMapping/>
+  </p:clrMapOvr>
+</p:sld>
+</file>
+
+<file path=ppt/slides/slide11.xml><?xml version="1.0" encoding="utf-8"?>
+<p:sld xmlns:a="http://schemas.openxmlformats.org/drawingml/2006/main" xmlns:r="http://schemas.openxmlformats.org/officeDocument/2006/relationships" xmlns:p="http://schemas.openxmlformats.org/presentationml/2006/main">
+  <p:cSld>
+    <p:spTree>
+      <p:nvGrpSpPr>
+        <p:cNvPr id="1" name="">
+          <a:extLst>
+            <a:ext uri="{FF2B5EF4-FFF2-40B4-BE49-F238E27FC236}">
+              <a16:creationId xmlns:a16="http://schemas.microsoft.com/office/drawing/2014/main" id="{2C30FC21-4268-458A-B53E-C2D4E8FB9628}"/>
+            </a:ext>
+          </a:extLst>
+        </p:cNvPr>
+        <p:cNvGrpSpPr/>
+        <p:nvPr/>
+      </p:nvGrpSpPr>
+      <p:grpSpPr>
+        <a:xfrm>
+          <a:off x="0" y="0"/>
+          <a:ext cx="0" cy="0"/>
+          <a:chOff x="0" y="0"/>
+          <a:chExt cx="0" cy="0"/>
+        </a:xfrm>
+      </p:grpSpPr>
+      <p:sp>
+        <p:nvSpPr>
+          <p:cNvPr id="2" name="Title 1">
+            <a:extLst>
+              <a:ext uri="{FF2B5EF4-FFF2-40B4-BE49-F238E27FC236}">
+                <a16:creationId xmlns:a16="http://schemas.microsoft.com/office/drawing/2014/main" id="{31AFCF04-93D1-F563-B5EE-B6E5B0ECEE07}"/>
+              </a:ext>
+            </a:extLst>
+          </p:cNvPr>
+          <p:cNvSpPr>
+            <a:spLocks noGrp="1"/>
+          </p:cNvSpPr>
+          <p:nvPr>
+            <p:ph type="title"/>
+          </p:nvPr>
+        </p:nvSpPr>
+        <p:spPr>
+          <a:xfrm>
+            <a:off x="609600" y="337392"/>
+            <a:ext cx="10439400" cy="624840"/>
+          </a:xfrm>
+        </p:spPr>
+        <p:txBody>
+          <a:bodyPr>
+            <a:noAutofit/>
+          </a:bodyPr>
+          <a:lstStyle/>
+          <a:p>
+            <a:r>
+              <a:rPr lang="en-US" sz="3600" dirty="0">
+                <a:latin typeface="Times New Roman" panose="02020603050405020304" pitchFamily="18" charset="0"/>
+                <a:cs typeface="Times New Roman" panose="02020603050405020304" pitchFamily="18" charset="0"/>
+              </a:rPr>
+              <a:t>Example: causal effect of </a:t>
+            </a:r>
+            <a:r>
+              <a:rPr lang="en-US" sz="3600" b="1" dirty="0">
+                <a:latin typeface="Times New Roman" panose="02020603050405020304" pitchFamily="18" charset="0"/>
+                <a:cs typeface="Times New Roman" panose="02020603050405020304" pitchFamily="18" charset="0"/>
+              </a:rPr>
+              <a:t>vaccines</a:t>
+            </a:r>
+            <a:endParaRPr lang="en-US" sz="3600" dirty="0">
+              <a:latin typeface="Times New Roman" panose="02020603050405020304" pitchFamily="18" charset="0"/>
+              <a:cs typeface="Times New Roman" panose="02020603050405020304" pitchFamily="18" charset="0"/>
+            </a:endParaRPr>
+          </a:p>
+        </p:txBody>
+      </p:sp>
+      <p:sp>
+        <p:nvSpPr>
+          <p:cNvPr id="3" name="Content Placeholder 2">
+            <a:extLst>
+              <a:ext uri="{FF2B5EF4-FFF2-40B4-BE49-F238E27FC236}">
+                <a16:creationId xmlns:a16="http://schemas.microsoft.com/office/drawing/2014/main" id="{8A2426E1-1760-3E0B-50CF-49AA1780C886}"/>
+              </a:ext>
+            </a:extLst>
+          </p:cNvPr>
+          <p:cNvSpPr>
+            <a:spLocks noGrp="1"/>
+          </p:cNvSpPr>
+          <p:nvPr>
+            <p:ph idx="1"/>
+          </p:nvPr>
+        </p:nvSpPr>
+        <p:spPr>
+          <a:xfrm>
+            <a:off x="609601" y="1066801"/>
+            <a:ext cx="10439400" cy="5141388"/>
+          </a:xfrm>
+        </p:spPr>
+        <p:txBody>
+          <a:bodyPr>
+            <a:noAutofit/>
+          </a:bodyPr>
+          <a:lstStyle/>
+          <a:p>
+            <a:r>
+              <a:rPr lang="en-US" sz="2400" dirty="0">
+                <a:cs typeface="Times New Roman" panose="02020603050405020304" pitchFamily="18" charset="0"/>
+              </a:rPr>
+              <a:t>Why would estimating the effect of a vaccine be hard in observational data? </a:t>
+            </a:r>
+          </a:p>
+          <a:p>
+            <a:r>
+              <a:rPr lang="en-US" sz="2400" dirty="0">
+                <a:cs typeface="Times New Roman" panose="02020603050405020304" pitchFamily="18" charset="0"/>
+              </a:rPr>
+              <a:t>If you looked at a “naïve” estimate of vaccine effectiveness, what direction would you expect it to be biased? Why?</a:t>
+            </a:r>
+          </a:p>
+          <a:p>
+            <a:endParaRPr lang="en-US" sz="2400" dirty="0">
+              <a:cs typeface="Times New Roman" panose="02020603050405020304" pitchFamily="18" charset="0"/>
+            </a:endParaRPr>
+          </a:p>
+          <a:p>
+            <a:r>
+              <a:rPr lang="en-US" sz="2400" dirty="0">
+                <a:cs typeface="Times New Roman" panose="02020603050405020304" pitchFamily="18" charset="0"/>
+              </a:rPr>
+              <a:t>What does this study look at (outcomes, population)? </a:t>
+            </a:r>
+          </a:p>
+          <a:p>
+            <a:r>
+              <a:rPr lang="en-US" sz="2400" b="1" dirty="0">
+                <a:cs typeface="Times New Roman" panose="02020603050405020304" pitchFamily="18" charset="0"/>
+              </a:rPr>
+              <a:t>What is the selection problem that they are addressing? Why is this endogeneity? </a:t>
+            </a:r>
+          </a:p>
+          <a:p>
+            <a:r>
+              <a:rPr lang="en-US" sz="2400" dirty="0">
+                <a:cs typeface="Times New Roman" panose="02020603050405020304" pitchFamily="18" charset="0"/>
+              </a:rPr>
+              <a:t>Note: abstract says “uses logistic regression IV to remove the effect of selection bias” is </a:t>
+            </a:r>
+            <a:r>
+              <a:rPr lang="en-US" sz="2400" b="1" dirty="0">
+                <a:cs typeface="Times New Roman" panose="02020603050405020304" pitchFamily="18" charset="0"/>
+              </a:rPr>
+              <a:t>not correct</a:t>
+            </a:r>
+            <a:r>
+              <a:rPr lang="en-US" sz="2400" dirty="0">
+                <a:cs typeface="Times New Roman" panose="02020603050405020304" pitchFamily="18" charset="0"/>
+              </a:rPr>
+              <a:t>. Also says “IV methods control for overt and hidden biases in observational studies.” This is also </a:t>
+            </a:r>
+            <a:r>
+              <a:rPr lang="en-US" sz="2400" b="1" dirty="0">
+                <a:cs typeface="Times New Roman" panose="02020603050405020304" pitchFamily="18" charset="0"/>
+              </a:rPr>
+              <a:t>not correct </a:t>
+            </a:r>
+          </a:p>
+          <a:p>
+            <a:r>
+              <a:rPr lang="en-US" sz="2400" dirty="0">
+                <a:cs typeface="Times New Roman" panose="02020603050405020304" pitchFamily="18" charset="0"/>
+              </a:rPr>
+              <a:t>What we are doing is approximating a quasi-experiment and identifying a causal effect </a:t>
+            </a:r>
+            <a:r>
+              <a:rPr lang="en-US" sz="2400" u="sng" dirty="0">
+                <a:cs typeface="Times New Roman" panose="02020603050405020304" pitchFamily="18" charset="0"/>
+              </a:rPr>
+              <a:t>if that approximation is done correctly</a:t>
+            </a:r>
+            <a:endParaRPr lang="en-US" sz="2400" dirty="0">
+              <a:cs typeface="Times New Roman" panose="02020603050405020304" pitchFamily="18" charset="0"/>
+            </a:endParaRPr>
+          </a:p>
+          <a:p>
+            <a:endParaRPr lang="en-US" sz="2400" dirty="0">
+              <a:cs typeface="Times New Roman" panose="02020603050405020304" pitchFamily="18" charset="0"/>
+            </a:endParaRPr>
+          </a:p>
+          <a:p>
+            <a:endParaRPr lang="en-US" sz="2400" dirty="0">
+              <a:cs typeface="Times New Roman" panose="02020603050405020304" pitchFamily="18" charset="0"/>
+            </a:endParaRPr>
+          </a:p>
+          <a:p>
+            <a:endParaRPr lang="en-US" sz="2400" dirty="0">
+              <a:cs typeface="Times New Roman" panose="02020603050405020304" pitchFamily="18" charset="0"/>
+            </a:endParaRPr>
+          </a:p>
+        </p:txBody>
+      </p:sp>
+      <p:pic>
+        <p:nvPicPr>
+          <p:cNvPr id="6" name="Picture 5">
+            <a:extLst>
+              <a:ext uri="{FF2B5EF4-FFF2-40B4-BE49-F238E27FC236}">
+                <a16:creationId xmlns:a16="http://schemas.microsoft.com/office/drawing/2014/main" id="{FEC8B3C4-0EE5-83AB-2AB4-828063B60913}"/>
+              </a:ext>
+            </a:extLst>
+          </p:cNvPr>
+          <p:cNvPicPr>
+            <a:picLocks noChangeAspect="1"/>
+          </p:cNvPicPr>
+          <p:nvPr/>
+        </p:nvPicPr>
+        <p:blipFill>
+          <a:blip r:embed="rId3"/>
+          <a:stretch>
+            <a:fillRect/>
+          </a:stretch>
+        </p:blipFill>
+        <p:spPr>
+          <a:xfrm>
+            <a:off x="584200" y="337392"/>
+            <a:ext cx="10088383" cy="2248214"/>
+          </a:xfrm>
+          <a:prstGeom prst="rect">
+            <a:avLst/>
+          </a:prstGeom>
+        </p:spPr>
+      </p:pic>
+    </p:spTree>
+    <p:extLst>
+      <p:ext uri="{BB962C8B-B14F-4D97-AF65-F5344CB8AC3E}">
+        <p14:creationId xmlns:p14="http://schemas.microsoft.com/office/powerpoint/2010/main" val="445485147"/>
+      </p:ext>
+    </p:extLst>
+  </p:cSld>
+  <p:clrMapOvr>
+    <a:masterClrMapping/>
+  </p:clrMapOvr>
+</p:sld>
+</file>
+
+<file path=ppt/slides/slide12.xml><?xml version="1.0" encoding="utf-8"?>
+<p:sld xmlns:a="http://schemas.openxmlformats.org/drawingml/2006/main" xmlns:r="http://schemas.openxmlformats.org/officeDocument/2006/relationships" xmlns:p="http://schemas.openxmlformats.org/presentationml/2006/main">
+  <p:cSld>
+    <p:spTree>
+      <p:nvGrpSpPr>
         <p:cNvPr id="1" name=""/>
         <p:cNvGrpSpPr/>
         <p:nvPr/>
@@ -9036,7 +9677,7 @@
 </p:sld>
 </file>
 
-<file path=ppt/slides/slide11.xml><?xml version="1.0" encoding="utf-8"?>
+<file path=ppt/slides/slide13.xml><?xml version="1.0" encoding="utf-8"?>
 <p:sld xmlns:a="http://schemas.openxmlformats.org/drawingml/2006/main" xmlns:r="http://schemas.openxmlformats.org/officeDocument/2006/relationships" xmlns:p="http://schemas.openxmlformats.org/presentationml/2006/main">
   <p:cSld>
     <p:spTree>
@@ -9159,7 +9800,7 @@
 </p:sld>
 </file>
 
-<file path=ppt/slides/slide12.xml><?xml version="1.0" encoding="utf-8"?>
+<file path=ppt/slides/slide14.xml><?xml version="1.0" encoding="utf-8"?>
 <p:sld xmlns:a="http://schemas.openxmlformats.org/drawingml/2006/main" xmlns:r="http://schemas.openxmlformats.org/officeDocument/2006/relationships" xmlns:p="http://schemas.openxmlformats.org/presentationml/2006/main">
   <p:cSld>
     <p:spTree>
@@ -9284,7 +9925,7 @@
 </p:sld>
 </file>
 
-<file path=ppt/slides/slide13.xml><?xml version="1.0" encoding="utf-8"?>
+<file path=ppt/slides/slide15.xml><?xml version="1.0" encoding="utf-8"?>
 <p:sld xmlns:a="http://schemas.openxmlformats.org/drawingml/2006/main" xmlns:r="http://schemas.openxmlformats.org/officeDocument/2006/relationships" xmlns:p="http://schemas.openxmlformats.org/presentationml/2006/main">
   <p:cSld>
     <p:spTree>
@@ -9378,7 +10019,7 @@
 </p:sld>
 </file>
 
-<file path=ppt/slides/slide14.xml><?xml version="1.0" encoding="utf-8"?>
+<file path=ppt/slides/slide16.xml><?xml version="1.0" encoding="utf-8"?>
 <p:sld xmlns:a="http://schemas.openxmlformats.org/drawingml/2006/main" xmlns:r="http://schemas.openxmlformats.org/officeDocument/2006/relationships" xmlns:p="http://schemas.openxmlformats.org/presentationml/2006/main">
   <p:cSld>
     <p:spTree>
@@ -9502,7 +10143,7 @@
 </p:sld>
 </file>
 
-<file path=ppt/slides/slide15.xml><?xml version="1.0" encoding="utf-8"?>
+<file path=ppt/slides/slide17.xml><?xml version="1.0" encoding="utf-8"?>
 <p:sld xmlns:a="http://schemas.openxmlformats.org/drawingml/2006/main" xmlns:r="http://schemas.openxmlformats.org/officeDocument/2006/relationships" xmlns:p="http://schemas.openxmlformats.org/presentationml/2006/main">
   <p:cSld>
     <p:spTree>
@@ -10028,7 +10669,7 @@
 </p:sld>
 </file>
 
-<file path=ppt/slides/slide16.xml><?xml version="1.0" encoding="utf-8"?>
+<file path=ppt/slides/slide18.xml><?xml version="1.0" encoding="utf-8"?>
 <p:sld xmlns:a="http://schemas.openxmlformats.org/drawingml/2006/main" xmlns:r="http://schemas.openxmlformats.org/officeDocument/2006/relationships" xmlns:p="http://schemas.openxmlformats.org/presentationml/2006/main">
   <p:cSld>
     <p:spTree>
@@ -10670,7 +11311,7 @@
 </p:sld>
 </file>
 
-<file path=ppt/slides/slide17.xml><?xml version="1.0" encoding="utf-8"?>
+<file path=ppt/slides/slide19.xml><?xml version="1.0" encoding="utf-8"?>
 <p:sld xmlns:a="http://schemas.openxmlformats.org/drawingml/2006/main" xmlns:r="http://schemas.openxmlformats.org/officeDocument/2006/relationships" xmlns:p="http://schemas.openxmlformats.org/presentationml/2006/main">
   <p:cSld>
     <p:spTree>
@@ -11426,7 +12067,127 @@
 </p:sld>
 </file>
 
-<file path=ppt/slides/slide18.xml><?xml version="1.0" encoding="utf-8"?>
+<file path=ppt/slides/slide2.xml><?xml version="1.0" encoding="utf-8"?>
+<p:sld xmlns:a="http://schemas.openxmlformats.org/drawingml/2006/main" xmlns:r="http://schemas.openxmlformats.org/officeDocument/2006/relationships" xmlns:p="http://schemas.openxmlformats.org/presentationml/2006/main">
+  <p:cSld>
+    <p:spTree>
+      <p:nvGrpSpPr>
+        <p:cNvPr id="1" name=""/>
+        <p:cNvGrpSpPr/>
+        <p:nvPr/>
+      </p:nvGrpSpPr>
+      <p:grpSpPr>
+        <a:xfrm>
+          <a:off x="0" y="0"/>
+          <a:ext cx="0" cy="0"/>
+          <a:chOff x="0" y="0"/>
+          <a:chExt cx="0" cy="0"/>
+        </a:xfrm>
+      </p:grpSpPr>
+      <p:sp>
+        <p:nvSpPr>
+          <p:cNvPr id="2" name="Title 1"/>
+          <p:cNvSpPr>
+            <a:spLocks noGrp="1"/>
+          </p:cNvSpPr>
+          <p:nvPr>
+            <p:ph type="title"/>
+          </p:nvPr>
+        </p:nvSpPr>
+        <p:spPr>
+          <a:xfrm>
+            <a:off x="609600" y="337392"/>
+            <a:ext cx="10439400" cy="624840"/>
+          </a:xfrm>
+        </p:spPr>
+        <p:txBody>
+          <a:bodyPr>
+            <a:noAutofit/>
+          </a:bodyPr>
+          <a:lstStyle/>
+          <a:p>
+            <a:r>
+              <a:rPr lang="en-US" sz="3600" dirty="0">
+                <a:cs typeface="Times New Roman" panose="02020603050405020304" pitchFamily="18" charset="0"/>
+              </a:rPr>
+              <a:t>Quick note – new paper</a:t>
+            </a:r>
+            <a:endParaRPr lang="en-US" sz="3600" dirty="0">
+              <a:latin typeface="Times New Roman" panose="02020603050405020304" pitchFamily="18" charset="0"/>
+              <a:cs typeface="Times New Roman" panose="02020603050405020304" pitchFamily="18" charset="0"/>
+            </a:endParaRPr>
+          </a:p>
+        </p:txBody>
+      </p:sp>
+      <p:sp>
+        <p:nvSpPr>
+          <p:cNvPr id="5" name="Content Placeholder 4">
+            <a:extLst>
+              <a:ext uri="{FF2B5EF4-FFF2-40B4-BE49-F238E27FC236}">
+                <a16:creationId xmlns:a16="http://schemas.microsoft.com/office/drawing/2014/main" id="{8148C50D-1062-C2DF-BDED-8F0DB79B3E97}"/>
+              </a:ext>
+            </a:extLst>
+          </p:cNvPr>
+          <p:cNvSpPr>
+            <a:spLocks noGrp="1"/>
+          </p:cNvSpPr>
+          <p:nvPr>
+            <p:ph idx="1"/>
+          </p:nvPr>
+        </p:nvSpPr>
+        <p:spPr/>
+        <p:txBody>
+          <a:bodyPr/>
+          <a:lstStyle/>
+          <a:p>
+            <a:endParaRPr lang="en-US"/>
+          </a:p>
+        </p:txBody>
+      </p:sp>
+      <p:pic>
+        <p:nvPicPr>
+          <p:cNvPr id="7" name="Picture 6">
+            <a:extLst>
+              <a:ext uri="{FF2B5EF4-FFF2-40B4-BE49-F238E27FC236}">
+                <a16:creationId xmlns:a16="http://schemas.microsoft.com/office/drawing/2014/main" id="{03146AB7-9F64-9239-2504-EFC202C735E8}"/>
+              </a:ext>
+            </a:extLst>
+          </p:cNvPr>
+          <p:cNvPicPr>
+            <a:picLocks noChangeAspect="1"/>
+          </p:cNvPicPr>
+          <p:nvPr/>
+        </p:nvPicPr>
+        <p:blipFill>
+          <a:blip r:embed="rId3"/>
+          <a:stretch>
+            <a:fillRect/>
+          </a:stretch>
+        </p:blipFill>
+        <p:spPr>
+          <a:xfrm>
+            <a:off x="381000" y="1066800"/>
+            <a:ext cx="10087723" cy="4900519"/>
+          </a:xfrm>
+          <a:prstGeom prst="rect">
+            <a:avLst/>
+          </a:prstGeom>
+        </p:spPr>
+      </p:pic>
+    </p:spTree>
+    <p:extLst>
+      <p:ext uri="{BB962C8B-B14F-4D97-AF65-F5344CB8AC3E}">
+        <p14:creationId xmlns:p14="http://schemas.microsoft.com/office/powerpoint/2010/main" val="824285635"/>
+      </p:ext>
+    </p:extLst>
+  </p:cSld>
+  <p:clrMapOvr>
+    <a:masterClrMapping/>
+  </p:clrMapOvr>
+</p:sld>
+</file>
+
+<file path=ppt/slides/slide20.xml><?xml version="1.0" encoding="utf-8"?>
 <p:sld xmlns:a="http://schemas.openxmlformats.org/drawingml/2006/main" xmlns:r="http://schemas.openxmlformats.org/officeDocument/2006/relationships" xmlns:p="http://schemas.openxmlformats.org/presentationml/2006/main">
   <p:cSld>
     <p:spTree>
@@ -11833,7 +12594,7 @@
 </p:sld>
 </file>
 
-<file path=ppt/slides/slide19.xml><?xml version="1.0" encoding="utf-8"?>
+<file path=ppt/slides/slide21.xml><?xml version="1.0" encoding="utf-8"?>
 <p:sld xmlns:a="http://schemas.openxmlformats.org/drawingml/2006/main" xmlns:r="http://schemas.openxmlformats.org/officeDocument/2006/relationships" xmlns:p="http://schemas.openxmlformats.org/presentationml/2006/main">
   <p:cSld>
     <p:spTree>
@@ -12096,224 +12857,7 @@
 </p:sld>
 </file>
 
-<file path=ppt/slides/slide2.xml><?xml version="1.0" encoding="utf-8"?>
-<p:sld xmlns:a="http://schemas.openxmlformats.org/drawingml/2006/main" xmlns:r="http://schemas.openxmlformats.org/officeDocument/2006/relationships" xmlns:p="http://schemas.openxmlformats.org/presentationml/2006/main">
-  <p:cSld>
-    <p:spTree>
-      <p:nvGrpSpPr>
-        <p:cNvPr id="1" name="">
-          <a:extLst>
-            <a:ext uri="{FF2B5EF4-FFF2-40B4-BE49-F238E27FC236}">
-              <a16:creationId xmlns:a16="http://schemas.microsoft.com/office/drawing/2014/main" id="{9D7746D7-5C8E-14DB-11D1-91C659A20F4A}"/>
-            </a:ext>
-          </a:extLst>
-        </p:cNvPr>
-        <p:cNvGrpSpPr/>
-        <p:nvPr/>
-      </p:nvGrpSpPr>
-      <p:grpSpPr>
-        <a:xfrm>
-          <a:off x="0" y="0"/>
-          <a:ext cx="0" cy="0"/>
-          <a:chOff x="0" y="0"/>
-          <a:chExt cx="0" cy="0"/>
-        </a:xfrm>
-      </p:grpSpPr>
-      <p:sp>
-        <p:nvSpPr>
-          <p:cNvPr id="2" name="Title 1">
-            <a:extLst>
-              <a:ext uri="{FF2B5EF4-FFF2-40B4-BE49-F238E27FC236}">
-                <a16:creationId xmlns:a16="http://schemas.microsoft.com/office/drawing/2014/main" id="{395FF649-E0AB-8B06-1CC3-15E85994E61C}"/>
-              </a:ext>
-            </a:extLst>
-          </p:cNvPr>
-          <p:cNvSpPr>
-            <a:spLocks noGrp="1"/>
-          </p:cNvSpPr>
-          <p:nvPr>
-            <p:ph type="title"/>
-          </p:nvPr>
-        </p:nvSpPr>
-        <p:spPr>
-          <a:xfrm>
-            <a:off x="609600" y="337392"/>
-            <a:ext cx="10439400" cy="624840"/>
-          </a:xfrm>
-        </p:spPr>
-        <p:txBody>
-          <a:bodyPr>
-            <a:noAutofit/>
-          </a:bodyPr>
-          <a:lstStyle/>
-          <a:p>
-            <a:r>
-              <a:rPr lang="en-US" sz="3600" dirty="0">
-                <a:cs typeface="Times New Roman" panose="02020603050405020304" pitchFamily="18" charset="0"/>
-              </a:rPr>
-              <a:t>Last Time: Matching Approaches</a:t>
-            </a:r>
-            <a:endParaRPr lang="en-US" sz="3600" dirty="0">
-              <a:latin typeface="Times New Roman" panose="02020603050405020304" pitchFamily="18" charset="0"/>
-              <a:cs typeface="Times New Roman" panose="02020603050405020304" pitchFamily="18" charset="0"/>
-            </a:endParaRPr>
-          </a:p>
-        </p:txBody>
-      </p:sp>
-      <p:sp>
-        <p:nvSpPr>
-          <p:cNvPr id="3" name="Content Placeholder 2">
-            <a:extLst>
-              <a:ext uri="{FF2B5EF4-FFF2-40B4-BE49-F238E27FC236}">
-                <a16:creationId xmlns:a16="http://schemas.microsoft.com/office/drawing/2014/main" id="{B4DAAFC1-D66C-5212-70A4-A0F1533BB4D2}"/>
-              </a:ext>
-            </a:extLst>
-          </p:cNvPr>
-          <p:cNvSpPr>
-            <a:spLocks noGrp="1"/>
-          </p:cNvSpPr>
-          <p:nvPr>
-            <p:ph idx="1"/>
-          </p:nvPr>
-        </p:nvSpPr>
-        <p:spPr>
-          <a:xfrm>
-            <a:off x="609601" y="1066801"/>
-            <a:ext cx="10015390" cy="5141388"/>
-          </a:xfrm>
-        </p:spPr>
-        <p:txBody>
-          <a:bodyPr>
-            <a:noAutofit/>
-          </a:bodyPr>
-          <a:lstStyle/>
-          <a:p>
-            <a:pPr lvl="1"/>
-            <a:r>
-              <a:rPr lang="en-US" sz="2400" dirty="0">
-                <a:cs typeface="Times New Roman" panose="02020603050405020304" pitchFamily="18" charset="0"/>
-              </a:rPr>
-              <a:t>Matching methods help to deal with </a:t>
-            </a:r>
-            <a:r>
-              <a:rPr lang="en-US" sz="2400" b="1" dirty="0">
-                <a:solidFill>
-                  <a:schemeClr val="accent2">
-                    <a:lumMod val="75000"/>
-                  </a:schemeClr>
-                </a:solidFill>
-                <a:cs typeface="Times New Roman" panose="02020603050405020304" pitchFamily="18" charset="0"/>
-              </a:rPr>
-              <a:t>imbalanced data </a:t>
-            </a:r>
-          </a:p>
-          <a:p>
-            <a:pPr lvl="1"/>
-            <a:r>
-              <a:rPr lang="en-US" sz="2400" dirty="0">
-                <a:cs typeface="Times New Roman" panose="02020603050405020304" pitchFamily="18" charset="0"/>
-              </a:rPr>
-              <a:t>Helps you argue that your comparisons really are apples-to-apples</a:t>
-            </a:r>
-          </a:p>
-          <a:p>
-            <a:pPr lvl="1"/>
-            <a:r>
-              <a:rPr lang="en-US" sz="2400" dirty="0">
-                <a:cs typeface="Times New Roman" panose="02020603050405020304" pitchFamily="18" charset="0"/>
-              </a:rPr>
-              <a:t>Matching relies on selection on </a:t>
-            </a:r>
-            <a:r>
-              <a:rPr lang="en-US" sz="2400" b="1" dirty="0">
-                <a:solidFill>
-                  <a:schemeClr val="accent2">
-                    <a:lumMod val="75000"/>
-                  </a:schemeClr>
-                </a:solidFill>
-                <a:cs typeface="Times New Roman" panose="02020603050405020304" pitchFamily="18" charset="0"/>
-              </a:rPr>
-              <a:t>observables</a:t>
-            </a:r>
-            <a:r>
-              <a:rPr lang="en-US" sz="2400" dirty="0">
-                <a:cs typeface="Times New Roman" panose="02020603050405020304" pitchFamily="18" charset="0"/>
-              </a:rPr>
-              <a:t> </a:t>
-            </a:r>
-          </a:p>
-          <a:p>
-            <a:pPr lvl="1"/>
-            <a:r>
-              <a:rPr lang="en-US" sz="2400" dirty="0">
-                <a:cs typeface="Times New Roman" panose="02020603050405020304" pitchFamily="18" charset="0"/>
-              </a:rPr>
-              <a:t>Propensity score, nearest neighbor techniques</a:t>
-            </a:r>
-          </a:p>
-        </p:txBody>
-      </p:sp>
-      <p:pic>
-        <p:nvPicPr>
-          <p:cNvPr id="4" name="Picture 2">
-            <a:extLst>
-              <a:ext uri="{FF2B5EF4-FFF2-40B4-BE49-F238E27FC236}">
-                <a16:creationId xmlns:a16="http://schemas.microsoft.com/office/drawing/2014/main" id="{8C5008E8-8C44-AA93-5F1F-699A15F3D865}"/>
-              </a:ext>
-            </a:extLst>
-          </p:cNvPr>
-          <p:cNvPicPr>
-            <a:picLocks noChangeAspect="1" noChangeArrowheads="1"/>
-          </p:cNvPicPr>
-          <p:nvPr/>
-        </p:nvPicPr>
-        <p:blipFill>
-          <a:blip r:embed="rId3">
-            <a:extLst>
-              <a:ext uri="{28A0092B-C50C-407E-A947-70E740481C1C}">
-                <a14:useLocalDpi xmlns:a14="http://schemas.microsoft.com/office/drawing/2010/main" val="0"/>
-              </a:ext>
-            </a:extLst>
-          </a:blip>
-          <a:srcRect/>
-          <a:stretch>
-            <a:fillRect/>
-          </a:stretch>
-        </p:blipFill>
-        <p:spPr bwMode="auto">
-          <a:xfrm>
-            <a:off x="2171700" y="2895600"/>
-            <a:ext cx="7315200" cy="3150870"/>
-          </a:xfrm>
-          <a:prstGeom prst="rect">
-            <a:avLst/>
-          </a:prstGeom>
-          <a:noFill/>
-          <a:extLst>
-            <a:ext uri="{909E8E84-426E-40DD-AFC4-6F175D3DCCD1}">
-              <a14:hiddenFill xmlns:a14="http://schemas.microsoft.com/office/drawing/2010/main">
-                <a:solidFill>
-                  <a:srgbClr val="FFFFFF"/>
-                </a:solidFill>
-              </a14:hiddenFill>
-            </a:ext>
-          </a:extLst>
-        </p:spPr>
-      </p:pic>
-    </p:spTree>
-    <p:extLst>
-      <p:ext uri="{BB962C8B-B14F-4D97-AF65-F5344CB8AC3E}">
-        <p14:creationId xmlns:p14="http://schemas.microsoft.com/office/powerpoint/2010/main" val="3636095540"/>
-      </p:ext>
-    </p:extLst>
-  </p:cSld>
-  <p:clrMapOvr>
-    <a:masterClrMapping/>
-  </p:clrMapOvr>
-</p:sld>
-</file>
-
-<file path=ppt/slides/slide20.xml><?xml version="1.0" encoding="utf-8"?>
+<file path=ppt/slides/slide22.xml><?xml version="1.0" encoding="utf-8"?>
 <p:sld xmlns:a="http://schemas.openxmlformats.org/drawingml/2006/main" xmlns:r="http://schemas.openxmlformats.org/officeDocument/2006/relationships" xmlns:p="http://schemas.openxmlformats.org/presentationml/2006/main">
   <p:cSld>
     <p:spTree>
@@ -12638,7 +13182,7 @@
 </p:sld>
 </file>
 
-<file path=ppt/slides/slide21.xml><?xml version="1.0" encoding="utf-8"?>
+<file path=ppt/slides/slide23.xml><?xml version="1.0" encoding="utf-8"?>
 <p:sld xmlns:a="http://schemas.openxmlformats.org/drawingml/2006/main" xmlns:r="http://schemas.openxmlformats.org/officeDocument/2006/relationships" xmlns:p="http://schemas.openxmlformats.org/presentationml/2006/main">
   <p:cSld>
     <p:spTree>
@@ -12733,7 +13277,7 @@
 </p:sld>
 </file>
 
-<file path=ppt/slides/slide22.xml><?xml version="1.0" encoding="utf-8"?>
+<file path=ppt/slides/slide24.xml><?xml version="1.0" encoding="utf-8"?>
 <p:sld xmlns:a="http://schemas.openxmlformats.org/drawingml/2006/main" xmlns:r="http://schemas.openxmlformats.org/officeDocument/2006/relationships" xmlns:p="http://schemas.openxmlformats.org/presentationml/2006/main">
   <p:cSld>
     <p:spTree>
@@ -12962,7 +13506,7 @@
 </p:sld>
 </file>
 
-<file path=ppt/slides/slide23.xml><?xml version="1.0" encoding="utf-8"?>
+<file path=ppt/slides/slide25.xml><?xml version="1.0" encoding="utf-8"?>
 <p:sld xmlns:a="http://schemas.openxmlformats.org/drawingml/2006/main" xmlns:r="http://schemas.openxmlformats.org/officeDocument/2006/relationships" xmlns:p="http://schemas.openxmlformats.org/presentationml/2006/main">
   <p:cSld>
     <p:spTree>
@@ -13179,7 +13723,7 @@
 </p:sld>
 </file>
 
-<file path=ppt/slides/slide24.xml><?xml version="1.0" encoding="utf-8"?>
+<file path=ppt/slides/slide26.xml><?xml version="1.0" encoding="utf-8"?>
 <p:sld xmlns:a="http://schemas.openxmlformats.org/drawingml/2006/main" xmlns:r="http://schemas.openxmlformats.org/officeDocument/2006/relationships" xmlns:p="http://schemas.openxmlformats.org/presentationml/2006/main">
   <p:cSld>
     <p:spTree>
@@ -13407,7 +13951,7 @@
 </p:sld>
 </file>
 
-<file path=ppt/slides/slide25.xml><?xml version="1.0" encoding="utf-8"?>
+<file path=ppt/slides/slide27.xml><?xml version="1.0" encoding="utf-8"?>
 <p:sld xmlns:a="http://schemas.openxmlformats.org/drawingml/2006/main" xmlns:r="http://schemas.openxmlformats.org/officeDocument/2006/relationships" xmlns:p="http://schemas.openxmlformats.org/presentationml/2006/main">
   <p:cSld>
     <p:spTree>
@@ -13610,7 +14154,7 @@
 </p:sld>
 </file>
 
-<file path=ppt/slides/slide26.xml><?xml version="1.0" encoding="utf-8"?>
+<file path=ppt/slides/slide28.xml><?xml version="1.0" encoding="utf-8"?>
 <p:sld xmlns:a="http://schemas.openxmlformats.org/drawingml/2006/main" xmlns:r="http://schemas.openxmlformats.org/officeDocument/2006/relationships" xmlns:p="http://schemas.openxmlformats.org/presentationml/2006/main">
   <p:cSld>
     <p:spTree>
@@ -13961,7 +14505,7 @@
 </p:sld>
 </file>
 
-<file path=ppt/slides/slide27.xml><?xml version="1.0" encoding="utf-8"?>
+<file path=ppt/slides/slide29.xml><?xml version="1.0" encoding="utf-8"?>
 <p:sld xmlns:a="http://schemas.openxmlformats.org/drawingml/2006/main" xmlns:r="http://schemas.openxmlformats.org/officeDocument/2006/relationships" xmlns:p="http://schemas.openxmlformats.org/presentationml/2006/main">
   <p:cSld>
     <p:spTree>
@@ -14055,7 +14599,164 @@
 </p:sld>
 </file>
 
-<file path=ppt/slides/slide28.xml><?xml version="1.0" encoding="utf-8"?>
+<file path=ppt/slides/slide3.xml><?xml version="1.0" encoding="utf-8"?>
+<p:sld xmlns:a="http://schemas.openxmlformats.org/drawingml/2006/main" xmlns:r="http://schemas.openxmlformats.org/officeDocument/2006/relationships" xmlns:p="http://schemas.openxmlformats.org/presentationml/2006/main">
+  <p:cSld>
+    <p:spTree>
+      <p:nvGrpSpPr>
+        <p:cNvPr id="1" name="">
+          <a:extLst>
+            <a:ext uri="{FF2B5EF4-FFF2-40B4-BE49-F238E27FC236}">
+              <a16:creationId xmlns:a16="http://schemas.microsoft.com/office/drawing/2014/main" id="{3F68B3EF-48AF-F2E6-08B6-6729F3BEC698}"/>
+            </a:ext>
+          </a:extLst>
+        </p:cNvPr>
+        <p:cNvGrpSpPr/>
+        <p:nvPr/>
+      </p:nvGrpSpPr>
+      <p:grpSpPr>
+        <a:xfrm>
+          <a:off x="0" y="0"/>
+          <a:ext cx="0" cy="0"/>
+          <a:chOff x="0" y="0"/>
+          <a:chExt cx="0" cy="0"/>
+        </a:xfrm>
+      </p:grpSpPr>
+      <p:sp>
+        <p:nvSpPr>
+          <p:cNvPr id="2" name="Title 1">
+            <a:extLst>
+              <a:ext uri="{FF2B5EF4-FFF2-40B4-BE49-F238E27FC236}">
+                <a16:creationId xmlns:a16="http://schemas.microsoft.com/office/drawing/2014/main" id="{4BAE0777-900E-C80E-E20C-EE078D2B8E3C}"/>
+              </a:ext>
+            </a:extLst>
+          </p:cNvPr>
+          <p:cNvSpPr>
+            <a:spLocks noGrp="1"/>
+          </p:cNvSpPr>
+          <p:nvPr>
+            <p:ph type="title"/>
+          </p:nvPr>
+        </p:nvSpPr>
+        <p:spPr>
+          <a:xfrm>
+            <a:off x="609600" y="337392"/>
+            <a:ext cx="10439400" cy="624840"/>
+          </a:xfrm>
+        </p:spPr>
+        <p:txBody>
+          <a:bodyPr>
+            <a:noAutofit/>
+          </a:bodyPr>
+          <a:lstStyle/>
+          <a:p>
+            <a:r>
+              <a:rPr lang="en-US" sz="3600" dirty="0">
+                <a:cs typeface="Times New Roman" panose="02020603050405020304" pitchFamily="18" charset="0"/>
+              </a:rPr>
+              <a:t>Quick note – new paper</a:t>
+            </a:r>
+            <a:endParaRPr lang="en-US" sz="3600" dirty="0">
+              <a:latin typeface="Times New Roman" panose="02020603050405020304" pitchFamily="18" charset="0"/>
+              <a:cs typeface="Times New Roman" panose="02020603050405020304" pitchFamily="18" charset="0"/>
+            </a:endParaRPr>
+          </a:p>
+        </p:txBody>
+      </p:sp>
+      <p:sp>
+        <p:nvSpPr>
+          <p:cNvPr id="5" name="Content Placeholder 4">
+            <a:extLst>
+              <a:ext uri="{FF2B5EF4-FFF2-40B4-BE49-F238E27FC236}">
+                <a16:creationId xmlns:a16="http://schemas.microsoft.com/office/drawing/2014/main" id="{6CF09F06-9BCA-A61A-FA2C-F78DDC1B5EFC}"/>
+              </a:ext>
+            </a:extLst>
+          </p:cNvPr>
+          <p:cNvSpPr>
+            <a:spLocks noGrp="1"/>
+          </p:cNvSpPr>
+          <p:nvPr>
+            <p:ph idx="1"/>
+          </p:nvPr>
+        </p:nvSpPr>
+        <p:spPr>
+          <a:xfrm>
+            <a:off x="8077200" y="1219200"/>
+            <a:ext cx="3124200" cy="4960937"/>
+          </a:xfrm>
+        </p:spPr>
+        <p:txBody>
+          <a:bodyPr/>
+          <a:lstStyle/>
+          <a:p>
+            <a:r>
+              <a:rPr lang="en-US" dirty="0"/>
+              <a:t>A) and B) distribution of findings</a:t>
+            </a:r>
+          </a:p>
+          <a:p>
+            <a:r>
+              <a:rPr lang="en-US" dirty="0"/>
+              <a:t>C) Relationship between researchers’ positions and findings</a:t>
+            </a:r>
+          </a:p>
+          <a:p>
+            <a:r>
+              <a:rPr lang="en-US" dirty="0"/>
+              <a:t>D) Relationship persists even after weighting and </a:t>
+            </a:r>
+            <a:r>
+              <a:rPr lang="en-US"/>
+              <a:t>adding covariates </a:t>
+            </a:r>
+            <a:endParaRPr lang="en-US" dirty="0"/>
+          </a:p>
+        </p:txBody>
+      </p:sp>
+      <p:pic>
+        <p:nvPicPr>
+          <p:cNvPr id="4" name="Picture 3">
+            <a:extLst>
+              <a:ext uri="{FF2B5EF4-FFF2-40B4-BE49-F238E27FC236}">
+                <a16:creationId xmlns:a16="http://schemas.microsoft.com/office/drawing/2014/main" id="{FC1D8BBD-23A0-45B2-C03D-B574093B9C0B}"/>
+              </a:ext>
+            </a:extLst>
+          </p:cNvPr>
+          <p:cNvPicPr>
+            <a:picLocks noChangeAspect="1"/>
+          </p:cNvPicPr>
+          <p:nvPr/>
+        </p:nvPicPr>
+        <p:blipFill>
+          <a:blip r:embed="rId3"/>
+          <a:stretch>
+            <a:fillRect/>
+          </a:stretch>
+        </p:blipFill>
+        <p:spPr>
+          <a:xfrm>
+            <a:off x="-27709" y="957783"/>
+            <a:ext cx="8352796" cy="5562825"/>
+          </a:xfrm>
+          <a:prstGeom prst="rect">
+            <a:avLst/>
+          </a:prstGeom>
+        </p:spPr>
+      </p:pic>
+    </p:spTree>
+    <p:extLst>
+      <p:ext uri="{BB962C8B-B14F-4D97-AF65-F5344CB8AC3E}">
+        <p14:creationId xmlns:p14="http://schemas.microsoft.com/office/powerpoint/2010/main" val="1200952233"/>
+      </p:ext>
+    </p:extLst>
+  </p:cSld>
+  <p:clrMapOvr>
+    <a:masterClrMapping/>
+  </p:clrMapOvr>
+</p:sld>
+</file>
+
+<file path=ppt/slides/slide30.xml><?xml version="1.0" encoding="utf-8"?>
 <p:sld xmlns:a="http://schemas.openxmlformats.org/drawingml/2006/main" xmlns:r="http://schemas.openxmlformats.org/officeDocument/2006/relationships" xmlns:p="http://schemas.openxmlformats.org/presentationml/2006/main">
   <p:cSld>
     <p:spTree>
@@ -14113,7 +14814,7 @@
 </p:sld>
 </file>
 
-<file path=ppt/slides/slide29.xml><?xml version="1.0" encoding="utf-8"?>
+<file path=ppt/slides/slide31.xml><?xml version="1.0" encoding="utf-8"?>
 <p:sld xmlns:a="http://schemas.openxmlformats.org/drawingml/2006/main" xmlns:r="http://schemas.openxmlformats.org/officeDocument/2006/relationships" xmlns:p="http://schemas.openxmlformats.org/presentationml/2006/main">
   <p:cSld>
     <p:spTree>
@@ -14172,269 +14873,7 @@
 </p:sld>
 </file>
 
-<file path=ppt/slides/slide3.xml><?xml version="1.0" encoding="utf-8"?>
-<p:sld xmlns:a="http://schemas.openxmlformats.org/drawingml/2006/main" xmlns:r="http://schemas.openxmlformats.org/officeDocument/2006/relationships" xmlns:p="http://schemas.openxmlformats.org/presentationml/2006/main">
-  <p:cSld>
-    <p:spTree>
-      <p:nvGrpSpPr>
-        <p:cNvPr id="1" name="">
-          <a:extLst>
-            <a:ext uri="{FF2B5EF4-FFF2-40B4-BE49-F238E27FC236}">
-              <a16:creationId xmlns:a16="http://schemas.microsoft.com/office/drawing/2014/main" id="{8590744A-9ECB-7BB8-E123-6C4203B92EC5}"/>
-            </a:ext>
-          </a:extLst>
-        </p:cNvPr>
-        <p:cNvGrpSpPr/>
-        <p:nvPr/>
-      </p:nvGrpSpPr>
-      <p:grpSpPr>
-        <a:xfrm>
-          <a:off x="0" y="0"/>
-          <a:ext cx="0" cy="0"/>
-          <a:chOff x="0" y="0"/>
-          <a:chExt cx="0" cy="0"/>
-        </a:xfrm>
-      </p:grpSpPr>
-      <p:sp>
-        <p:nvSpPr>
-          <p:cNvPr id="2" name="Title 1">
-            <a:extLst>
-              <a:ext uri="{FF2B5EF4-FFF2-40B4-BE49-F238E27FC236}">
-                <a16:creationId xmlns:a16="http://schemas.microsoft.com/office/drawing/2014/main" id="{F4AC96ED-BB5C-3F53-AF08-93D9772E7BC3}"/>
-              </a:ext>
-            </a:extLst>
-          </p:cNvPr>
-          <p:cNvSpPr>
-            <a:spLocks noGrp="1"/>
-          </p:cNvSpPr>
-          <p:nvPr>
-            <p:ph type="title"/>
-          </p:nvPr>
-        </p:nvSpPr>
-        <p:spPr>
-          <a:xfrm>
-            <a:off x="609600" y="337392"/>
-            <a:ext cx="10439400" cy="624840"/>
-          </a:xfrm>
-        </p:spPr>
-        <p:txBody>
-          <a:bodyPr>
-            <a:noAutofit/>
-          </a:bodyPr>
-          <a:lstStyle/>
-          <a:p>
-            <a:r>
-              <a:rPr lang="en-US" sz="3600" dirty="0">
-                <a:cs typeface="Times New Roman" panose="02020603050405020304" pitchFamily="18" charset="0"/>
-              </a:rPr>
-              <a:t>Last Time: Matching Approaches</a:t>
-            </a:r>
-            <a:endParaRPr lang="en-US" sz="3600" dirty="0">
-              <a:latin typeface="Times New Roman" panose="02020603050405020304" pitchFamily="18" charset="0"/>
-              <a:cs typeface="Times New Roman" panose="02020603050405020304" pitchFamily="18" charset="0"/>
-            </a:endParaRPr>
-          </a:p>
-        </p:txBody>
-      </p:sp>
-      <p:sp>
-        <p:nvSpPr>
-          <p:cNvPr id="3" name="Content Placeholder 2">
-            <a:extLst>
-              <a:ext uri="{FF2B5EF4-FFF2-40B4-BE49-F238E27FC236}">
-                <a16:creationId xmlns:a16="http://schemas.microsoft.com/office/drawing/2014/main" id="{63A5DF2C-03A1-5AA7-1475-97A9BF3448D4}"/>
-              </a:ext>
-            </a:extLst>
-          </p:cNvPr>
-          <p:cNvSpPr>
-            <a:spLocks noGrp="1"/>
-          </p:cNvSpPr>
-          <p:nvPr>
-            <p:ph idx="1"/>
-          </p:nvPr>
-        </p:nvSpPr>
-        <p:spPr>
-          <a:xfrm>
-            <a:off x="609601" y="1066801"/>
-            <a:ext cx="10015390" cy="5141388"/>
-          </a:xfrm>
-        </p:spPr>
-        <p:txBody>
-          <a:bodyPr>
-            <a:noAutofit/>
-          </a:bodyPr>
-          <a:lstStyle/>
-          <a:p>
-            <a:pPr lvl="1"/>
-            <a:r>
-              <a:rPr lang="en-US" sz="2400" dirty="0">
-                <a:cs typeface="Times New Roman" panose="02020603050405020304" pitchFamily="18" charset="0"/>
-              </a:rPr>
-              <a:t>Matching methods help to deal with </a:t>
-            </a:r>
-            <a:r>
-              <a:rPr lang="en-US" sz="2400" b="1" dirty="0">
-                <a:solidFill>
-                  <a:schemeClr val="accent2">
-                    <a:lumMod val="75000"/>
-                  </a:schemeClr>
-                </a:solidFill>
-                <a:cs typeface="Times New Roman" panose="02020603050405020304" pitchFamily="18" charset="0"/>
-              </a:rPr>
-              <a:t>imbalanced data </a:t>
-            </a:r>
-          </a:p>
-          <a:p>
-            <a:pPr lvl="1"/>
-            <a:r>
-              <a:rPr lang="en-US" sz="2400" dirty="0">
-                <a:cs typeface="Times New Roman" panose="02020603050405020304" pitchFamily="18" charset="0"/>
-              </a:rPr>
-              <a:t>Helps you argue that your comparisons really are apples-to-apples</a:t>
-            </a:r>
-          </a:p>
-          <a:p>
-            <a:pPr lvl="1"/>
-            <a:r>
-              <a:rPr lang="en-US" sz="2400" dirty="0">
-                <a:cs typeface="Times New Roman" panose="02020603050405020304" pitchFamily="18" charset="0"/>
-              </a:rPr>
-              <a:t>Matching relies on selection on </a:t>
-            </a:r>
-            <a:r>
-              <a:rPr lang="en-US" sz="2400" b="1" dirty="0">
-                <a:solidFill>
-                  <a:schemeClr val="accent2">
-                    <a:lumMod val="75000"/>
-                  </a:schemeClr>
-                </a:solidFill>
-                <a:cs typeface="Times New Roman" panose="02020603050405020304" pitchFamily="18" charset="0"/>
-              </a:rPr>
-              <a:t>observables</a:t>
-            </a:r>
-            <a:r>
-              <a:rPr lang="en-US" sz="2400" dirty="0">
-                <a:cs typeface="Times New Roman" panose="02020603050405020304" pitchFamily="18" charset="0"/>
-              </a:rPr>
-              <a:t> </a:t>
-            </a:r>
-          </a:p>
-          <a:p>
-            <a:pPr lvl="1"/>
-            <a:r>
-              <a:rPr lang="en-US" sz="2400" dirty="0">
-                <a:cs typeface="Times New Roman" panose="02020603050405020304" pitchFamily="18" charset="0"/>
-              </a:rPr>
-              <a:t>Propensity score, nearest neighbor techniques</a:t>
-            </a:r>
-          </a:p>
-        </p:txBody>
-      </p:sp>
-      <p:pic>
-        <p:nvPicPr>
-          <p:cNvPr id="4" name="Picture 2">
-            <a:extLst>
-              <a:ext uri="{FF2B5EF4-FFF2-40B4-BE49-F238E27FC236}">
-                <a16:creationId xmlns:a16="http://schemas.microsoft.com/office/drawing/2014/main" id="{D34F7EDA-691B-1204-D38C-03489AEE8CE7}"/>
-              </a:ext>
-            </a:extLst>
-          </p:cNvPr>
-          <p:cNvPicPr>
-            <a:picLocks noChangeAspect="1" noChangeArrowheads="1"/>
-          </p:cNvPicPr>
-          <p:nvPr/>
-        </p:nvPicPr>
-        <p:blipFill>
-          <a:blip r:embed="rId3">
-            <a:extLst>
-              <a:ext uri="{28A0092B-C50C-407E-A947-70E740481C1C}">
-                <a14:useLocalDpi xmlns:a14="http://schemas.microsoft.com/office/drawing/2010/main" val="0"/>
-              </a:ext>
-            </a:extLst>
-          </a:blip>
-          <a:srcRect/>
-          <a:stretch>
-            <a:fillRect/>
-          </a:stretch>
-        </p:blipFill>
-        <p:spPr bwMode="auto">
-          <a:xfrm>
-            <a:off x="2171700" y="2895600"/>
-            <a:ext cx="7315200" cy="3150870"/>
-          </a:xfrm>
-          <a:prstGeom prst="rect">
-            <a:avLst/>
-          </a:prstGeom>
-          <a:noFill/>
-          <a:extLst>
-            <a:ext uri="{909E8E84-426E-40DD-AFC4-6F175D3DCCD1}">
-              <a14:hiddenFill xmlns:a14="http://schemas.microsoft.com/office/drawing/2010/main">
-                <a:solidFill>
-                  <a:srgbClr val="FFFFFF"/>
-                </a:solidFill>
-              </a14:hiddenFill>
-            </a:ext>
-          </a:extLst>
-        </p:spPr>
-      </p:pic>
-      <p:sp>
-        <p:nvSpPr>
-          <p:cNvPr id="5" name="TextBox 4">
-            <a:extLst>
-              <a:ext uri="{FF2B5EF4-FFF2-40B4-BE49-F238E27FC236}">
-                <a16:creationId xmlns:a16="http://schemas.microsoft.com/office/drawing/2014/main" id="{39126CAC-965D-4813-30C4-FCD64B2C19E1}"/>
-              </a:ext>
-            </a:extLst>
-          </p:cNvPr>
-          <p:cNvSpPr txBox="1"/>
-          <p:nvPr/>
-        </p:nvSpPr>
-        <p:spPr>
-          <a:xfrm>
-            <a:off x="647700" y="5156170"/>
-            <a:ext cx="3733800" cy="954107"/>
-          </a:xfrm>
-          <a:prstGeom prst="rect">
-            <a:avLst/>
-          </a:prstGeom>
-          <a:solidFill>
-            <a:schemeClr val="accent3">
-              <a:lumMod val="75000"/>
-            </a:schemeClr>
-          </a:solidFill>
-        </p:spPr>
-        <p:txBody>
-          <a:bodyPr wrap="square" rtlCol="0">
-            <a:spAutoFit/>
-          </a:bodyPr>
-          <a:lstStyle/>
-          <a:p>
-            <a:pPr algn="ctr"/>
-            <a:r>
-              <a:rPr lang="en-US" sz="2800" dirty="0">
-                <a:solidFill>
-                  <a:schemeClr val="bg1"/>
-                </a:solidFill>
-                <a:latin typeface="Aptos" panose="020B0004020202020204" pitchFamily="34" charset="0"/>
-              </a:rPr>
-              <a:t>So can we ever really get at causality?</a:t>
-            </a:r>
-          </a:p>
-        </p:txBody>
-      </p:sp>
-    </p:spTree>
-    <p:extLst>
-      <p:ext uri="{BB962C8B-B14F-4D97-AF65-F5344CB8AC3E}">
-        <p14:creationId xmlns:p14="http://schemas.microsoft.com/office/powerpoint/2010/main" val="2484274925"/>
-      </p:ext>
-    </p:extLst>
-  </p:cSld>
-  <p:clrMapOvr>
-    <a:masterClrMapping/>
-  </p:clrMapOvr>
-</p:sld>
-</file>
-
-<file path=ppt/slides/slide30.xml><?xml version="1.0" encoding="utf-8"?>
+<file path=ppt/slides/slide32.xml><?xml version="1.0" encoding="utf-8"?>
 <p:sld xmlns:a="http://schemas.openxmlformats.org/drawingml/2006/main" xmlns:r="http://schemas.openxmlformats.org/officeDocument/2006/relationships" xmlns:p="http://schemas.openxmlformats.org/presentationml/2006/main">
   <p:cSld>
     <p:spTree>
@@ -14592,7 +15031,7 @@
 </p:sld>
 </file>
 
-<file path=ppt/slides/slide31.xml><?xml version="1.0" encoding="utf-8"?>
+<file path=ppt/slides/slide33.xml><?xml version="1.0" encoding="utf-8"?>
 <p:sld xmlns:a="http://schemas.openxmlformats.org/drawingml/2006/main" xmlns:r="http://schemas.openxmlformats.org/officeDocument/2006/relationships" xmlns:p="http://schemas.openxmlformats.org/presentationml/2006/main">
   <p:cSld>
     <p:bg>
@@ -15010,7 +15449,7 @@
 </p:sld>
 </file>
 
-<file path=ppt/slides/slide32.xml><?xml version="1.0" encoding="utf-8"?>
+<file path=ppt/slides/slide34.xml><?xml version="1.0" encoding="utf-8"?>
 <p:sld xmlns:a="http://schemas.openxmlformats.org/drawingml/2006/main" xmlns:r="http://schemas.openxmlformats.org/officeDocument/2006/relationships" xmlns:p="http://schemas.openxmlformats.org/presentationml/2006/main">
   <p:cSld>
     <p:bg>
@@ -15428,7 +15867,7 @@
 </p:sld>
 </file>
 
-<file path=ppt/slides/slide33.xml><?xml version="1.0" encoding="utf-8"?>
+<file path=ppt/slides/slide35.xml><?xml version="1.0" encoding="utf-8"?>
 <p:sld xmlns:a="http://schemas.openxmlformats.org/drawingml/2006/main" xmlns:r="http://schemas.openxmlformats.org/officeDocument/2006/relationships" xmlns:p="http://schemas.openxmlformats.org/presentationml/2006/main">
   <p:cSld>
     <p:bg>
@@ -15846,7 +16285,7 @@
 </p:sld>
 </file>
 
-<file path=ppt/slides/slide34.xml><?xml version="1.0" encoding="utf-8"?>
+<file path=ppt/slides/slide36.xml><?xml version="1.0" encoding="utf-8"?>
 <p:sld xmlns:a="http://schemas.openxmlformats.org/drawingml/2006/main" xmlns:r="http://schemas.openxmlformats.org/officeDocument/2006/relationships" xmlns:p="http://schemas.openxmlformats.org/presentationml/2006/main">
   <p:cSld>
     <p:spTree>
@@ -15934,7 +16373,7 @@
 </p:sld>
 </file>
 
-<file path=ppt/slides/slide35.xml><?xml version="1.0" encoding="utf-8"?>
+<file path=ppt/slides/slide37.xml><?xml version="1.0" encoding="utf-8"?>
 <p:sld xmlns:a="http://schemas.openxmlformats.org/drawingml/2006/main" xmlns:r="http://schemas.openxmlformats.org/officeDocument/2006/relationships" xmlns:p="http://schemas.openxmlformats.org/presentationml/2006/main">
   <p:cSld>
     <p:spTree>
@@ -16339,7 +16778,7 @@
 </p:sld>
 </file>
 
-<file path=ppt/slides/slide36.xml><?xml version="1.0" encoding="utf-8"?>
+<file path=ppt/slides/slide38.xml><?xml version="1.0" encoding="utf-8"?>
 <p:sld xmlns:a="http://schemas.openxmlformats.org/drawingml/2006/main" xmlns:r="http://schemas.openxmlformats.org/officeDocument/2006/relationships" xmlns:p="http://schemas.openxmlformats.org/presentationml/2006/main">
   <p:cSld>
     <p:spTree>
@@ -17320,7 +17759,7 @@
 </p:sld>
 </file>
 
-<file path=ppt/slides/slide37.xml><?xml version="1.0" encoding="utf-8"?>
+<file path=ppt/slides/slide39.xml><?xml version="1.0" encoding="utf-8"?>
 <p:sld xmlns:a="http://schemas.openxmlformats.org/drawingml/2006/main" xmlns:r="http://schemas.openxmlformats.org/officeDocument/2006/relationships" xmlns:p="http://schemas.openxmlformats.org/presentationml/2006/main">
   <p:cSld>
     <p:spTree>
@@ -17461,7 +17900,224 @@
 </p:sld>
 </file>
 
-<file path=ppt/slides/slide38.xml><?xml version="1.0" encoding="utf-8"?>
+<file path=ppt/slides/slide4.xml><?xml version="1.0" encoding="utf-8"?>
+<p:sld xmlns:a="http://schemas.openxmlformats.org/drawingml/2006/main" xmlns:r="http://schemas.openxmlformats.org/officeDocument/2006/relationships" xmlns:p="http://schemas.openxmlformats.org/presentationml/2006/main">
+  <p:cSld>
+    <p:spTree>
+      <p:nvGrpSpPr>
+        <p:cNvPr id="1" name="">
+          <a:extLst>
+            <a:ext uri="{FF2B5EF4-FFF2-40B4-BE49-F238E27FC236}">
+              <a16:creationId xmlns:a16="http://schemas.microsoft.com/office/drawing/2014/main" id="{9D7746D7-5C8E-14DB-11D1-91C659A20F4A}"/>
+            </a:ext>
+          </a:extLst>
+        </p:cNvPr>
+        <p:cNvGrpSpPr/>
+        <p:nvPr/>
+      </p:nvGrpSpPr>
+      <p:grpSpPr>
+        <a:xfrm>
+          <a:off x="0" y="0"/>
+          <a:ext cx="0" cy="0"/>
+          <a:chOff x="0" y="0"/>
+          <a:chExt cx="0" cy="0"/>
+        </a:xfrm>
+      </p:grpSpPr>
+      <p:sp>
+        <p:nvSpPr>
+          <p:cNvPr id="2" name="Title 1">
+            <a:extLst>
+              <a:ext uri="{FF2B5EF4-FFF2-40B4-BE49-F238E27FC236}">
+                <a16:creationId xmlns:a16="http://schemas.microsoft.com/office/drawing/2014/main" id="{395FF649-E0AB-8B06-1CC3-15E85994E61C}"/>
+              </a:ext>
+            </a:extLst>
+          </p:cNvPr>
+          <p:cNvSpPr>
+            <a:spLocks noGrp="1"/>
+          </p:cNvSpPr>
+          <p:nvPr>
+            <p:ph type="title"/>
+          </p:nvPr>
+        </p:nvSpPr>
+        <p:spPr>
+          <a:xfrm>
+            <a:off x="609600" y="337392"/>
+            <a:ext cx="10439400" cy="624840"/>
+          </a:xfrm>
+        </p:spPr>
+        <p:txBody>
+          <a:bodyPr>
+            <a:noAutofit/>
+          </a:bodyPr>
+          <a:lstStyle/>
+          <a:p>
+            <a:r>
+              <a:rPr lang="en-US" sz="3600" dirty="0">
+                <a:cs typeface="Times New Roman" panose="02020603050405020304" pitchFamily="18" charset="0"/>
+              </a:rPr>
+              <a:t>Last Time: Matching Approaches</a:t>
+            </a:r>
+            <a:endParaRPr lang="en-US" sz="3600" dirty="0">
+              <a:latin typeface="Times New Roman" panose="02020603050405020304" pitchFamily="18" charset="0"/>
+              <a:cs typeface="Times New Roman" panose="02020603050405020304" pitchFamily="18" charset="0"/>
+            </a:endParaRPr>
+          </a:p>
+        </p:txBody>
+      </p:sp>
+      <p:sp>
+        <p:nvSpPr>
+          <p:cNvPr id="3" name="Content Placeholder 2">
+            <a:extLst>
+              <a:ext uri="{FF2B5EF4-FFF2-40B4-BE49-F238E27FC236}">
+                <a16:creationId xmlns:a16="http://schemas.microsoft.com/office/drawing/2014/main" id="{B4DAAFC1-D66C-5212-70A4-A0F1533BB4D2}"/>
+              </a:ext>
+            </a:extLst>
+          </p:cNvPr>
+          <p:cNvSpPr>
+            <a:spLocks noGrp="1"/>
+          </p:cNvSpPr>
+          <p:nvPr>
+            <p:ph idx="1"/>
+          </p:nvPr>
+        </p:nvSpPr>
+        <p:spPr>
+          <a:xfrm>
+            <a:off x="609601" y="1066801"/>
+            <a:ext cx="10015390" cy="5141388"/>
+          </a:xfrm>
+        </p:spPr>
+        <p:txBody>
+          <a:bodyPr>
+            <a:noAutofit/>
+          </a:bodyPr>
+          <a:lstStyle/>
+          <a:p>
+            <a:pPr lvl="1"/>
+            <a:r>
+              <a:rPr lang="en-US" sz="2400" dirty="0">
+                <a:cs typeface="Times New Roman" panose="02020603050405020304" pitchFamily="18" charset="0"/>
+              </a:rPr>
+              <a:t>Matching methods help to deal with </a:t>
+            </a:r>
+            <a:r>
+              <a:rPr lang="en-US" sz="2400" b="1" dirty="0">
+                <a:solidFill>
+                  <a:schemeClr val="accent2">
+                    <a:lumMod val="75000"/>
+                  </a:schemeClr>
+                </a:solidFill>
+                <a:cs typeface="Times New Roman" panose="02020603050405020304" pitchFamily="18" charset="0"/>
+              </a:rPr>
+              <a:t>imbalanced data </a:t>
+            </a:r>
+          </a:p>
+          <a:p>
+            <a:pPr lvl="1"/>
+            <a:r>
+              <a:rPr lang="en-US" sz="2400" dirty="0">
+                <a:cs typeface="Times New Roman" panose="02020603050405020304" pitchFamily="18" charset="0"/>
+              </a:rPr>
+              <a:t>Helps you argue that your comparisons really are apples-to-apples</a:t>
+            </a:r>
+          </a:p>
+          <a:p>
+            <a:pPr lvl="1"/>
+            <a:r>
+              <a:rPr lang="en-US" sz="2400" dirty="0">
+                <a:cs typeface="Times New Roman" panose="02020603050405020304" pitchFamily="18" charset="0"/>
+              </a:rPr>
+              <a:t>Matching relies on selection on </a:t>
+            </a:r>
+            <a:r>
+              <a:rPr lang="en-US" sz="2400" b="1" dirty="0">
+                <a:solidFill>
+                  <a:schemeClr val="accent2">
+                    <a:lumMod val="75000"/>
+                  </a:schemeClr>
+                </a:solidFill>
+                <a:cs typeface="Times New Roman" panose="02020603050405020304" pitchFamily="18" charset="0"/>
+              </a:rPr>
+              <a:t>observables</a:t>
+            </a:r>
+            <a:r>
+              <a:rPr lang="en-US" sz="2400" dirty="0">
+                <a:cs typeface="Times New Roman" panose="02020603050405020304" pitchFamily="18" charset="0"/>
+              </a:rPr>
+              <a:t> </a:t>
+            </a:r>
+          </a:p>
+          <a:p>
+            <a:pPr lvl="1"/>
+            <a:r>
+              <a:rPr lang="en-US" sz="2400" dirty="0">
+                <a:cs typeface="Times New Roman" panose="02020603050405020304" pitchFamily="18" charset="0"/>
+              </a:rPr>
+              <a:t>Propensity score, nearest neighbor techniques</a:t>
+            </a:r>
+          </a:p>
+        </p:txBody>
+      </p:sp>
+      <p:pic>
+        <p:nvPicPr>
+          <p:cNvPr id="4" name="Picture 2">
+            <a:extLst>
+              <a:ext uri="{FF2B5EF4-FFF2-40B4-BE49-F238E27FC236}">
+                <a16:creationId xmlns:a16="http://schemas.microsoft.com/office/drawing/2014/main" id="{8C5008E8-8C44-AA93-5F1F-699A15F3D865}"/>
+              </a:ext>
+            </a:extLst>
+          </p:cNvPr>
+          <p:cNvPicPr>
+            <a:picLocks noChangeAspect="1" noChangeArrowheads="1"/>
+          </p:cNvPicPr>
+          <p:nvPr/>
+        </p:nvPicPr>
+        <p:blipFill>
+          <a:blip r:embed="rId3">
+            <a:extLst>
+              <a:ext uri="{28A0092B-C50C-407E-A947-70E740481C1C}">
+                <a14:useLocalDpi xmlns:a14="http://schemas.microsoft.com/office/drawing/2010/main" val="0"/>
+              </a:ext>
+            </a:extLst>
+          </a:blip>
+          <a:srcRect/>
+          <a:stretch>
+            <a:fillRect/>
+          </a:stretch>
+        </p:blipFill>
+        <p:spPr bwMode="auto">
+          <a:xfrm>
+            <a:off x="2171700" y="2895600"/>
+            <a:ext cx="7315200" cy="3150870"/>
+          </a:xfrm>
+          <a:prstGeom prst="rect">
+            <a:avLst/>
+          </a:prstGeom>
+          <a:noFill/>
+          <a:extLst>
+            <a:ext uri="{909E8E84-426E-40DD-AFC4-6F175D3DCCD1}">
+              <a14:hiddenFill xmlns:a14="http://schemas.microsoft.com/office/drawing/2010/main">
+                <a:solidFill>
+                  <a:srgbClr val="FFFFFF"/>
+                </a:solidFill>
+              </a14:hiddenFill>
+            </a:ext>
+          </a:extLst>
+        </p:spPr>
+      </p:pic>
+    </p:spTree>
+    <p:extLst>
+      <p:ext uri="{BB962C8B-B14F-4D97-AF65-F5344CB8AC3E}">
+        <p14:creationId xmlns:p14="http://schemas.microsoft.com/office/powerpoint/2010/main" val="3636095540"/>
+      </p:ext>
+    </p:extLst>
+  </p:cSld>
+  <p:clrMapOvr>
+    <a:masterClrMapping/>
+  </p:clrMapOvr>
+</p:sld>
+</file>
+
+<file path=ppt/slides/slide40.xml><?xml version="1.0" encoding="utf-8"?>
 <p:sld xmlns:a="http://schemas.openxmlformats.org/drawingml/2006/main" xmlns:r="http://schemas.openxmlformats.org/officeDocument/2006/relationships" xmlns:p="http://schemas.openxmlformats.org/presentationml/2006/main">
   <p:cSld>
     <p:spTree>
@@ -17550,10 +18206,7 @@
                 </a:pPr>
                 <a14:m>
                   <m:oMathPara xmlns:m="http://schemas.openxmlformats.org/officeDocument/2006/math">
-                    <m:oMathParaPr>
-                      <m:jc m:val="centerGroup"/>
-                    </m:oMathParaPr>
-                    <m:oMath xmlns:m="http://schemas.openxmlformats.org/officeDocument/2006/math">
+                    <m:oMath>
                       <m:r>
                         <a:rPr lang="en-US" sz="2400" b="0" i="1" smtClean="0">
                           <a:latin typeface="Cambria Math" panose="02040503050406030204" pitchFamily="18" charset="0"/>
@@ -17843,7 +18496,7 @@
 </p:sld>
 </file>
 
-<file path=ppt/slides/slide39.xml><?xml version="1.0" encoding="utf-8"?>
+<file path=ppt/slides/slide41.xml><?xml version="1.0" encoding="utf-8"?>
 <p:sld xmlns:a="http://schemas.openxmlformats.org/drawingml/2006/main" xmlns:r="http://schemas.openxmlformats.org/officeDocument/2006/relationships" xmlns:p="http://schemas.openxmlformats.org/presentationml/2006/main">
   <p:cSld>
     <p:spTree>
@@ -17932,10 +18585,7 @@
                 </a:pPr>
                 <a14:m>
                   <m:oMathPara xmlns:m="http://schemas.openxmlformats.org/officeDocument/2006/math">
-                    <m:oMathParaPr>
-                      <m:jc m:val="centerGroup"/>
-                    </m:oMathParaPr>
-                    <m:oMath xmlns:m="http://schemas.openxmlformats.org/officeDocument/2006/math">
+                    <m:oMath>
                       <m:r>
                         <a:rPr lang="en-US" sz="2400" b="0" i="1" smtClean="0">
                           <a:latin typeface="Cambria Math" panose="02040503050406030204" pitchFamily="18" charset="0"/>
@@ -18241,255 +18891,7 @@
 </p:sld>
 </file>
 
-<file path=ppt/slides/slide4.xml><?xml version="1.0" encoding="utf-8"?>
-<p:sld xmlns:a="http://schemas.openxmlformats.org/drawingml/2006/main" xmlns:r="http://schemas.openxmlformats.org/officeDocument/2006/relationships" xmlns:p="http://schemas.openxmlformats.org/presentationml/2006/main">
-  <p:cSld>
-    <p:spTree>
-      <p:nvGrpSpPr>
-        <p:cNvPr id="1" name=""/>
-        <p:cNvGrpSpPr/>
-        <p:nvPr/>
-      </p:nvGrpSpPr>
-      <p:grpSpPr>
-        <a:xfrm>
-          <a:off x="0" y="0"/>
-          <a:ext cx="0" cy="0"/>
-          <a:chOff x="0" y="0"/>
-          <a:chExt cx="0" cy="0"/>
-        </a:xfrm>
-      </p:grpSpPr>
-      <p:sp>
-        <p:nvSpPr>
-          <p:cNvPr id="2" name="Title 1"/>
-          <p:cNvSpPr>
-            <a:spLocks noGrp="1"/>
-          </p:cNvSpPr>
-          <p:nvPr>
-            <p:ph type="title"/>
-          </p:nvPr>
-        </p:nvSpPr>
-        <p:spPr>
-          <a:xfrm>
-            <a:off x="609600" y="337392"/>
-            <a:ext cx="10439400" cy="624840"/>
-          </a:xfrm>
-        </p:spPr>
-        <p:txBody>
-          <a:bodyPr>
-            <a:noAutofit/>
-          </a:bodyPr>
-          <a:lstStyle/>
-          <a:p>
-            <a:r>
-              <a:rPr lang="en-US" sz="3600" dirty="0">
-                <a:cs typeface="Times New Roman" panose="02020603050405020304" pitchFamily="18" charset="0"/>
-              </a:rPr>
-              <a:t>Causal Inference: From Back Doors to Front</a:t>
-            </a:r>
-            <a:endParaRPr lang="en-US" sz="3600" dirty="0">
-              <a:latin typeface="Times New Roman" panose="02020603050405020304" pitchFamily="18" charset="0"/>
-              <a:cs typeface="Times New Roman" panose="02020603050405020304" pitchFamily="18" charset="0"/>
-            </a:endParaRPr>
-          </a:p>
-        </p:txBody>
-      </p:sp>
-      <mc:AlternateContent xmlns:mc="http://schemas.openxmlformats.org/markup-compatibility/2006" xmlns:a14="http://schemas.microsoft.com/office/drawing/2010/main">
-        <mc:Choice Requires="a14">
-          <p:sp>
-            <p:nvSpPr>
-              <p:cNvPr id="3" name="Content Placeholder 2"/>
-              <p:cNvSpPr>
-                <a:spLocks noGrp="1"/>
-              </p:cNvSpPr>
-              <p:nvPr>
-                <p:ph idx="1"/>
-              </p:nvPr>
-            </p:nvSpPr>
-            <p:spPr>
-              <a:xfrm>
-                <a:off x="609601" y="1066801"/>
-                <a:ext cx="10439400" cy="5141388"/>
-              </a:xfrm>
-            </p:spPr>
-            <p:txBody>
-              <a:bodyPr>
-                <a:noAutofit/>
-              </a:bodyPr>
-              <a:lstStyle/>
-              <a:p>
-                <a:r>
-                  <a:rPr lang="en-US" sz="2400" dirty="0">
-                    <a:cs typeface="Times New Roman" panose="02020603050405020304" pitchFamily="18" charset="0"/>
-                  </a:rPr>
-                  <a:t>We can also</a:t>
-                </a:r>
-                <a:r>
-                  <a:rPr lang="en-US" sz="2400" dirty="0">
-                    <a:solidFill>
-                      <a:schemeClr val="accent2">
-                        <a:lumMod val="75000"/>
-                      </a:schemeClr>
-                    </a:solidFill>
-                    <a:cs typeface="Times New Roman" panose="02020603050405020304" pitchFamily="18" charset="0"/>
-                  </a:rPr>
-                  <a:t> </a:t>
-                </a:r>
-                <a:r>
-                  <a:rPr lang="en-US" sz="2400" b="1" dirty="0">
-                    <a:solidFill>
-                      <a:schemeClr val="accent2">
-                        <a:lumMod val="75000"/>
-                      </a:schemeClr>
-                    </a:solidFill>
-                    <a:cs typeface="Times New Roman" panose="02020603050405020304" pitchFamily="18" charset="0"/>
-                  </a:rPr>
-                  <a:t>isolate variation </a:t>
-                </a:r>
-                <a:r>
-                  <a:rPr lang="en-US" sz="2400" dirty="0">
-                    <a:cs typeface="Times New Roman" panose="02020603050405020304" pitchFamily="18" charset="0"/>
-                  </a:rPr>
-                  <a:t>coming only through </a:t>
-                </a:r>
-                <a14:m>
-                  <m:oMath xmlns:m="http://schemas.openxmlformats.org/officeDocument/2006/math">
-                    <m:r>
-                      <a:rPr lang="en-US" sz="2400" b="0" i="1" smtClean="0">
-                        <a:latin typeface="Cambria Math" panose="02040503050406030204" pitchFamily="18" charset="0"/>
-                        <a:cs typeface="Times New Roman" panose="02020603050405020304" pitchFamily="18" charset="0"/>
-                      </a:rPr>
-                      <m:t>𝑋</m:t>
-                    </m:r>
-                  </m:oMath>
-                </a14:m>
-                <a:endParaRPr lang="en-US" sz="2400" dirty="0">
-                  <a:cs typeface="Times New Roman" panose="02020603050405020304" pitchFamily="18" charset="0"/>
-                </a:endParaRPr>
-              </a:p>
-              <a:p>
-                <a:r>
-                  <a:rPr lang="en-US" sz="2400" dirty="0">
-                    <a:cs typeface="Times New Roman" panose="02020603050405020304" pitchFamily="18" charset="0"/>
-                  </a:rPr>
-                  <a:t>This is called a</a:t>
-                </a:r>
-                <a:r>
-                  <a:rPr lang="en-US" sz="2400" dirty="0">
-                    <a:solidFill>
-                      <a:schemeClr val="accent2">
-                        <a:lumMod val="75000"/>
-                      </a:schemeClr>
-                    </a:solidFill>
-                    <a:cs typeface="Times New Roman" panose="02020603050405020304" pitchFamily="18" charset="0"/>
-                  </a:rPr>
-                  <a:t> </a:t>
-                </a:r>
-                <a:r>
-                  <a:rPr lang="en-US" sz="2400" b="1" dirty="0">
-                    <a:solidFill>
-                      <a:schemeClr val="accent2">
-                        <a:lumMod val="75000"/>
-                      </a:schemeClr>
-                    </a:solidFill>
-                    <a:cs typeface="Times New Roman" panose="02020603050405020304" pitchFamily="18" charset="0"/>
-                  </a:rPr>
-                  <a:t>front door approach</a:t>
-                </a:r>
-                <a:r>
-                  <a:rPr lang="en-US" sz="2400" dirty="0">
-                    <a:cs typeface="Times New Roman" panose="02020603050405020304" pitchFamily="18" charset="0"/>
-                  </a:rPr>
-                  <a:t> – mimics an experiment</a:t>
-                </a:r>
-              </a:p>
-              <a:p>
-                <a:endParaRPr lang="en-US" sz="2400" b="1" dirty="0">
-                  <a:cs typeface="Times New Roman" panose="02020603050405020304" pitchFamily="18" charset="0"/>
-                </a:endParaRPr>
-              </a:p>
-              <a:p>
-                <a:endParaRPr lang="en-US" sz="2400" b="1" dirty="0">
-                  <a:cs typeface="Times New Roman" panose="02020603050405020304" pitchFamily="18" charset="0"/>
-                </a:endParaRPr>
-              </a:p>
-              <a:p>
-                <a:endParaRPr lang="en-US" sz="2400" b="1" dirty="0">
-                  <a:cs typeface="Times New Roman" panose="02020603050405020304" pitchFamily="18" charset="0"/>
-                </a:endParaRPr>
-              </a:p>
-              <a:p>
-                <a:endParaRPr lang="en-US" sz="2400" b="1" dirty="0">
-                  <a:cs typeface="Times New Roman" panose="02020603050405020304" pitchFamily="18" charset="0"/>
-                </a:endParaRPr>
-              </a:p>
-              <a:p>
-                <a:endParaRPr lang="en-US" sz="2400" b="1" dirty="0">
-                  <a:cs typeface="Times New Roman" panose="02020603050405020304" pitchFamily="18" charset="0"/>
-                </a:endParaRPr>
-              </a:p>
-              <a:p>
-                <a:pPr marL="0" indent="0">
-                  <a:buNone/>
-                </a:pPr>
-                <a:endParaRPr lang="en-US" sz="2400" b="1" dirty="0">
-                  <a:cs typeface="Times New Roman" panose="02020603050405020304" pitchFamily="18" charset="0"/>
-                </a:endParaRPr>
-              </a:p>
-            </p:txBody>
-          </p:sp>
-        </mc:Choice>
-        <mc:Fallback xmlns="">
-          <p:sp>
-            <p:nvSpPr>
-              <p:cNvPr id="3" name="Content Placeholder 2"/>
-              <p:cNvSpPr>
-                <a:spLocks noGrp="1" noRot="1" noChangeAspect="1" noMove="1" noResize="1" noEditPoints="1" noAdjustHandles="1" noChangeArrowheads="1" noChangeShapeType="1" noTextEdit="1"/>
-              </p:cNvSpPr>
-              <p:nvPr>
-                <p:ph idx="1"/>
-              </p:nvPr>
-            </p:nvSpPr>
-            <p:spPr>
-              <a:xfrm>
-                <a:off x="609601" y="1066801"/>
-                <a:ext cx="10439400" cy="5141388"/>
-              </a:xfrm>
-              <a:blipFill>
-                <a:blip r:embed="rId3"/>
-                <a:stretch>
-                  <a:fillRect l="-409" t="-1305"/>
-                </a:stretch>
-              </a:blipFill>
-            </p:spPr>
-            <p:txBody>
-              <a:bodyPr/>
-              <a:lstStyle/>
-              <a:p>
-                <a:r>
-                  <a:rPr lang="en-US">
-                    <a:noFill/>
-                  </a:rPr>
-                  <a:t> </a:t>
-                </a:r>
-              </a:p>
-            </p:txBody>
-          </p:sp>
-        </mc:Fallback>
-      </mc:AlternateContent>
-    </p:spTree>
-    <p:extLst>
-      <p:ext uri="{BB962C8B-B14F-4D97-AF65-F5344CB8AC3E}">
-        <p14:creationId xmlns:p14="http://schemas.microsoft.com/office/powerpoint/2010/main" val="2219273790"/>
-      </p:ext>
-    </p:extLst>
-  </p:cSld>
-  <p:clrMapOvr>
-    <a:masterClrMapping/>
-  </p:clrMapOvr>
-</p:sld>
-</file>
-
-<file path=ppt/slides/slide40.xml><?xml version="1.0" encoding="utf-8"?>
+<file path=ppt/slides/slide42.xml><?xml version="1.0" encoding="utf-8"?>
 <p:sld xmlns:a="http://schemas.openxmlformats.org/drawingml/2006/main" xmlns:r="http://schemas.openxmlformats.org/officeDocument/2006/relationships" xmlns:p="http://schemas.openxmlformats.org/presentationml/2006/main">
   <p:cSld>
     <p:spTree>
@@ -18578,10 +18980,7 @@
                 </a:pPr>
                 <a14:m>
                   <m:oMathPara xmlns:m="http://schemas.openxmlformats.org/officeDocument/2006/math">
-                    <m:oMathParaPr>
-                      <m:jc m:val="centerGroup"/>
-                    </m:oMathParaPr>
-                    <m:oMath xmlns:m="http://schemas.openxmlformats.org/officeDocument/2006/math">
+                    <m:oMath>
                       <m:r>
                         <a:rPr lang="en-US" sz="2400" b="0" i="1" smtClean="0">
                           <a:latin typeface="Cambria Math" panose="02040503050406030204" pitchFamily="18" charset="0"/>
@@ -18903,7 +19302,7 @@
 </p:sld>
 </file>
 
-<file path=ppt/slides/slide41.xml><?xml version="1.0" encoding="utf-8"?>
+<file path=ppt/slides/slide43.xml><?xml version="1.0" encoding="utf-8"?>
 <p:sld xmlns:a="http://schemas.openxmlformats.org/drawingml/2006/main" xmlns:r="http://schemas.openxmlformats.org/officeDocument/2006/relationships" xmlns:p="http://schemas.openxmlformats.org/presentationml/2006/main">
   <p:cSld>
     <p:spTree>
@@ -18995,7 +19394,7 @@
 </p:sld>
 </file>
 
-<file path=ppt/slides/slide42.xml><?xml version="1.0" encoding="utf-8"?>
+<file path=ppt/slides/slide44.xml><?xml version="1.0" encoding="utf-8"?>
 <p:sld xmlns:a="http://schemas.openxmlformats.org/drawingml/2006/main" xmlns:r="http://schemas.openxmlformats.org/officeDocument/2006/relationships" xmlns:p="http://schemas.openxmlformats.org/presentationml/2006/main">
   <p:cSld>
     <p:spTree>
@@ -19117,7 +19516,7 @@
 </p:sld>
 </file>
 
-<file path=ppt/slides/slide43.xml><?xml version="1.0" encoding="utf-8"?>
+<file path=ppt/slides/slide45.xml><?xml version="1.0" encoding="utf-8"?>
 <p:sld xmlns:a="http://schemas.openxmlformats.org/drawingml/2006/main" xmlns:r="http://schemas.openxmlformats.org/officeDocument/2006/relationships" xmlns:p="http://schemas.openxmlformats.org/presentationml/2006/main">
   <p:cSld>
     <p:spTree>
@@ -19209,7 +19608,7 @@
 </p:sld>
 </file>
 
-<file path=ppt/slides/slide44.xml><?xml version="1.0" encoding="utf-8"?>
+<file path=ppt/slides/slide46.xml><?xml version="1.0" encoding="utf-8"?>
 <p:sld xmlns:a="http://schemas.openxmlformats.org/drawingml/2006/main" xmlns:r="http://schemas.openxmlformats.org/officeDocument/2006/relationships" xmlns:p="http://schemas.openxmlformats.org/presentationml/2006/main">
   <p:cSld>
     <p:spTree>
@@ -19301,7 +19700,7 @@
 </p:sld>
 </file>
 
-<file path=ppt/slides/slide45.xml><?xml version="1.0" encoding="utf-8"?>
+<file path=ppt/slides/slide47.xml><?xml version="1.0" encoding="utf-8"?>
 <p:sld xmlns:a="http://schemas.openxmlformats.org/drawingml/2006/main" xmlns:r="http://schemas.openxmlformats.org/officeDocument/2006/relationships" xmlns:p="http://schemas.openxmlformats.org/presentationml/2006/main">
   <p:cSld>
     <p:spTree>
@@ -19393,7 +19792,7 @@
 </p:sld>
 </file>
 
-<file path=ppt/slides/slide46.xml><?xml version="1.0" encoding="utf-8"?>
+<file path=ppt/slides/slide48.xml><?xml version="1.0" encoding="utf-8"?>
 <p:sld xmlns:a="http://schemas.openxmlformats.org/drawingml/2006/main" xmlns:r="http://schemas.openxmlformats.org/officeDocument/2006/relationships" xmlns:p="http://schemas.openxmlformats.org/presentationml/2006/main">
   <p:cSld>
     <p:spTree>
@@ -19485,7 +19884,7 @@
 </p:sld>
 </file>
 
-<file path=ppt/slides/slide47.xml><?xml version="1.0" encoding="utf-8"?>
+<file path=ppt/slides/slide49.xml><?xml version="1.0" encoding="utf-8"?>
 <p:sld xmlns:a="http://schemas.openxmlformats.org/drawingml/2006/main" xmlns:r="http://schemas.openxmlformats.org/officeDocument/2006/relationships" xmlns:p="http://schemas.openxmlformats.org/presentationml/2006/main">
   <p:cSld>
     <p:spTree>
@@ -19579,7 +19978,269 @@
 </p:sld>
 </file>
 
-<file path=ppt/slides/slide48.xml><?xml version="1.0" encoding="utf-8"?>
+<file path=ppt/slides/slide5.xml><?xml version="1.0" encoding="utf-8"?>
+<p:sld xmlns:a="http://schemas.openxmlformats.org/drawingml/2006/main" xmlns:r="http://schemas.openxmlformats.org/officeDocument/2006/relationships" xmlns:p="http://schemas.openxmlformats.org/presentationml/2006/main">
+  <p:cSld>
+    <p:spTree>
+      <p:nvGrpSpPr>
+        <p:cNvPr id="1" name="">
+          <a:extLst>
+            <a:ext uri="{FF2B5EF4-FFF2-40B4-BE49-F238E27FC236}">
+              <a16:creationId xmlns:a16="http://schemas.microsoft.com/office/drawing/2014/main" id="{8590744A-9ECB-7BB8-E123-6C4203B92EC5}"/>
+            </a:ext>
+          </a:extLst>
+        </p:cNvPr>
+        <p:cNvGrpSpPr/>
+        <p:nvPr/>
+      </p:nvGrpSpPr>
+      <p:grpSpPr>
+        <a:xfrm>
+          <a:off x="0" y="0"/>
+          <a:ext cx="0" cy="0"/>
+          <a:chOff x="0" y="0"/>
+          <a:chExt cx="0" cy="0"/>
+        </a:xfrm>
+      </p:grpSpPr>
+      <p:sp>
+        <p:nvSpPr>
+          <p:cNvPr id="2" name="Title 1">
+            <a:extLst>
+              <a:ext uri="{FF2B5EF4-FFF2-40B4-BE49-F238E27FC236}">
+                <a16:creationId xmlns:a16="http://schemas.microsoft.com/office/drawing/2014/main" id="{F4AC96ED-BB5C-3F53-AF08-93D9772E7BC3}"/>
+              </a:ext>
+            </a:extLst>
+          </p:cNvPr>
+          <p:cNvSpPr>
+            <a:spLocks noGrp="1"/>
+          </p:cNvSpPr>
+          <p:nvPr>
+            <p:ph type="title"/>
+          </p:nvPr>
+        </p:nvSpPr>
+        <p:spPr>
+          <a:xfrm>
+            <a:off x="609600" y="337392"/>
+            <a:ext cx="10439400" cy="624840"/>
+          </a:xfrm>
+        </p:spPr>
+        <p:txBody>
+          <a:bodyPr>
+            <a:noAutofit/>
+          </a:bodyPr>
+          <a:lstStyle/>
+          <a:p>
+            <a:r>
+              <a:rPr lang="en-US" sz="3600" dirty="0">
+                <a:cs typeface="Times New Roman" panose="02020603050405020304" pitchFamily="18" charset="0"/>
+              </a:rPr>
+              <a:t>Last Time: Matching Approaches</a:t>
+            </a:r>
+            <a:endParaRPr lang="en-US" sz="3600" dirty="0">
+              <a:latin typeface="Times New Roman" panose="02020603050405020304" pitchFamily="18" charset="0"/>
+              <a:cs typeface="Times New Roman" panose="02020603050405020304" pitchFamily="18" charset="0"/>
+            </a:endParaRPr>
+          </a:p>
+        </p:txBody>
+      </p:sp>
+      <p:sp>
+        <p:nvSpPr>
+          <p:cNvPr id="3" name="Content Placeholder 2">
+            <a:extLst>
+              <a:ext uri="{FF2B5EF4-FFF2-40B4-BE49-F238E27FC236}">
+                <a16:creationId xmlns:a16="http://schemas.microsoft.com/office/drawing/2014/main" id="{63A5DF2C-03A1-5AA7-1475-97A9BF3448D4}"/>
+              </a:ext>
+            </a:extLst>
+          </p:cNvPr>
+          <p:cNvSpPr>
+            <a:spLocks noGrp="1"/>
+          </p:cNvSpPr>
+          <p:nvPr>
+            <p:ph idx="1"/>
+          </p:nvPr>
+        </p:nvSpPr>
+        <p:spPr>
+          <a:xfrm>
+            <a:off x="609601" y="1066801"/>
+            <a:ext cx="10015390" cy="5141388"/>
+          </a:xfrm>
+        </p:spPr>
+        <p:txBody>
+          <a:bodyPr>
+            <a:noAutofit/>
+          </a:bodyPr>
+          <a:lstStyle/>
+          <a:p>
+            <a:pPr lvl="1"/>
+            <a:r>
+              <a:rPr lang="en-US" sz="2400" dirty="0">
+                <a:cs typeface="Times New Roman" panose="02020603050405020304" pitchFamily="18" charset="0"/>
+              </a:rPr>
+              <a:t>Matching methods help to deal with </a:t>
+            </a:r>
+            <a:r>
+              <a:rPr lang="en-US" sz="2400" b="1" dirty="0">
+                <a:solidFill>
+                  <a:schemeClr val="accent2">
+                    <a:lumMod val="75000"/>
+                  </a:schemeClr>
+                </a:solidFill>
+                <a:cs typeface="Times New Roman" panose="02020603050405020304" pitchFamily="18" charset="0"/>
+              </a:rPr>
+              <a:t>imbalanced data </a:t>
+            </a:r>
+          </a:p>
+          <a:p>
+            <a:pPr lvl="1"/>
+            <a:r>
+              <a:rPr lang="en-US" sz="2400" dirty="0">
+                <a:cs typeface="Times New Roman" panose="02020603050405020304" pitchFamily="18" charset="0"/>
+              </a:rPr>
+              <a:t>Helps you argue that your comparisons really are apples-to-apples</a:t>
+            </a:r>
+          </a:p>
+          <a:p>
+            <a:pPr lvl="1"/>
+            <a:r>
+              <a:rPr lang="en-US" sz="2400" dirty="0">
+                <a:cs typeface="Times New Roman" panose="02020603050405020304" pitchFamily="18" charset="0"/>
+              </a:rPr>
+              <a:t>Matching relies on selection on </a:t>
+            </a:r>
+            <a:r>
+              <a:rPr lang="en-US" sz="2400" b="1" dirty="0">
+                <a:solidFill>
+                  <a:schemeClr val="accent2">
+                    <a:lumMod val="75000"/>
+                  </a:schemeClr>
+                </a:solidFill>
+                <a:cs typeface="Times New Roman" panose="02020603050405020304" pitchFamily="18" charset="0"/>
+              </a:rPr>
+              <a:t>observables</a:t>
+            </a:r>
+            <a:r>
+              <a:rPr lang="en-US" sz="2400" dirty="0">
+                <a:cs typeface="Times New Roman" panose="02020603050405020304" pitchFamily="18" charset="0"/>
+              </a:rPr>
+              <a:t> </a:t>
+            </a:r>
+          </a:p>
+          <a:p>
+            <a:pPr lvl="1"/>
+            <a:r>
+              <a:rPr lang="en-US" sz="2400" dirty="0">
+                <a:cs typeface="Times New Roman" panose="02020603050405020304" pitchFamily="18" charset="0"/>
+              </a:rPr>
+              <a:t>Propensity score, nearest neighbor techniques</a:t>
+            </a:r>
+          </a:p>
+        </p:txBody>
+      </p:sp>
+      <p:pic>
+        <p:nvPicPr>
+          <p:cNvPr id="4" name="Picture 2">
+            <a:extLst>
+              <a:ext uri="{FF2B5EF4-FFF2-40B4-BE49-F238E27FC236}">
+                <a16:creationId xmlns:a16="http://schemas.microsoft.com/office/drawing/2014/main" id="{D34F7EDA-691B-1204-D38C-03489AEE8CE7}"/>
+              </a:ext>
+            </a:extLst>
+          </p:cNvPr>
+          <p:cNvPicPr>
+            <a:picLocks noChangeAspect="1" noChangeArrowheads="1"/>
+          </p:cNvPicPr>
+          <p:nvPr/>
+        </p:nvPicPr>
+        <p:blipFill>
+          <a:blip r:embed="rId3">
+            <a:extLst>
+              <a:ext uri="{28A0092B-C50C-407E-A947-70E740481C1C}">
+                <a14:useLocalDpi xmlns:a14="http://schemas.microsoft.com/office/drawing/2010/main" val="0"/>
+              </a:ext>
+            </a:extLst>
+          </a:blip>
+          <a:srcRect/>
+          <a:stretch>
+            <a:fillRect/>
+          </a:stretch>
+        </p:blipFill>
+        <p:spPr bwMode="auto">
+          <a:xfrm>
+            <a:off x="2171700" y="2895600"/>
+            <a:ext cx="7315200" cy="3150870"/>
+          </a:xfrm>
+          <a:prstGeom prst="rect">
+            <a:avLst/>
+          </a:prstGeom>
+          <a:noFill/>
+          <a:extLst>
+            <a:ext uri="{909E8E84-426E-40DD-AFC4-6F175D3DCCD1}">
+              <a14:hiddenFill xmlns:a14="http://schemas.microsoft.com/office/drawing/2010/main">
+                <a:solidFill>
+                  <a:srgbClr val="FFFFFF"/>
+                </a:solidFill>
+              </a14:hiddenFill>
+            </a:ext>
+          </a:extLst>
+        </p:spPr>
+      </p:pic>
+      <p:sp>
+        <p:nvSpPr>
+          <p:cNvPr id="5" name="TextBox 4">
+            <a:extLst>
+              <a:ext uri="{FF2B5EF4-FFF2-40B4-BE49-F238E27FC236}">
+                <a16:creationId xmlns:a16="http://schemas.microsoft.com/office/drawing/2014/main" id="{39126CAC-965D-4813-30C4-FCD64B2C19E1}"/>
+              </a:ext>
+            </a:extLst>
+          </p:cNvPr>
+          <p:cNvSpPr txBox="1"/>
+          <p:nvPr/>
+        </p:nvSpPr>
+        <p:spPr>
+          <a:xfrm>
+            <a:off x="647700" y="5156170"/>
+            <a:ext cx="3733800" cy="954107"/>
+          </a:xfrm>
+          <a:prstGeom prst="rect">
+            <a:avLst/>
+          </a:prstGeom>
+          <a:solidFill>
+            <a:schemeClr val="accent3">
+              <a:lumMod val="75000"/>
+            </a:schemeClr>
+          </a:solidFill>
+        </p:spPr>
+        <p:txBody>
+          <a:bodyPr wrap="square" rtlCol="0">
+            <a:spAutoFit/>
+          </a:bodyPr>
+          <a:lstStyle/>
+          <a:p>
+            <a:pPr algn="ctr"/>
+            <a:r>
+              <a:rPr lang="en-US" sz="2800" dirty="0">
+                <a:solidFill>
+                  <a:schemeClr val="bg1"/>
+                </a:solidFill>
+                <a:latin typeface="Aptos" panose="020B0004020202020204" pitchFamily="34" charset="0"/>
+              </a:rPr>
+              <a:t>So can we ever really get at causality?</a:t>
+            </a:r>
+          </a:p>
+        </p:txBody>
+      </p:sp>
+    </p:spTree>
+    <p:extLst>
+      <p:ext uri="{BB962C8B-B14F-4D97-AF65-F5344CB8AC3E}">
+        <p14:creationId xmlns:p14="http://schemas.microsoft.com/office/powerpoint/2010/main" val="2484274925"/>
+      </p:ext>
+    </p:extLst>
+  </p:cSld>
+  <p:clrMapOvr>
+    <a:masterClrMapping/>
+  </p:clrMapOvr>
+</p:sld>
+</file>
+
+<file path=ppt/slides/slide50.xml><?xml version="1.0" encoding="utf-8"?>
 <p:sld xmlns:a="http://schemas.openxmlformats.org/drawingml/2006/main" xmlns:r="http://schemas.openxmlformats.org/officeDocument/2006/relationships" xmlns:p="http://schemas.openxmlformats.org/presentationml/2006/main">
   <p:cSld>
     <p:spTree>
@@ -19727,7 +20388,7 @@
 </p:sld>
 </file>
 
-<file path=ppt/slides/slide49.xml><?xml version="1.0" encoding="utf-8"?>
+<file path=ppt/slides/slide51.xml><?xml version="1.0" encoding="utf-8"?>
 <p:sld xmlns:a="http://schemas.openxmlformats.org/drawingml/2006/main" xmlns:r="http://schemas.openxmlformats.org/officeDocument/2006/relationships" xmlns:p="http://schemas.openxmlformats.org/presentationml/2006/main">
   <p:cSld>
     <p:spTree>
@@ -19970,121 +20631,7 @@
 </p:sld>
 </file>
 
-<file path=ppt/slides/slide5.xml><?xml version="1.0" encoding="utf-8"?>
-<p:sld xmlns:a="http://schemas.openxmlformats.org/drawingml/2006/main" xmlns:r="http://schemas.openxmlformats.org/officeDocument/2006/relationships" xmlns:p="http://schemas.openxmlformats.org/presentationml/2006/main">
-  <p:cSld>
-    <p:spTree>
-      <p:nvGrpSpPr>
-        <p:cNvPr id="1" name=""/>
-        <p:cNvGrpSpPr/>
-        <p:nvPr/>
-      </p:nvGrpSpPr>
-      <p:grpSpPr>
-        <a:xfrm>
-          <a:off x="0" y="0"/>
-          <a:ext cx="0" cy="0"/>
-          <a:chOff x="0" y="0"/>
-          <a:chExt cx="0" cy="0"/>
-        </a:xfrm>
-      </p:grpSpPr>
-      <p:sp>
-        <p:nvSpPr>
-          <p:cNvPr id="2" name="Title 1"/>
-          <p:cNvSpPr>
-            <a:spLocks noGrp="1"/>
-          </p:cNvSpPr>
-          <p:nvPr>
-            <p:ph type="title"/>
-          </p:nvPr>
-        </p:nvSpPr>
-        <p:spPr>
-          <a:xfrm>
-            <a:off x="609600" y="337392"/>
-            <a:ext cx="10439400" cy="624840"/>
-          </a:xfrm>
-        </p:spPr>
-        <p:txBody>
-          <a:bodyPr>
-            <a:noAutofit/>
-          </a:bodyPr>
-          <a:lstStyle/>
-          <a:p>
-            <a:r>
-              <a:rPr lang="en-US" sz="3600" dirty="0">
-                <a:cs typeface="Times New Roman" panose="02020603050405020304" pitchFamily="18" charset="0"/>
-              </a:rPr>
-              <a:t>Open up the (Right) Gates!</a:t>
-            </a:r>
-            <a:endParaRPr lang="en-US" sz="3600" dirty="0">
-              <a:latin typeface="Times New Roman" panose="02020603050405020304" pitchFamily="18" charset="0"/>
-              <a:cs typeface="Times New Roman" panose="02020603050405020304" pitchFamily="18" charset="0"/>
-            </a:endParaRPr>
-          </a:p>
-        </p:txBody>
-      </p:sp>
-      <p:pic>
-        <p:nvPicPr>
-          <p:cNvPr id="1026" name="Picture 2">
-            <a:extLst>
-              <a:ext uri="{FF2B5EF4-FFF2-40B4-BE49-F238E27FC236}">
-                <a16:creationId xmlns:a16="http://schemas.microsoft.com/office/drawing/2014/main" id="{F08185DA-48EE-9634-6C1F-C3A8EA600A84}"/>
-              </a:ext>
-            </a:extLst>
-          </p:cNvPr>
-          <p:cNvPicPr>
-            <a:picLocks noGrp="1" noChangeAspect="1" noChangeArrowheads="1"/>
-          </p:cNvPicPr>
-          <p:nvPr>
-            <p:ph idx="1"/>
-          </p:nvPr>
-        </p:nvPicPr>
-        <p:blipFill rotWithShape="1">
-          <a:blip r:embed="rId3">
-            <a:extLst>
-              <a:ext uri="{28A0092B-C50C-407E-A947-70E740481C1C}">
-                <a14:useLocalDpi xmlns:a14="http://schemas.microsoft.com/office/drawing/2010/main" val="0"/>
-              </a:ext>
-            </a:extLst>
-          </a:blip>
-          <a:srcRect t="7664" b="10294"/>
-          <a:stretch>
-            <a:fillRect/>
-          </a:stretch>
-        </p:blipFill>
-        <p:spPr bwMode="auto">
-          <a:xfrm>
-            <a:off x="2857500" y="1007690"/>
-            <a:ext cx="6515100" cy="5697910"/>
-          </a:xfrm>
-          <a:prstGeom prst="rect">
-            <a:avLst/>
-          </a:prstGeom>
-          <a:noFill/>
-          <a:extLst>
-            <a:ext uri="{909E8E84-426E-40DD-AFC4-6F175D3DCCD1}">
-              <a14:hiddenFill xmlns:a14="http://schemas.microsoft.com/office/drawing/2010/main">
-                <a:solidFill>
-                  <a:srgbClr val="FFFFFF"/>
-                </a:solidFill>
-              </a14:hiddenFill>
-            </a:ext>
-          </a:extLst>
-        </p:spPr>
-      </p:pic>
-    </p:spTree>
-    <p:extLst>
-      <p:ext uri="{BB962C8B-B14F-4D97-AF65-F5344CB8AC3E}">
-        <p14:creationId xmlns:p14="http://schemas.microsoft.com/office/powerpoint/2010/main" val="2492239669"/>
-      </p:ext>
-    </p:extLst>
-  </p:cSld>
-  <p:clrMapOvr>
-    <a:masterClrMapping/>
-  </p:clrMapOvr>
-</p:sld>
-</file>
-
-<file path=ppt/slides/slide50.xml><?xml version="1.0" encoding="utf-8"?>
+<file path=ppt/slides/slide52.xml><?xml version="1.0" encoding="utf-8"?>
 <p:sld xmlns:a="http://schemas.openxmlformats.org/drawingml/2006/main" xmlns:r="http://schemas.openxmlformats.org/officeDocument/2006/relationships" xmlns:p="http://schemas.openxmlformats.org/presentationml/2006/main">
   <p:cSld>
     <p:spTree>
@@ -20402,7 +20949,7 @@
 </p:sld>
 </file>
 
-<file path=ppt/slides/slide51.xml><?xml version="1.0" encoding="utf-8"?>
+<file path=ppt/slides/slide53.xml><?xml version="1.0" encoding="utf-8"?>
 <p:sld xmlns:a="http://schemas.openxmlformats.org/drawingml/2006/main" xmlns:r="http://schemas.openxmlformats.org/officeDocument/2006/relationships" xmlns:p="http://schemas.openxmlformats.org/presentationml/2006/main">
   <p:cSld>
     <p:spTree>
@@ -20779,7 +21326,7 @@
 </p:sld>
 </file>
 
-<file path=ppt/slides/slide52.xml><?xml version="1.0" encoding="utf-8"?>
+<file path=ppt/slides/slide54.xml><?xml version="1.0" encoding="utf-8"?>
 <p:sld xmlns:a="http://schemas.openxmlformats.org/drawingml/2006/main" xmlns:r="http://schemas.openxmlformats.org/officeDocument/2006/relationships" xmlns:p="http://schemas.openxmlformats.org/presentationml/2006/main">
   <p:cSld>
     <p:spTree>
@@ -21091,7 +21638,7 @@
 </p:sld>
 </file>
 
-<file path=ppt/slides/slide53.xml><?xml version="1.0" encoding="utf-8"?>
+<file path=ppt/slides/slide55.xml><?xml version="1.0" encoding="utf-8"?>
 <p:sld xmlns:a="http://schemas.openxmlformats.org/drawingml/2006/main" xmlns:r="http://schemas.openxmlformats.org/officeDocument/2006/relationships" xmlns:p="http://schemas.openxmlformats.org/presentationml/2006/main">
   <p:cSld>
     <p:spTree>
@@ -21417,7 +21964,7 @@
 </p:sld>
 </file>
 
-<file path=ppt/slides/slide54.xml><?xml version="1.0" encoding="utf-8"?>
+<file path=ppt/slides/slide56.xml><?xml version="1.0" encoding="utf-8"?>
 <p:sld xmlns:a="http://schemas.openxmlformats.org/drawingml/2006/main" xmlns:r="http://schemas.openxmlformats.org/officeDocument/2006/relationships" xmlns:p="http://schemas.openxmlformats.org/presentationml/2006/main">
   <p:cSld>
     <p:bg>
@@ -21720,6 +22267,368 @@
       </p:grpSpPr>
       <p:sp>
         <p:nvSpPr>
+          <p:cNvPr id="2" name="Title 1"/>
+          <p:cNvSpPr>
+            <a:spLocks noGrp="1"/>
+          </p:cNvSpPr>
+          <p:nvPr>
+            <p:ph type="title"/>
+          </p:nvPr>
+        </p:nvSpPr>
+        <p:spPr>
+          <a:xfrm>
+            <a:off x="609600" y="337392"/>
+            <a:ext cx="10439400" cy="624840"/>
+          </a:xfrm>
+        </p:spPr>
+        <p:txBody>
+          <a:bodyPr>
+            <a:noAutofit/>
+          </a:bodyPr>
+          <a:lstStyle/>
+          <a:p>
+            <a:r>
+              <a:rPr lang="en-US" sz="3600" dirty="0">
+                <a:cs typeface="Times New Roman" panose="02020603050405020304" pitchFamily="18" charset="0"/>
+              </a:rPr>
+              <a:t>Causal Inference: From Back Doors to Front</a:t>
+            </a:r>
+            <a:endParaRPr lang="en-US" sz="3600" dirty="0">
+              <a:latin typeface="Times New Roman" panose="02020603050405020304" pitchFamily="18" charset="0"/>
+              <a:cs typeface="Times New Roman" panose="02020603050405020304" pitchFamily="18" charset="0"/>
+            </a:endParaRPr>
+          </a:p>
+        </p:txBody>
+      </p:sp>
+      <mc:AlternateContent xmlns:mc="http://schemas.openxmlformats.org/markup-compatibility/2006" xmlns:a14="http://schemas.microsoft.com/office/drawing/2010/main">
+        <mc:Choice Requires="a14">
+          <p:sp>
+            <p:nvSpPr>
+              <p:cNvPr id="3" name="Content Placeholder 2"/>
+              <p:cNvSpPr>
+                <a:spLocks noGrp="1"/>
+              </p:cNvSpPr>
+              <p:nvPr>
+                <p:ph idx="1"/>
+              </p:nvPr>
+            </p:nvSpPr>
+            <p:spPr>
+              <a:xfrm>
+                <a:off x="609601" y="1066801"/>
+                <a:ext cx="10439400" cy="5141388"/>
+              </a:xfrm>
+            </p:spPr>
+            <p:txBody>
+              <a:bodyPr>
+                <a:noAutofit/>
+              </a:bodyPr>
+              <a:lstStyle/>
+              <a:p>
+                <a:r>
+                  <a:rPr lang="en-US" sz="2400" dirty="0">
+                    <a:cs typeface="Times New Roman" panose="02020603050405020304" pitchFamily="18" charset="0"/>
+                  </a:rPr>
+                  <a:t>We can also</a:t>
+                </a:r>
+                <a:r>
+                  <a:rPr lang="en-US" sz="2400" dirty="0">
+                    <a:solidFill>
+                      <a:schemeClr val="accent2">
+                        <a:lumMod val="75000"/>
+                      </a:schemeClr>
+                    </a:solidFill>
+                    <a:cs typeface="Times New Roman" panose="02020603050405020304" pitchFamily="18" charset="0"/>
+                  </a:rPr>
+                  <a:t> </a:t>
+                </a:r>
+                <a:r>
+                  <a:rPr lang="en-US" sz="2400" b="1" dirty="0">
+                    <a:solidFill>
+                      <a:schemeClr val="accent2">
+                        <a:lumMod val="75000"/>
+                      </a:schemeClr>
+                    </a:solidFill>
+                    <a:cs typeface="Times New Roman" panose="02020603050405020304" pitchFamily="18" charset="0"/>
+                  </a:rPr>
+                  <a:t>isolate variation </a:t>
+                </a:r>
+                <a:r>
+                  <a:rPr lang="en-US" sz="2400" dirty="0">
+                    <a:cs typeface="Times New Roman" panose="02020603050405020304" pitchFamily="18" charset="0"/>
+                  </a:rPr>
+                  <a:t>coming only through </a:t>
+                </a:r>
+                <a14:m>
+                  <m:oMath xmlns:m="http://schemas.openxmlformats.org/officeDocument/2006/math">
+                    <m:r>
+                      <a:rPr lang="en-US" sz="2400" b="0" i="1" smtClean="0">
+                        <a:latin typeface="Cambria Math" panose="02040503050406030204" pitchFamily="18" charset="0"/>
+                        <a:cs typeface="Times New Roman" panose="02020603050405020304" pitchFamily="18" charset="0"/>
+                      </a:rPr>
+                      <m:t>𝑋</m:t>
+                    </m:r>
+                  </m:oMath>
+                </a14:m>
+                <a:endParaRPr lang="en-US" sz="2400" dirty="0">
+                  <a:cs typeface="Times New Roman" panose="02020603050405020304" pitchFamily="18" charset="0"/>
+                </a:endParaRPr>
+              </a:p>
+              <a:p>
+                <a:r>
+                  <a:rPr lang="en-US" sz="2400" dirty="0">
+                    <a:cs typeface="Times New Roman" panose="02020603050405020304" pitchFamily="18" charset="0"/>
+                  </a:rPr>
+                  <a:t>This is called a</a:t>
+                </a:r>
+                <a:r>
+                  <a:rPr lang="en-US" sz="2400" dirty="0">
+                    <a:solidFill>
+                      <a:schemeClr val="accent2">
+                        <a:lumMod val="75000"/>
+                      </a:schemeClr>
+                    </a:solidFill>
+                    <a:cs typeface="Times New Roman" panose="02020603050405020304" pitchFamily="18" charset="0"/>
+                  </a:rPr>
+                  <a:t> </a:t>
+                </a:r>
+                <a:r>
+                  <a:rPr lang="en-US" sz="2400" b="1" dirty="0">
+                    <a:solidFill>
+                      <a:schemeClr val="accent2">
+                        <a:lumMod val="75000"/>
+                      </a:schemeClr>
+                    </a:solidFill>
+                    <a:cs typeface="Times New Roman" panose="02020603050405020304" pitchFamily="18" charset="0"/>
+                  </a:rPr>
+                  <a:t>front door approach</a:t>
+                </a:r>
+                <a:r>
+                  <a:rPr lang="en-US" sz="2400" dirty="0">
+                    <a:cs typeface="Times New Roman" panose="02020603050405020304" pitchFamily="18" charset="0"/>
+                  </a:rPr>
+                  <a:t> – mimics an experiment</a:t>
+                </a:r>
+              </a:p>
+              <a:p>
+                <a:endParaRPr lang="en-US" sz="2400" b="1" dirty="0">
+                  <a:cs typeface="Times New Roman" panose="02020603050405020304" pitchFamily="18" charset="0"/>
+                </a:endParaRPr>
+              </a:p>
+              <a:p>
+                <a:endParaRPr lang="en-US" sz="2400" b="1" dirty="0">
+                  <a:cs typeface="Times New Roman" panose="02020603050405020304" pitchFamily="18" charset="0"/>
+                </a:endParaRPr>
+              </a:p>
+              <a:p>
+                <a:endParaRPr lang="en-US" sz="2400" b="1" dirty="0">
+                  <a:cs typeface="Times New Roman" panose="02020603050405020304" pitchFamily="18" charset="0"/>
+                </a:endParaRPr>
+              </a:p>
+              <a:p>
+                <a:endParaRPr lang="en-US" sz="2400" b="1" dirty="0">
+                  <a:cs typeface="Times New Roman" panose="02020603050405020304" pitchFamily="18" charset="0"/>
+                </a:endParaRPr>
+              </a:p>
+              <a:p>
+                <a:endParaRPr lang="en-US" sz="2400" b="1" dirty="0">
+                  <a:cs typeface="Times New Roman" panose="02020603050405020304" pitchFamily="18" charset="0"/>
+                </a:endParaRPr>
+              </a:p>
+              <a:p>
+                <a:pPr marL="0" indent="0">
+                  <a:buNone/>
+                </a:pPr>
+                <a:endParaRPr lang="en-US" sz="2400" b="1" dirty="0">
+                  <a:cs typeface="Times New Roman" panose="02020603050405020304" pitchFamily="18" charset="0"/>
+                </a:endParaRPr>
+              </a:p>
+            </p:txBody>
+          </p:sp>
+        </mc:Choice>
+        <mc:Fallback xmlns="">
+          <p:sp>
+            <p:nvSpPr>
+              <p:cNvPr id="3" name="Content Placeholder 2"/>
+              <p:cNvSpPr>
+                <a:spLocks noGrp="1" noRot="1" noChangeAspect="1" noMove="1" noResize="1" noEditPoints="1" noAdjustHandles="1" noChangeArrowheads="1" noChangeShapeType="1" noTextEdit="1"/>
+              </p:cNvSpPr>
+              <p:nvPr>
+                <p:ph idx="1"/>
+              </p:nvPr>
+            </p:nvSpPr>
+            <p:spPr>
+              <a:xfrm>
+                <a:off x="609601" y="1066801"/>
+                <a:ext cx="10439400" cy="5141388"/>
+              </a:xfrm>
+              <a:blipFill>
+                <a:blip r:embed="rId3"/>
+                <a:stretch>
+                  <a:fillRect l="-409" t="-1305"/>
+                </a:stretch>
+              </a:blipFill>
+            </p:spPr>
+            <p:txBody>
+              <a:bodyPr/>
+              <a:lstStyle/>
+              <a:p>
+                <a:r>
+                  <a:rPr lang="en-US">
+                    <a:noFill/>
+                  </a:rPr>
+                  <a:t> </a:t>
+                </a:r>
+              </a:p>
+            </p:txBody>
+          </p:sp>
+        </mc:Fallback>
+      </mc:AlternateContent>
+    </p:spTree>
+    <p:extLst>
+      <p:ext uri="{BB962C8B-B14F-4D97-AF65-F5344CB8AC3E}">
+        <p14:creationId xmlns:p14="http://schemas.microsoft.com/office/powerpoint/2010/main" val="2219273790"/>
+      </p:ext>
+    </p:extLst>
+  </p:cSld>
+  <p:clrMapOvr>
+    <a:masterClrMapping/>
+  </p:clrMapOvr>
+</p:sld>
+</file>
+
+<file path=ppt/slides/slide7.xml><?xml version="1.0" encoding="utf-8"?>
+<p:sld xmlns:a="http://schemas.openxmlformats.org/drawingml/2006/main" xmlns:r="http://schemas.openxmlformats.org/officeDocument/2006/relationships" xmlns:p="http://schemas.openxmlformats.org/presentationml/2006/main">
+  <p:cSld>
+    <p:spTree>
+      <p:nvGrpSpPr>
+        <p:cNvPr id="1" name=""/>
+        <p:cNvGrpSpPr/>
+        <p:nvPr/>
+      </p:nvGrpSpPr>
+      <p:grpSpPr>
+        <a:xfrm>
+          <a:off x="0" y="0"/>
+          <a:ext cx="0" cy="0"/>
+          <a:chOff x="0" y="0"/>
+          <a:chExt cx="0" cy="0"/>
+        </a:xfrm>
+      </p:grpSpPr>
+      <p:sp>
+        <p:nvSpPr>
+          <p:cNvPr id="2" name="Title 1"/>
+          <p:cNvSpPr>
+            <a:spLocks noGrp="1"/>
+          </p:cNvSpPr>
+          <p:nvPr>
+            <p:ph type="title"/>
+          </p:nvPr>
+        </p:nvSpPr>
+        <p:spPr>
+          <a:xfrm>
+            <a:off x="609600" y="337392"/>
+            <a:ext cx="10439400" cy="624840"/>
+          </a:xfrm>
+        </p:spPr>
+        <p:txBody>
+          <a:bodyPr>
+            <a:noAutofit/>
+          </a:bodyPr>
+          <a:lstStyle/>
+          <a:p>
+            <a:r>
+              <a:rPr lang="en-US" sz="3600" dirty="0">
+                <a:cs typeface="Times New Roman" panose="02020603050405020304" pitchFamily="18" charset="0"/>
+              </a:rPr>
+              <a:t>Open up the (Right) Gates!</a:t>
+            </a:r>
+            <a:endParaRPr lang="en-US" sz="3600" dirty="0">
+              <a:latin typeface="Times New Roman" panose="02020603050405020304" pitchFamily="18" charset="0"/>
+              <a:cs typeface="Times New Roman" panose="02020603050405020304" pitchFamily="18" charset="0"/>
+            </a:endParaRPr>
+          </a:p>
+        </p:txBody>
+      </p:sp>
+      <p:pic>
+        <p:nvPicPr>
+          <p:cNvPr id="1026" name="Picture 2">
+            <a:extLst>
+              <a:ext uri="{FF2B5EF4-FFF2-40B4-BE49-F238E27FC236}">
+                <a16:creationId xmlns:a16="http://schemas.microsoft.com/office/drawing/2014/main" id="{F08185DA-48EE-9634-6C1F-C3A8EA600A84}"/>
+              </a:ext>
+            </a:extLst>
+          </p:cNvPr>
+          <p:cNvPicPr>
+            <a:picLocks noGrp="1" noChangeAspect="1" noChangeArrowheads="1"/>
+          </p:cNvPicPr>
+          <p:nvPr>
+            <p:ph idx="1"/>
+          </p:nvPr>
+        </p:nvPicPr>
+        <p:blipFill rotWithShape="1">
+          <a:blip r:embed="rId3">
+            <a:extLst>
+              <a:ext uri="{28A0092B-C50C-407E-A947-70E740481C1C}">
+                <a14:useLocalDpi xmlns:a14="http://schemas.microsoft.com/office/drawing/2010/main" val="0"/>
+              </a:ext>
+            </a:extLst>
+          </a:blip>
+          <a:srcRect t="7664" b="10294"/>
+          <a:stretch>
+            <a:fillRect/>
+          </a:stretch>
+        </p:blipFill>
+        <p:spPr bwMode="auto">
+          <a:xfrm>
+            <a:off x="2857500" y="1007690"/>
+            <a:ext cx="6515100" cy="5697910"/>
+          </a:xfrm>
+          <a:prstGeom prst="rect">
+            <a:avLst/>
+          </a:prstGeom>
+          <a:noFill/>
+          <a:extLst>
+            <a:ext uri="{909E8E84-426E-40DD-AFC4-6F175D3DCCD1}">
+              <a14:hiddenFill xmlns:a14="http://schemas.microsoft.com/office/drawing/2010/main">
+                <a:solidFill>
+                  <a:srgbClr val="FFFFFF"/>
+                </a:solidFill>
+              </a14:hiddenFill>
+            </a:ext>
+          </a:extLst>
+        </p:spPr>
+      </p:pic>
+    </p:spTree>
+    <p:extLst>
+      <p:ext uri="{BB962C8B-B14F-4D97-AF65-F5344CB8AC3E}">
+        <p14:creationId xmlns:p14="http://schemas.microsoft.com/office/powerpoint/2010/main" val="2492239669"/>
+      </p:ext>
+    </p:extLst>
+  </p:cSld>
+  <p:clrMapOvr>
+    <a:masterClrMapping/>
+  </p:clrMapOvr>
+</p:sld>
+</file>
+
+<file path=ppt/slides/slide8.xml><?xml version="1.0" encoding="utf-8"?>
+<p:sld xmlns:a="http://schemas.openxmlformats.org/drawingml/2006/main" xmlns:r="http://schemas.openxmlformats.org/officeDocument/2006/relationships" xmlns:p="http://schemas.openxmlformats.org/presentationml/2006/main">
+  <p:cSld>
+    <p:spTree>
+      <p:nvGrpSpPr>
+        <p:cNvPr id="1" name=""/>
+        <p:cNvGrpSpPr/>
+        <p:nvPr/>
+      </p:nvGrpSpPr>
+      <p:grpSpPr>
+        <a:xfrm>
+          <a:off x="0" y="0"/>
+          <a:ext cx="0" cy="0"/>
+          <a:chOff x="0" y="0"/>
+          <a:chExt cx="0" cy="0"/>
+        </a:xfrm>
+      </p:grpSpPr>
+      <p:sp>
+        <p:nvSpPr>
           <p:cNvPr id="2" name="Title 1">
             <a:extLst>
               <a:ext uri="{FF2B5EF4-FFF2-40B4-BE49-F238E27FC236}">
@@ -21797,7 +22706,7 @@
 </p:sld>
 </file>
 
-<file path=ppt/slides/slide7.xml><?xml version="1.0" encoding="utf-8"?>
+<file path=ppt/slides/slide9.xml><?xml version="1.0" encoding="utf-8"?>
 <p:sld xmlns:a="http://schemas.openxmlformats.org/drawingml/2006/main" xmlns:r="http://schemas.openxmlformats.org/officeDocument/2006/relationships" xmlns:p="http://schemas.openxmlformats.org/presentationml/2006/main">
   <p:cSld>
     <p:spTree>
@@ -21930,471 +22839,6 @@
     <p:extLst>
       <p:ext uri="{BB962C8B-B14F-4D97-AF65-F5344CB8AC3E}">
         <p14:creationId xmlns:p14="http://schemas.microsoft.com/office/powerpoint/2010/main" val="437169700"/>
-      </p:ext>
-    </p:extLst>
-  </p:cSld>
-  <p:clrMapOvr>
-    <a:masterClrMapping/>
-  </p:clrMapOvr>
-</p:sld>
-</file>
-
-<file path=ppt/slides/slide8.xml><?xml version="1.0" encoding="utf-8"?>
-<p:sld xmlns:a="http://schemas.openxmlformats.org/drawingml/2006/main" xmlns:r="http://schemas.openxmlformats.org/officeDocument/2006/relationships" xmlns:p="http://schemas.openxmlformats.org/presentationml/2006/main">
-  <p:cSld>
-    <p:spTree>
-      <p:nvGrpSpPr>
-        <p:cNvPr id="1" name="">
-          <a:extLst>
-            <a:ext uri="{FF2B5EF4-FFF2-40B4-BE49-F238E27FC236}">
-              <a16:creationId xmlns:a16="http://schemas.microsoft.com/office/drawing/2014/main" id="{E6D34052-3A99-C47F-C81D-4933FA52DE96}"/>
-            </a:ext>
-          </a:extLst>
-        </p:cNvPr>
-        <p:cNvGrpSpPr/>
-        <p:nvPr/>
-      </p:nvGrpSpPr>
-      <p:grpSpPr>
-        <a:xfrm>
-          <a:off x="0" y="0"/>
-          <a:ext cx="0" cy="0"/>
-          <a:chOff x="0" y="0"/>
-          <a:chExt cx="0" cy="0"/>
-        </a:xfrm>
-      </p:grpSpPr>
-      <p:sp>
-        <p:nvSpPr>
-          <p:cNvPr id="2" name="Title 1">
-            <a:extLst>
-              <a:ext uri="{FF2B5EF4-FFF2-40B4-BE49-F238E27FC236}">
-                <a16:creationId xmlns:a16="http://schemas.microsoft.com/office/drawing/2014/main" id="{B5593B20-184E-07CC-CB9B-A0355C2A2978}"/>
-              </a:ext>
-            </a:extLst>
-          </p:cNvPr>
-          <p:cNvSpPr>
-            <a:spLocks noGrp="1"/>
-          </p:cNvSpPr>
-          <p:nvPr>
-            <p:ph type="title"/>
-          </p:nvPr>
-        </p:nvSpPr>
-        <p:spPr>
-          <a:xfrm>
-            <a:off x="609600" y="337392"/>
-            <a:ext cx="10439400" cy="624840"/>
-          </a:xfrm>
-        </p:spPr>
-        <p:txBody>
-          <a:bodyPr>
-            <a:noAutofit/>
-          </a:bodyPr>
-          <a:lstStyle/>
-          <a:p>
-            <a:r>
-              <a:rPr lang="en-US" sz="3600" dirty="0">
-                <a:latin typeface="Times New Roman" panose="02020603050405020304" pitchFamily="18" charset="0"/>
-                <a:cs typeface="Times New Roman" panose="02020603050405020304" pitchFamily="18" charset="0"/>
-              </a:rPr>
-              <a:t>Example: causal effect of </a:t>
-            </a:r>
-            <a:r>
-              <a:rPr lang="en-US" sz="3600" b="1" dirty="0">
-                <a:latin typeface="Times New Roman" panose="02020603050405020304" pitchFamily="18" charset="0"/>
-                <a:cs typeface="Times New Roman" panose="02020603050405020304" pitchFamily="18" charset="0"/>
-              </a:rPr>
-              <a:t>vaccines</a:t>
-            </a:r>
-            <a:endParaRPr lang="en-US" sz="3600" dirty="0">
-              <a:latin typeface="Times New Roman" panose="02020603050405020304" pitchFamily="18" charset="0"/>
-              <a:cs typeface="Times New Roman" panose="02020603050405020304" pitchFamily="18" charset="0"/>
-            </a:endParaRPr>
-          </a:p>
-        </p:txBody>
-      </p:sp>
-      <p:sp>
-        <p:nvSpPr>
-          <p:cNvPr id="3" name="Content Placeholder 2">
-            <a:extLst>
-              <a:ext uri="{FF2B5EF4-FFF2-40B4-BE49-F238E27FC236}">
-                <a16:creationId xmlns:a16="http://schemas.microsoft.com/office/drawing/2014/main" id="{E3658A05-C001-C142-C97D-3B20B07BBD64}"/>
-              </a:ext>
-            </a:extLst>
-          </p:cNvPr>
-          <p:cNvSpPr>
-            <a:spLocks noGrp="1"/>
-          </p:cNvSpPr>
-          <p:nvPr>
-            <p:ph idx="1"/>
-          </p:nvPr>
-        </p:nvSpPr>
-        <p:spPr>
-          <a:xfrm>
-            <a:off x="609601" y="1066801"/>
-            <a:ext cx="10439400" cy="5141388"/>
-          </a:xfrm>
-        </p:spPr>
-        <p:txBody>
-          <a:bodyPr>
-            <a:noAutofit/>
-          </a:bodyPr>
-          <a:lstStyle/>
-          <a:p>
-            <a:r>
-              <a:rPr lang="en-US" sz="2400" dirty="0">
-                <a:cs typeface="Times New Roman" panose="02020603050405020304" pitchFamily="18" charset="0"/>
-              </a:rPr>
-              <a:t>Why would estimating the effect of a vaccine be hard in observational data? </a:t>
-            </a:r>
-          </a:p>
-          <a:p>
-            <a:r>
-              <a:rPr lang="en-US" sz="2400" dirty="0">
-                <a:cs typeface="Times New Roman" panose="02020603050405020304" pitchFamily="18" charset="0"/>
-              </a:rPr>
-              <a:t>If you looked at a “naïve” estimate of vaccine effectiveness, what direction would you expect it to be biased? Why?</a:t>
-            </a:r>
-          </a:p>
-        </p:txBody>
-      </p:sp>
-      <p:pic>
-        <p:nvPicPr>
-          <p:cNvPr id="6" name="Picture 5">
-            <a:extLst>
-              <a:ext uri="{FF2B5EF4-FFF2-40B4-BE49-F238E27FC236}">
-                <a16:creationId xmlns:a16="http://schemas.microsoft.com/office/drawing/2014/main" id="{8824082D-C2F7-8F38-525A-ADD4607E0D35}"/>
-              </a:ext>
-            </a:extLst>
-          </p:cNvPr>
-          <p:cNvPicPr>
-            <a:picLocks noChangeAspect="1"/>
-          </p:cNvPicPr>
-          <p:nvPr/>
-        </p:nvPicPr>
-        <p:blipFill>
-          <a:blip r:embed="rId3"/>
-          <a:stretch>
-            <a:fillRect/>
-          </a:stretch>
-        </p:blipFill>
-        <p:spPr>
-          <a:xfrm>
-            <a:off x="304800" y="4246994"/>
-            <a:ext cx="10088383" cy="2248214"/>
-          </a:xfrm>
-          <a:prstGeom prst="rect">
-            <a:avLst/>
-          </a:prstGeom>
-        </p:spPr>
-      </p:pic>
-      <p:sp>
-        <p:nvSpPr>
-          <p:cNvPr id="4" name="TextBox 3">
-            <a:extLst>
-              <a:ext uri="{FF2B5EF4-FFF2-40B4-BE49-F238E27FC236}">
-                <a16:creationId xmlns:a16="http://schemas.microsoft.com/office/drawing/2014/main" id="{0D7C7ECD-AE1D-1F70-F56E-CE94719E25E8}"/>
-              </a:ext>
-            </a:extLst>
-          </p:cNvPr>
-          <p:cNvSpPr txBox="1"/>
-          <p:nvPr/>
-        </p:nvSpPr>
-        <p:spPr>
-          <a:xfrm>
-            <a:off x="2362200" y="2438400"/>
-            <a:ext cx="8030983" cy="1754326"/>
-          </a:xfrm>
-          <a:prstGeom prst="rect">
-            <a:avLst/>
-          </a:prstGeom>
-          <a:solidFill>
-            <a:schemeClr val="accent2">
-              <a:lumMod val="75000"/>
-            </a:schemeClr>
-          </a:solidFill>
-        </p:spPr>
-        <p:txBody>
-          <a:bodyPr wrap="square" rtlCol="0">
-            <a:spAutoFit/>
-          </a:bodyPr>
-          <a:lstStyle/>
-          <a:p>
-            <a:r>
-              <a:rPr lang="en-US" dirty="0">
-                <a:solidFill>
-                  <a:schemeClr val="bg1"/>
-                </a:solidFill>
-              </a:rPr>
-              <a:t>“Even after statistical control for various demographic variables and other medical conditions, elderly patients who receive the vaccine appear to be much healthier than apparently comparable unvaccinated patients. Strong evidence of this bias comes from an important epidemiologic study by Jackson et al</a:t>
-            </a:r>
-            <a:r>
-              <a:rPr lang="en-US" baseline="30000" dirty="0">
-                <a:solidFill>
-                  <a:schemeClr val="bg1"/>
-                </a:solidFill>
-                <a:hlinkClick r:id="rId4">
-                  <a:extLst>
-                    <a:ext uri="{A12FA001-AC4F-418D-AE19-62706E023703}">
-                      <ahyp:hlinkClr xmlns:ahyp="http://schemas.microsoft.com/office/drawing/2018/hyperlinkcolor" val="tx"/>
-                    </a:ext>
-                  </a:extLst>
-                </a:hlinkClick>
-              </a:rPr>
-              <a:t>2</a:t>
-            </a:r>
-            <a:r>
-              <a:rPr lang="en-US" dirty="0">
-                <a:solidFill>
-                  <a:schemeClr val="bg1"/>
-                </a:solidFill>
-              </a:rPr>
-              <a:t> in which the authors reported that a large beneficial effect of the vaccine is apparent before the influenza season begins.”</a:t>
-            </a:r>
-          </a:p>
-        </p:txBody>
-      </p:sp>
-    </p:spTree>
-    <p:extLst>
-      <p:ext uri="{BB962C8B-B14F-4D97-AF65-F5344CB8AC3E}">
-        <p14:creationId xmlns:p14="http://schemas.microsoft.com/office/powerpoint/2010/main" val="2572452947"/>
-      </p:ext>
-    </p:extLst>
-  </p:cSld>
-  <p:clrMapOvr>
-    <a:masterClrMapping/>
-  </p:clrMapOvr>
-</p:sld>
-</file>
-
-<file path=ppt/slides/slide9.xml><?xml version="1.0" encoding="utf-8"?>
-<p:sld xmlns:a="http://schemas.openxmlformats.org/drawingml/2006/main" xmlns:r="http://schemas.openxmlformats.org/officeDocument/2006/relationships" xmlns:p="http://schemas.openxmlformats.org/presentationml/2006/main">
-  <p:cSld>
-    <p:spTree>
-      <p:nvGrpSpPr>
-        <p:cNvPr id="1" name="">
-          <a:extLst>
-            <a:ext uri="{FF2B5EF4-FFF2-40B4-BE49-F238E27FC236}">
-              <a16:creationId xmlns:a16="http://schemas.microsoft.com/office/drawing/2014/main" id="{2C30FC21-4268-458A-B53E-C2D4E8FB9628}"/>
-            </a:ext>
-          </a:extLst>
-        </p:cNvPr>
-        <p:cNvGrpSpPr/>
-        <p:nvPr/>
-      </p:nvGrpSpPr>
-      <p:grpSpPr>
-        <a:xfrm>
-          <a:off x="0" y="0"/>
-          <a:ext cx="0" cy="0"/>
-          <a:chOff x="0" y="0"/>
-          <a:chExt cx="0" cy="0"/>
-        </a:xfrm>
-      </p:grpSpPr>
-      <p:sp>
-        <p:nvSpPr>
-          <p:cNvPr id="2" name="Title 1">
-            <a:extLst>
-              <a:ext uri="{FF2B5EF4-FFF2-40B4-BE49-F238E27FC236}">
-                <a16:creationId xmlns:a16="http://schemas.microsoft.com/office/drawing/2014/main" id="{31AFCF04-93D1-F563-B5EE-B6E5B0ECEE07}"/>
-              </a:ext>
-            </a:extLst>
-          </p:cNvPr>
-          <p:cNvSpPr>
-            <a:spLocks noGrp="1"/>
-          </p:cNvSpPr>
-          <p:nvPr>
-            <p:ph type="title"/>
-          </p:nvPr>
-        </p:nvSpPr>
-        <p:spPr>
-          <a:xfrm>
-            <a:off x="609600" y="337392"/>
-            <a:ext cx="10439400" cy="624840"/>
-          </a:xfrm>
-        </p:spPr>
-        <p:txBody>
-          <a:bodyPr>
-            <a:noAutofit/>
-          </a:bodyPr>
-          <a:lstStyle/>
-          <a:p>
-            <a:r>
-              <a:rPr lang="en-US" sz="3600" dirty="0">
-                <a:latin typeface="Times New Roman" panose="02020603050405020304" pitchFamily="18" charset="0"/>
-                <a:cs typeface="Times New Roman" panose="02020603050405020304" pitchFamily="18" charset="0"/>
-              </a:rPr>
-              <a:t>Example: causal effect of </a:t>
-            </a:r>
-            <a:r>
-              <a:rPr lang="en-US" sz="3600" b="1" dirty="0">
-                <a:latin typeface="Times New Roman" panose="02020603050405020304" pitchFamily="18" charset="0"/>
-                <a:cs typeface="Times New Roman" panose="02020603050405020304" pitchFamily="18" charset="0"/>
-              </a:rPr>
-              <a:t>vaccines</a:t>
-            </a:r>
-            <a:endParaRPr lang="en-US" sz="3600" dirty="0">
-              <a:latin typeface="Times New Roman" panose="02020603050405020304" pitchFamily="18" charset="0"/>
-              <a:cs typeface="Times New Roman" panose="02020603050405020304" pitchFamily="18" charset="0"/>
-            </a:endParaRPr>
-          </a:p>
-        </p:txBody>
-      </p:sp>
-      <p:sp>
-        <p:nvSpPr>
-          <p:cNvPr id="3" name="Content Placeholder 2">
-            <a:extLst>
-              <a:ext uri="{FF2B5EF4-FFF2-40B4-BE49-F238E27FC236}">
-                <a16:creationId xmlns:a16="http://schemas.microsoft.com/office/drawing/2014/main" id="{8A2426E1-1760-3E0B-50CF-49AA1780C886}"/>
-              </a:ext>
-            </a:extLst>
-          </p:cNvPr>
-          <p:cNvSpPr>
-            <a:spLocks noGrp="1"/>
-          </p:cNvSpPr>
-          <p:nvPr>
-            <p:ph idx="1"/>
-          </p:nvPr>
-        </p:nvSpPr>
-        <p:spPr>
-          <a:xfrm>
-            <a:off x="609601" y="1066801"/>
-            <a:ext cx="10439400" cy="5141388"/>
-          </a:xfrm>
-        </p:spPr>
-        <p:txBody>
-          <a:bodyPr>
-            <a:noAutofit/>
-          </a:bodyPr>
-          <a:lstStyle/>
-          <a:p>
-            <a:r>
-              <a:rPr lang="en-US" sz="2400" dirty="0">
-                <a:cs typeface="Times New Roman" panose="02020603050405020304" pitchFamily="18" charset="0"/>
-              </a:rPr>
-              <a:t>Why would estimating the effect of a vaccine be hard in observational data? </a:t>
-            </a:r>
-          </a:p>
-          <a:p>
-            <a:r>
-              <a:rPr lang="en-US" sz="2400" dirty="0">
-                <a:cs typeface="Times New Roman" panose="02020603050405020304" pitchFamily="18" charset="0"/>
-              </a:rPr>
-              <a:t>If you looked at a “naïve” estimate of vaccine effectiveness, what direction would you expect it to be biased? Why?</a:t>
-            </a:r>
-          </a:p>
-          <a:p>
-            <a:endParaRPr lang="en-US" sz="2400" dirty="0">
-              <a:cs typeface="Times New Roman" panose="02020603050405020304" pitchFamily="18" charset="0"/>
-            </a:endParaRPr>
-          </a:p>
-          <a:p>
-            <a:r>
-              <a:rPr lang="en-US" sz="2400" dirty="0">
-                <a:cs typeface="Times New Roman" panose="02020603050405020304" pitchFamily="18" charset="0"/>
-              </a:rPr>
-              <a:t>What does this study look at (outcomes, population)? </a:t>
-            </a:r>
-          </a:p>
-          <a:p>
-            <a:r>
-              <a:rPr lang="en-US" sz="2400" b="1" dirty="0">
-                <a:cs typeface="Times New Roman" panose="02020603050405020304" pitchFamily="18" charset="0"/>
-              </a:rPr>
-              <a:t>What is the selection problem that they are addressing? Why is this endogeneity? </a:t>
-            </a:r>
-          </a:p>
-          <a:p>
-            <a:r>
-              <a:rPr lang="en-US" sz="2400" dirty="0">
-                <a:cs typeface="Times New Roman" panose="02020603050405020304" pitchFamily="18" charset="0"/>
-              </a:rPr>
-              <a:t>Note: abstract says “uses logistic regression IV to remove the effect of selection bias” is </a:t>
-            </a:r>
-            <a:r>
-              <a:rPr lang="en-US" sz="2400" b="1" dirty="0">
-                <a:cs typeface="Times New Roman" panose="02020603050405020304" pitchFamily="18" charset="0"/>
-              </a:rPr>
-              <a:t>not correct</a:t>
-            </a:r>
-            <a:r>
-              <a:rPr lang="en-US" sz="2400" dirty="0">
-                <a:cs typeface="Times New Roman" panose="02020603050405020304" pitchFamily="18" charset="0"/>
-              </a:rPr>
-              <a:t>. Also says “IV methods control for overt and hidden biases in observational studies.” This is also </a:t>
-            </a:r>
-            <a:r>
-              <a:rPr lang="en-US" sz="2400" b="1" dirty="0">
-                <a:cs typeface="Times New Roman" panose="02020603050405020304" pitchFamily="18" charset="0"/>
-              </a:rPr>
-              <a:t>not correct </a:t>
-            </a:r>
-          </a:p>
-          <a:p>
-            <a:r>
-              <a:rPr lang="en-US" sz="2400" dirty="0">
-                <a:cs typeface="Times New Roman" panose="02020603050405020304" pitchFamily="18" charset="0"/>
-              </a:rPr>
-              <a:t>What we are doing is approximating a quasi-experiment and identifying a causal effect </a:t>
-            </a:r>
-            <a:r>
-              <a:rPr lang="en-US" sz="2400" u="sng" dirty="0">
-                <a:cs typeface="Times New Roman" panose="02020603050405020304" pitchFamily="18" charset="0"/>
-              </a:rPr>
-              <a:t>if that approximation is done correctly</a:t>
-            </a:r>
-            <a:endParaRPr lang="en-US" sz="2400" dirty="0">
-              <a:cs typeface="Times New Roman" panose="02020603050405020304" pitchFamily="18" charset="0"/>
-            </a:endParaRPr>
-          </a:p>
-          <a:p>
-            <a:endParaRPr lang="en-US" sz="2400" dirty="0">
-              <a:cs typeface="Times New Roman" panose="02020603050405020304" pitchFamily="18" charset="0"/>
-            </a:endParaRPr>
-          </a:p>
-          <a:p>
-            <a:endParaRPr lang="en-US" sz="2400" dirty="0">
-              <a:cs typeface="Times New Roman" panose="02020603050405020304" pitchFamily="18" charset="0"/>
-            </a:endParaRPr>
-          </a:p>
-          <a:p>
-            <a:endParaRPr lang="en-US" sz="2400" dirty="0">
-              <a:cs typeface="Times New Roman" panose="02020603050405020304" pitchFamily="18" charset="0"/>
-            </a:endParaRPr>
-          </a:p>
-        </p:txBody>
-      </p:sp>
-      <p:pic>
-        <p:nvPicPr>
-          <p:cNvPr id="6" name="Picture 5">
-            <a:extLst>
-              <a:ext uri="{FF2B5EF4-FFF2-40B4-BE49-F238E27FC236}">
-                <a16:creationId xmlns:a16="http://schemas.microsoft.com/office/drawing/2014/main" id="{FEC8B3C4-0EE5-83AB-2AB4-828063B60913}"/>
-              </a:ext>
-            </a:extLst>
-          </p:cNvPr>
-          <p:cNvPicPr>
-            <a:picLocks noChangeAspect="1"/>
-          </p:cNvPicPr>
-          <p:nvPr/>
-        </p:nvPicPr>
-        <p:blipFill>
-          <a:blip r:embed="rId3"/>
-          <a:stretch>
-            <a:fillRect/>
-          </a:stretch>
-        </p:blipFill>
-        <p:spPr>
-          <a:xfrm>
-            <a:off x="584200" y="337392"/>
-            <a:ext cx="10088383" cy="2248214"/>
-          </a:xfrm>
-          <a:prstGeom prst="rect">
-            <a:avLst/>
-          </a:prstGeom>
-        </p:spPr>
-      </p:pic>
-    </p:spTree>
-    <p:extLst>
-      <p:ext uri="{BB962C8B-B14F-4D97-AF65-F5344CB8AC3E}">
-        <p14:creationId xmlns:p14="http://schemas.microsoft.com/office/powerpoint/2010/main" val="445485147"/>
       </p:ext>
     </p:extLst>
   </p:cSld>
